--- a/lessons/gospel-alignment.pptx
+++ b/lessons/gospel-alignment.pptx
@@ -121,4023 +121,6 @@
     </p:ext>
   </p:extLst>
 </p:presentation>
-</file>
-
-<file path=ppt/diagrams/colors1.xml><?xml version="1.0" encoding="utf-8"?>
-<dgm:colorsDef xmlns:dgm="http://schemas.openxmlformats.org/drawingml/2006/diagram" xmlns:a="http://schemas.openxmlformats.org/drawingml/2006/main" uniqueId="urn:microsoft.com/office/officeart/2005/8/colors/accent1_2">
-  <dgm:title val=""/>
-  <dgm:desc val=""/>
-  <dgm:catLst>
-    <dgm:cat type="accent1" pri="11200"/>
-  </dgm:catLst>
-  <dgm:styleLbl name="node0">
-    <dgm:fillClrLst meth="repeat">
-      <a:schemeClr val="accent1"/>
-    </dgm:fillClrLst>
-    <dgm:linClrLst meth="repeat">
-      <a:schemeClr val="lt1"/>
-    </dgm:linClrLst>
-    <dgm:effectClrLst/>
-    <dgm:txLinClrLst/>
-    <dgm:txFillClrLst/>
-    <dgm:txEffectClrLst/>
-  </dgm:styleLbl>
-  <dgm:styleLbl name="alignNode1">
-    <dgm:fillClrLst meth="repeat">
-      <a:schemeClr val="accent1"/>
-    </dgm:fillClrLst>
-    <dgm:linClrLst meth="repeat">
-      <a:schemeClr val="accent1"/>
-    </dgm:linClrLst>
-    <dgm:effectClrLst/>
-    <dgm:txLinClrLst/>
-    <dgm:txFillClrLst/>
-    <dgm:txEffectClrLst/>
-  </dgm:styleLbl>
-  <dgm:styleLbl name="node1">
-    <dgm:fillClrLst meth="repeat">
-      <a:schemeClr val="accent1"/>
-    </dgm:fillClrLst>
-    <dgm:linClrLst meth="repeat">
-      <a:schemeClr val="lt1"/>
-    </dgm:linClrLst>
-    <dgm:effectClrLst/>
-    <dgm:txLinClrLst/>
-    <dgm:txFillClrLst/>
-    <dgm:txEffectClrLst/>
-  </dgm:styleLbl>
-  <dgm:styleLbl name="lnNode1">
-    <dgm:fillClrLst meth="repeat">
-      <a:schemeClr val="accent1"/>
-    </dgm:fillClrLst>
-    <dgm:linClrLst meth="repeat">
-      <a:schemeClr val="lt1"/>
-    </dgm:linClrLst>
-    <dgm:effectClrLst/>
-    <dgm:txLinClrLst/>
-    <dgm:txFillClrLst/>
-    <dgm:txEffectClrLst/>
-  </dgm:styleLbl>
-  <dgm:styleLbl name="vennNode1">
-    <dgm:fillClrLst meth="repeat">
-      <a:schemeClr val="accent1">
-        <a:alpha val="50000"/>
-      </a:schemeClr>
-    </dgm:fillClrLst>
-    <dgm:linClrLst meth="repeat">
-      <a:schemeClr val="lt1"/>
-    </dgm:linClrLst>
-    <dgm:effectClrLst/>
-    <dgm:txLinClrLst/>
-    <dgm:txFillClrLst/>
-    <dgm:txEffectClrLst/>
-  </dgm:styleLbl>
-  <dgm:styleLbl name="node2">
-    <dgm:fillClrLst meth="repeat">
-      <a:schemeClr val="accent1"/>
-    </dgm:fillClrLst>
-    <dgm:linClrLst meth="repeat">
-      <a:schemeClr val="lt1"/>
-    </dgm:linClrLst>
-    <dgm:effectClrLst/>
-    <dgm:txLinClrLst/>
-    <dgm:txFillClrLst/>
-    <dgm:txEffectClrLst/>
-  </dgm:styleLbl>
-  <dgm:styleLbl name="node3">
-    <dgm:fillClrLst meth="repeat">
-      <a:schemeClr val="accent1"/>
-    </dgm:fillClrLst>
-    <dgm:linClrLst meth="repeat">
-      <a:schemeClr val="lt1"/>
-    </dgm:linClrLst>
-    <dgm:effectClrLst/>
-    <dgm:txLinClrLst/>
-    <dgm:txFillClrLst/>
-    <dgm:txEffectClrLst/>
-  </dgm:styleLbl>
-  <dgm:styleLbl name="node4">
-    <dgm:fillClrLst meth="repeat">
-      <a:schemeClr val="accent1"/>
-    </dgm:fillClrLst>
-    <dgm:linClrLst meth="repeat">
-      <a:schemeClr val="lt1"/>
-    </dgm:linClrLst>
-    <dgm:effectClrLst/>
-    <dgm:txLinClrLst/>
-    <dgm:txFillClrLst/>
-    <dgm:txEffectClrLst/>
-  </dgm:styleLbl>
-  <dgm:styleLbl name="fgImgPlace1">
-    <dgm:fillClrLst meth="repeat">
-      <a:schemeClr val="accent1">
-        <a:tint val="50000"/>
-      </a:schemeClr>
-    </dgm:fillClrLst>
-    <dgm:linClrLst meth="repeat">
-      <a:schemeClr val="lt1"/>
-    </dgm:linClrLst>
-    <dgm:effectClrLst/>
-    <dgm:txLinClrLst/>
-    <dgm:txFillClrLst meth="repeat">
-      <a:schemeClr val="lt1"/>
-    </dgm:txFillClrLst>
-    <dgm:txEffectClrLst/>
-  </dgm:styleLbl>
-  <dgm:styleLbl name="alignImgPlace1">
-    <dgm:fillClrLst meth="repeat">
-      <a:schemeClr val="accent1">
-        <a:tint val="50000"/>
-      </a:schemeClr>
-    </dgm:fillClrLst>
-    <dgm:linClrLst meth="repeat">
-      <a:schemeClr val="lt1"/>
-    </dgm:linClrLst>
-    <dgm:effectClrLst/>
-    <dgm:txLinClrLst/>
-    <dgm:txFillClrLst meth="repeat">
-      <a:schemeClr val="lt1"/>
-    </dgm:txFillClrLst>
-    <dgm:txEffectClrLst/>
-  </dgm:styleLbl>
-  <dgm:styleLbl name="bgImgPlace1">
-    <dgm:fillClrLst meth="repeat">
-      <a:schemeClr val="accent1">
-        <a:tint val="50000"/>
-      </a:schemeClr>
-    </dgm:fillClrLst>
-    <dgm:linClrLst meth="repeat">
-      <a:schemeClr val="lt1"/>
-    </dgm:linClrLst>
-    <dgm:effectClrLst/>
-    <dgm:txLinClrLst/>
-    <dgm:txFillClrLst meth="repeat">
-      <a:schemeClr val="lt1"/>
-    </dgm:txFillClrLst>
-    <dgm:txEffectClrLst/>
-  </dgm:styleLbl>
-  <dgm:styleLbl name="sibTrans2D1">
-    <dgm:fillClrLst meth="repeat">
-      <a:schemeClr val="accent1">
-        <a:tint val="60000"/>
-      </a:schemeClr>
-    </dgm:fillClrLst>
-    <dgm:linClrLst meth="repeat">
-      <a:schemeClr val="accent1">
-        <a:tint val="60000"/>
-      </a:schemeClr>
-    </dgm:linClrLst>
-    <dgm:effectClrLst/>
-    <dgm:txLinClrLst/>
-    <dgm:txFillClrLst/>
-    <dgm:txEffectClrLst/>
-  </dgm:styleLbl>
-  <dgm:styleLbl name="fgSibTrans2D1">
-    <dgm:fillClrLst meth="repeat">
-      <a:schemeClr val="accent1">
-        <a:tint val="60000"/>
-      </a:schemeClr>
-    </dgm:fillClrLst>
-    <dgm:linClrLst meth="repeat">
-      <a:schemeClr val="accent1">
-        <a:tint val="60000"/>
-      </a:schemeClr>
-    </dgm:linClrLst>
-    <dgm:effectClrLst/>
-    <dgm:txLinClrLst/>
-    <dgm:txFillClrLst/>
-    <dgm:txEffectClrLst/>
-  </dgm:styleLbl>
-  <dgm:styleLbl name="bgSibTrans2D1">
-    <dgm:fillClrLst meth="repeat">
-      <a:schemeClr val="accent1">
-        <a:tint val="60000"/>
-      </a:schemeClr>
-    </dgm:fillClrLst>
-    <dgm:linClrLst meth="repeat">
-      <a:schemeClr val="accent1">
-        <a:tint val="60000"/>
-      </a:schemeClr>
-    </dgm:linClrLst>
-    <dgm:effectClrLst/>
-    <dgm:txLinClrLst/>
-    <dgm:txFillClrLst/>
-    <dgm:txEffectClrLst/>
-  </dgm:styleLbl>
-  <dgm:styleLbl name="sibTrans1D1">
-    <dgm:fillClrLst meth="repeat">
-      <a:schemeClr val="accent1"/>
-    </dgm:fillClrLst>
-    <dgm:linClrLst meth="repeat">
-      <a:schemeClr val="accent1"/>
-    </dgm:linClrLst>
-    <dgm:effectClrLst/>
-    <dgm:txLinClrLst/>
-    <dgm:txFillClrLst meth="repeat">
-      <a:schemeClr val="tx1"/>
-    </dgm:txFillClrLst>
-    <dgm:txEffectClrLst/>
-  </dgm:styleLbl>
-  <dgm:styleLbl name="callout">
-    <dgm:fillClrLst meth="repeat">
-      <a:schemeClr val="accent1"/>
-    </dgm:fillClrLst>
-    <dgm:linClrLst meth="repeat">
-      <a:schemeClr val="accent1">
-        <a:tint val="50000"/>
-      </a:schemeClr>
-    </dgm:linClrLst>
-    <dgm:effectClrLst/>
-    <dgm:txLinClrLst/>
-    <dgm:txFillClrLst meth="repeat">
-      <a:schemeClr val="tx1"/>
-    </dgm:txFillClrLst>
-    <dgm:txEffectClrLst/>
-  </dgm:styleLbl>
-  <dgm:styleLbl name="asst0">
-    <dgm:fillClrLst meth="repeat">
-      <a:schemeClr val="accent1"/>
-    </dgm:fillClrLst>
-    <dgm:linClrLst meth="repeat">
-      <a:schemeClr val="lt1"/>
-    </dgm:linClrLst>
-    <dgm:effectClrLst/>
-    <dgm:txLinClrLst/>
-    <dgm:txFillClrLst/>
-    <dgm:txEffectClrLst/>
-  </dgm:styleLbl>
-  <dgm:styleLbl name="asst1">
-    <dgm:fillClrLst meth="repeat">
-      <a:schemeClr val="accent1"/>
-    </dgm:fillClrLst>
-    <dgm:linClrLst meth="repeat">
-      <a:schemeClr val="lt1"/>
-    </dgm:linClrLst>
-    <dgm:effectClrLst/>
-    <dgm:txLinClrLst/>
-    <dgm:txFillClrLst/>
-    <dgm:txEffectClrLst/>
-  </dgm:styleLbl>
-  <dgm:styleLbl name="asst2">
-    <dgm:fillClrLst meth="repeat">
-      <a:schemeClr val="accent1"/>
-    </dgm:fillClrLst>
-    <dgm:linClrLst meth="repeat">
-      <a:schemeClr val="lt1"/>
-    </dgm:linClrLst>
-    <dgm:effectClrLst/>
-    <dgm:txLinClrLst/>
-    <dgm:txFillClrLst/>
-    <dgm:txEffectClrLst/>
-  </dgm:styleLbl>
-  <dgm:styleLbl name="asst3">
-    <dgm:fillClrLst meth="repeat">
-      <a:schemeClr val="accent1"/>
-    </dgm:fillClrLst>
-    <dgm:linClrLst meth="repeat">
-      <a:schemeClr val="lt1"/>
-    </dgm:linClrLst>
-    <dgm:effectClrLst/>
-    <dgm:txLinClrLst/>
-    <dgm:txFillClrLst/>
-    <dgm:txEffectClrLst/>
-  </dgm:styleLbl>
-  <dgm:styleLbl name="asst4">
-    <dgm:fillClrLst meth="repeat">
-      <a:schemeClr val="accent1"/>
-    </dgm:fillClrLst>
-    <dgm:linClrLst meth="repeat">
-      <a:schemeClr val="lt1"/>
-    </dgm:linClrLst>
-    <dgm:effectClrLst/>
-    <dgm:txLinClrLst/>
-    <dgm:txFillClrLst/>
-    <dgm:txEffectClrLst/>
-  </dgm:styleLbl>
-  <dgm:styleLbl name="parChTrans2D1">
-    <dgm:fillClrLst meth="repeat">
-      <a:schemeClr val="accent1">
-        <a:tint val="60000"/>
-      </a:schemeClr>
-    </dgm:fillClrLst>
-    <dgm:linClrLst meth="repeat">
-      <a:schemeClr val="accent1">
-        <a:tint val="60000"/>
-      </a:schemeClr>
-    </dgm:linClrLst>
-    <dgm:effectClrLst/>
-    <dgm:txLinClrLst/>
-    <dgm:txFillClrLst meth="repeat">
-      <a:schemeClr val="lt1"/>
-    </dgm:txFillClrLst>
-    <dgm:txEffectClrLst/>
-  </dgm:styleLbl>
-  <dgm:styleLbl name="parChTrans2D2">
-    <dgm:fillClrLst meth="repeat">
-      <a:schemeClr val="accent1"/>
-    </dgm:fillClrLst>
-    <dgm:linClrLst meth="repeat">
-      <a:schemeClr val="accent1"/>
-    </dgm:linClrLst>
-    <dgm:effectClrLst/>
-    <dgm:txLinClrLst/>
-    <dgm:txFillClrLst meth="repeat">
-      <a:schemeClr val="lt1"/>
-    </dgm:txFillClrLst>
-    <dgm:txEffectClrLst/>
-  </dgm:styleLbl>
-  <dgm:styleLbl name="parChTrans2D3">
-    <dgm:fillClrLst meth="repeat">
-      <a:schemeClr val="accent1"/>
-    </dgm:fillClrLst>
-    <dgm:linClrLst meth="repeat">
-      <a:schemeClr val="accent1"/>
-    </dgm:linClrLst>
-    <dgm:effectClrLst/>
-    <dgm:txLinClrLst/>
-    <dgm:txFillClrLst meth="repeat">
-      <a:schemeClr val="lt1"/>
-    </dgm:txFillClrLst>
-    <dgm:txEffectClrLst/>
-  </dgm:styleLbl>
-  <dgm:styleLbl name="parChTrans2D4">
-    <dgm:fillClrLst meth="repeat">
-      <a:schemeClr val="accent1"/>
-    </dgm:fillClrLst>
-    <dgm:linClrLst meth="repeat">
-      <a:schemeClr val="accent1"/>
-    </dgm:linClrLst>
-    <dgm:effectClrLst/>
-    <dgm:txLinClrLst/>
-    <dgm:txFillClrLst meth="repeat">
-      <a:schemeClr val="lt1"/>
-    </dgm:txFillClrLst>
-    <dgm:txEffectClrLst/>
-  </dgm:styleLbl>
-  <dgm:styleLbl name="parChTrans1D1">
-    <dgm:fillClrLst meth="repeat">
-      <a:schemeClr val="accent1"/>
-    </dgm:fillClrLst>
-    <dgm:linClrLst meth="repeat">
-      <a:schemeClr val="accent1">
-        <a:shade val="60000"/>
-      </a:schemeClr>
-    </dgm:linClrLst>
-    <dgm:effectClrLst/>
-    <dgm:txLinClrLst/>
-    <dgm:txFillClrLst meth="repeat">
-      <a:schemeClr val="tx1"/>
-    </dgm:txFillClrLst>
-    <dgm:txEffectClrLst/>
-  </dgm:styleLbl>
-  <dgm:styleLbl name="parChTrans1D2">
-    <dgm:fillClrLst meth="repeat">
-      <a:schemeClr val="accent1"/>
-    </dgm:fillClrLst>
-    <dgm:linClrLst meth="repeat">
-      <a:schemeClr val="accent1">
-        <a:shade val="60000"/>
-      </a:schemeClr>
-    </dgm:linClrLst>
-    <dgm:effectClrLst/>
-    <dgm:txLinClrLst/>
-    <dgm:txFillClrLst meth="repeat">
-      <a:schemeClr val="tx1"/>
-    </dgm:txFillClrLst>
-    <dgm:txEffectClrLst/>
-  </dgm:styleLbl>
-  <dgm:styleLbl name="parChTrans1D3">
-    <dgm:fillClrLst meth="repeat">
-      <a:schemeClr val="accent1"/>
-    </dgm:fillClrLst>
-    <dgm:linClrLst meth="repeat">
-      <a:schemeClr val="accent1">
-        <a:shade val="80000"/>
-      </a:schemeClr>
-    </dgm:linClrLst>
-    <dgm:effectClrLst/>
-    <dgm:txLinClrLst/>
-    <dgm:txFillClrLst meth="repeat">
-      <a:schemeClr val="tx1"/>
-    </dgm:txFillClrLst>
-    <dgm:txEffectClrLst/>
-  </dgm:styleLbl>
-  <dgm:styleLbl name="parChTrans1D4">
-    <dgm:fillClrLst meth="repeat">
-      <a:schemeClr val="accent1"/>
-    </dgm:fillClrLst>
-    <dgm:linClrLst meth="repeat">
-      <a:schemeClr val="accent1">
-        <a:shade val="80000"/>
-      </a:schemeClr>
-    </dgm:linClrLst>
-    <dgm:effectClrLst/>
-    <dgm:txLinClrLst/>
-    <dgm:txFillClrLst meth="repeat">
-      <a:schemeClr val="tx1"/>
-    </dgm:txFillClrLst>
-    <dgm:txEffectClrLst/>
-  </dgm:styleLbl>
-  <dgm:styleLbl name="fgAcc1">
-    <dgm:fillClrLst meth="repeat">
-      <a:schemeClr val="lt1">
-        <a:alpha val="90000"/>
-      </a:schemeClr>
-    </dgm:fillClrLst>
-    <dgm:linClrLst meth="repeat">
-      <a:schemeClr val="accent1"/>
-    </dgm:linClrLst>
-    <dgm:effectClrLst/>
-    <dgm:txLinClrLst/>
-    <dgm:txFillClrLst meth="repeat">
-      <a:schemeClr val="dk1"/>
-    </dgm:txFillClrLst>
-    <dgm:txEffectClrLst/>
-  </dgm:styleLbl>
-  <dgm:styleLbl name="conFgAcc1">
-    <dgm:fillClrLst meth="repeat">
-      <a:schemeClr val="lt1">
-        <a:alpha val="90000"/>
-      </a:schemeClr>
-    </dgm:fillClrLst>
-    <dgm:linClrLst meth="repeat">
-      <a:schemeClr val="accent1"/>
-    </dgm:linClrLst>
-    <dgm:effectClrLst/>
-    <dgm:txLinClrLst/>
-    <dgm:txFillClrLst meth="repeat">
-      <a:schemeClr val="dk1"/>
-    </dgm:txFillClrLst>
-    <dgm:txEffectClrLst/>
-  </dgm:styleLbl>
-  <dgm:styleLbl name="alignAcc1">
-    <dgm:fillClrLst meth="repeat">
-      <a:schemeClr val="lt1">
-        <a:alpha val="90000"/>
-      </a:schemeClr>
-    </dgm:fillClrLst>
-    <dgm:linClrLst meth="repeat">
-      <a:schemeClr val="accent1"/>
-    </dgm:linClrLst>
-    <dgm:effectClrLst/>
-    <dgm:txLinClrLst/>
-    <dgm:txFillClrLst meth="repeat">
-      <a:schemeClr val="dk1"/>
-    </dgm:txFillClrLst>
-    <dgm:txEffectClrLst/>
-  </dgm:styleLbl>
-  <dgm:styleLbl name="trAlignAcc1">
-    <dgm:fillClrLst meth="repeat">
-      <a:schemeClr val="lt1">
-        <a:alpha val="40000"/>
-      </a:schemeClr>
-    </dgm:fillClrLst>
-    <dgm:linClrLst meth="repeat">
-      <a:schemeClr val="accent1"/>
-    </dgm:linClrLst>
-    <dgm:effectClrLst/>
-    <dgm:txLinClrLst/>
-    <dgm:txFillClrLst meth="repeat">
-      <a:schemeClr val="dk1"/>
-    </dgm:txFillClrLst>
-    <dgm:txEffectClrLst/>
-  </dgm:styleLbl>
-  <dgm:styleLbl name="bgAcc1">
-    <dgm:fillClrLst meth="repeat">
-      <a:schemeClr val="lt1">
-        <a:alpha val="90000"/>
-      </a:schemeClr>
-    </dgm:fillClrLst>
-    <dgm:linClrLst meth="repeat">
-      <a:schemeClr val="accent1"/>
-    </dgm:linClrLst>
-    <dgm:effectClrLst/>
-    <dgm:txLinClrLst/>
-    <dgm:txFillClrLst meth="repeat">
-      <a:schemeClr val="dk1"/>
-    </dgm:txFillClrLst>
-    <dgm:txEffectClrLst/>
-  </dgm:styleLbl>
-  <dgm:styleLbl name="solidFgAcc1">
-    <dgm:fillClrLst meth="repeat">
-      <a:schemeClr val="lt1"/>
-    </dgm:fillClrLst>
-    <dgm:linClrLst meth="repeat">
-      <a:schemeClr val="accent1"/>
-    </dgm:linClrLst>
-    <dgm:effectClrLst/>
-    <dgm:txLinClrLst/>
-    <dgm:txFillClrLst meth="repeat">
-      <a:schemeClr val="dk1"/>
-    </dgm:txFillClrLst>
-    <dgm:txEffectClrLst/>
-  </dgm:styleLbl>
-  <dgm:styleLbl name="solidAlignAcc1">
-    <dgm:fillClrLst meth="repeat">
-      <a:schemeClr val="lt1"/>
-    </dgm:fillClrLst>
-    <dgm:linClrLst meth="repeat">
-      <a:schemeClr val="accent1"/>
-    </dgm:linClrLst>
-    <dgm:effectClrLst/>
-    <dgm:txLinClrLst/>
-    <dgm:txFillClrLst meth="repeat">
-      <a:schemeClr val="dk1"/>
-    </dgm:txFillClrLst>
-    <dgm:txEffectClrLst/>
-  </dgm:styleLbl>
-  <dgm:styleLbl name="solidBgAcc1">
-    <dgm:fillClrLst meth="repeat">
-      <a:schemeClr val="lt1"/>
-    </dgm:fillClrLst>
-    <dgm:linClrLst meth="repeat">
-      <a:schemeClr val="accent1"/>
-    </dgm:linClrLst>
-    <dgm:effectClrLst/>
-    <dgm:txLinClrLst/>
-    <dgm:txFillClrLst meth="repeat">
-      <a:schemeClr val="dk1"/>
-    </dgm:txFillClrLst>
-    <dgm:txEffectClrLst/>
-  </dgm:styleLbl>
-  <dgm:styleLbl name="fgAccFollowNode1">
-    <dgm:fillClrLst meth="repeat">
-      <a:schemeClr val="accent1">
-        <a:alpha val="90000"/>
-        <a:tint val="40000"/>
-      </a:schemeClr>
-    </dgm:fillClrLst>
-    <dgm:linClrLst meth="repeat">
-      <a:schemeClr val="accent1">
-        <a:alpha val="90000"/>
-        <a:tint val="40000"/>
-      </a:schemeClr>
-    </dgm:linClrLst>
-    <dgm:effectClrLst/>
-    <dgm:txLinClrLst/>
-    <dgm:txFillClrLst meth="repeat">
-      <a:schemeClr val="dk1"/>
-    </dgm:txFillClrLst>
-    <dgm:txEffectClrLst/>
-  </dgm:styleLbl>
-  <dgm:styleLbl name="alignAccFollowNode1">
-    <dgm:fillClrLst meth="repeat">
-      <a:schemeClr val="accent1">
-        <a:alpha val="90000"/>
-        <a:tint val="40000"/>
-      </a:schemeClr>
-    </dgm:fillClrLst>
-    <dgm:linClrLst meth="repeat">
-      <a:schemeClr val="accent1">
-        <a:alpha val="90000"/>
-        <a:tint val="40000"/>
-      </a:schemeClr>
-    </dgm:linClrLst>
-    <dgm:effectClrLst/>
-    <dgm:txLinClrLst/>
-    <dgm:txFillClrLst meth="repeat">
-      <a:schemeClr val="dk1"/>
-    </dgm:txFillClrLst>
-    <dgm:txEffectClrLst/>
-  </dgm:styleLbl>
-  <dgm:styleLbl name="bgAccFollowNode1">
-    <dgm:fillClrLst meth="repeat">
-      <a:schemeClr val="accent1">
-        <a:alpha val="90000"/>
-        <a:tint val="40000"/>
-      </a:schemeClr>
-    </dgm:fillClrLst>
-    <dgm:linClrLst meth="repeat">
-      <a:schemeClr val="accent1">
-        <a:alpha val="90000"/>
-        <a:tint val="40000"/>
-      </a:schemeClr>
-    </dgm:linClrLst>
-    <dgm:effectClrLst/>
-    <dgm:txLinClrLst/>
-    <dgm:txFillClrLst meth="repeat">
-      <a:schemeClr val="dk1"/>
-    </dgm:txFillClrLst>
-    <dgm:txEffectClrLst/>
-  </dgm:styleLbl>
-  <dgm:styleLbl name="fgAcc0">
-    <dgm:fillClrLst meth="repeat">
-      <a:schemeClr val="lt1">
-        <a:alpha val="90000"/>
-      </a:schemeClr>
-    </dgm:fillClrLst>
-    <dgm:linClrLst meth="repeat">
-      <a:schemeClr val="accent1"/>
-    </dgm:linClrLst>
-    <dgm:effectClrLst/>
-    <dgm:txLinClrLst/>
-    <dgm:txFillClrLst meth="repeat">
-      <a:schemeClr val="dk1"/>
-    </dgm:txFillClrLst>
-    <dgm:txEffectClrLst/>
-  </dgm:styleLbl>
-  <dgm:styleLbl name="fgAcc2">
-    <dgm:fillClrLst meth="repeat">
-      <a:schemeClr val="lt1">
-        <a:alpha val="90000"/>
-      </a:schemeClr>
-    </dgm:fillClrLst>
-    <dgm:linClrLst meth="repeat">
-      <a:schemeClr val="accent1"/>
-    </dgm:linClrLst>
-    <dgm:effectClrLst/>
-    <dgm:txLinClrLst/>
-    <dgm:txFillClrLst meth="repeat">
-      <a:schemeClr val="dk1"/>
-    </dgm:txFillClrLst>
-    <dgm:txEffectClrLst/>
-  </dgm:styleLbl>
-  <dgm:styleLbl name="fgAcc3">
-    <dgm:fillClrLst meth="repeat">
-      <a:schemeClr val="lt1">
-        <a:alpha val="90000"/>
-      </a:schemeClr>
-    </dgm:fillClrLst>
-    <dgm:linClrLst meth="repeat">
-      <a:schemeClr val="accent1"/>
-    </dgm:linClrLst>
-    <dgm:effectClrLst/>
-    <dgm:txLinClrLst/>
-    <dgm:txFillClrLst meth="repeat">
-      <a:schemeClr val="dk1"/>
-    </dgm:txFillClrLst>
-    <dgm:txEffectClrLst/>
-  </dgm:styleLbl>
-  <dgm:styleLbl name="fgAcc4">
-    <dgm:fillClrLst meth="repeat">
-      <a:schemeClr val="lt1">
-        <a:alpha val="90000"/>
-      </a:schemeClr>
-    </dgm:fillClrLst>
-    <dgm:linClrLst meth="repeat">
-      <a:schemeClr val="accent1"/>
-    </dgm:linClrLst>
-    <dgm:effectClrLst/>
-    <dgm:txLinClrLst/>
-    <dgm:txFillClrLst meth="repeat">
-      <a:schemeClr val="dk1"/>
-    </dgm:txFillClrLst>
-    <dgm:txEffectClrLst/>
-  </dgm:styleLbl>
-  <dgm:styleLbl name="bgShp">
-    <dgm:fillClrLst meth="repeat">
-      <a:schemeClr val="accent1">
-        <a:tint val="40000"/>
-      </a:schemeClr>
-    </dgm:fillClrLst>
-    <dgm:linClrLst meth="repeat">
-      <a:schemeClr val="accent1"/>
-    </dgm:linClrLst>
-    <dgm:effectClrLst/>
-    <dgm:txLinClrLst/>
-    <dgm:txFillClrLst meth="repeat">
-      <a:schemeClr val="dk1"/>
-    </dgm:txFillClrLst>
-    <dgm:txEffectClrLst/>
-  </dgm:styleLbl>
-  <dgm:styleLbl name="dkBgShp">
-    <dgm:fillClrLst meth="repeat">
-      <a:schemeClr val="accent1">
-        <a:shade val="80000"/>
-      </a:schemeClr>
-    </dgm:fillClrLst>
-    <dgm:linClrLst meth="repeat">
-      <a:schemeClr val="accent1"/>
-    </dgm:linClrLst>
-    <dgm:effectClrLst/>
-    <dgm:txLinClrLst/>
-    <dgm:txFillClrLst meth="repeat">
-      <a:schemeClr val="lt1"/>
-    </dgm:txFillClrLst>
-    <dgm:txEffectClrLst/>
-  </dgm:styleLbl>
-  <dgm:styleLbl name="trBgShp">
-    <dgm:fillClrLst meth="repeat">
-      <a:schemeClr val="accent1">
-        <a:tint val="50000"/>
-        <a:alpha val="40000"/>
-      </a:schemeClr>
-    </dgm:fillClrLst>
-    <dgm:linClrLst meth="repeat">
-      <a:schemeClr val="accent1"/>
-    </dgm:linClrLst>
-    <dgm:effectClrLst/>
-    <dgm:txLinClrLst/>
-    <dgm:txFillClrLst meth="repeat">
-      <a:schemeClr val="lt1"/>
-    </dgm:txFillClrLst>
-    <dgm:txEffectClrLst/>
-  </dgm:styleLbl>
-  <dgm:styleLbl name="fgShp">
-    <dgm:fillClrLst meth="repeat">
-      <a:schemeClr val="accent1">
-        <a:tint val="60000"/>
-      </a:schemeClr>
-    </dgm:fillClrLst>
-    <dgm:linClrLst meth="repeat">
-      <a:schemeClr val="lt1"/>
-    </dgm:linClrLst>
-    <dgm:effectClrLst/>
-    <dgm:txLinClrLst/>
-    <dgm:txFillClrLst meth="repeat">
-      <a:schemeClr val="dk1"/>
-    </dgm:txFillClrLst>
-    <dgm:txEffectClrLst/>
-  </dgm:styleLbl>
-  <dgm:styleLbl name="revTx">
-    <dgm:fillClrLst meth="repeat">
-      <a:schemeClr val="lt1">
-        <a:alpha val="0"/>
-      </a:schemeClr>
-    </dgm:fillClrLst>
-    <dgm:linClrLst meth="repeat">
-      <a:schemeClr val="dk1">
-        <a:alpha val="0"/>
-      </a:schemeClr>
-    </dgm:linClrLst>
-    <dgm:effectClrLst/>
-    <dgm:txLinClrLst/>
-    <dgm:txFillClrLst meth="repeat">
-      <a:schemeClr val="tx1"/>
-    </dgm:txFillClrLst>
-    <dgm:txEffectClrLst/>
-  </dgm:styleLbl>
-</dgm:colorsDef>
-</file>
-
-<file path=ppt/diagrams/data1.xml><?xml version="1.0" encoding="utf-8"?>
-<dgm:dataModel xmlns:dgm="http://schemas.openxmlformats.org/drawingml/2006/diagram" xmlns:a="http://schemas.openxmlformats.org/drawingml/2006/main">
-  <dgm:ptLst>
-    <dgm:pt modelId="{6D85D045-8121-4586-9983-0CE35674DCCD}" type="doc">
-      <dgm:prSet loTypeId="urn:microsoft.com/office/officeart/2008/layout/LinedList" loCatId="list" qsTypeId="urn:microsoft.com/office/officeart/2005/8/quickstyle/simple1" qsCatId="simple" csTypeId="urn:microsoft.com/office/officeart/2005/8/colors/accent1_2" csCatId="accent1" phldr="1"/>
-      <dgm:spPr/>
-      <dgm:t>
-        <a:bodyPr/>
-        <a:lstStyle/>
-        <a:p>
-          <a:endParaRPr lang="en-US"/>
-        </a:p>
-      </dgm:t>
-    </dgm:pt>
-    <dgm:pt modelId="{A62FBFCF-936E-4E0E-986F-1AB9F501BC2E}">
-      <dgm:prSet/>
-      <dgm:spPr/>
-      <dgm:t>
-        <a:bodyPr/>
-        <a:lstStyle/>
-        <a:p>
-          <a:r>
-            <a:rPr lang="en-US"/>
-            <a:t>Submission is not losing your voice; it is aligning your heart with the gospel.  </a:t>
-          </a:r>
-        </a:p>
-      </dgm:t>
-    </dgm:pt>
-    <dgm:pt modelId="{25EC894E-07AF-4FA9-80FF-F61BEF7C8111}" type="parTrans" cxnId="{4701CD35-3E16-4732-8267-283ED23FAC95}">
-      <dgm:prSet/>
-      <dgm:spPr/>
-      <dgm:t>
-        <a:bodyPr/>
-        <a:lstStyle/>
-        <a:p>
-          <a:endParaRPr lang="en-US"/>
-        </a:p>
-      </dgm:t>
-    </dgm:pt>
-    <dgm:pt modelId="{10B5F0E0-2B11-418E-A997-9C91E0753581}" type="sibTrans" cxnId="{4701CD35-3E16-4732-8267-283ED23FAC95}">
-      <dgm:prSet/>
-      <dgm:spPr/>
-      <dgm:t>
-        <a:bodyPr/>
-        <a:lstStyle/>
-        <a:p>
-          <a:endParaRPr lang="en-US"/>
-        </a:p>
-      </dgm:t>
-    </dgm:pt>
-    <dgm:pt modelId="{C1E46DE4-F611-4CA4-9416-BBE6182C5D2D}">
-      <dgm:prSet/>
-      <dgm:spPr/>
-      <dgm:t>
-        <a:bodyPr/>
-        <a:lstStyle/>
-        <a:p>
-          <a:r>
-            <a:rPr lang="en-US" dirty="0">
-              <a:solidFill>
-                <a:schemeClr val="tx1"/>
-              </a:solidFill>
-            </a:rPr>
-            <a:t>Submission enables men to lead with gentleness, not pride. </a:t>
-          </a:r>
-          <a:endParaRPr lang="en-US" dirty="0"/>
-        </a:p>
-      </dgm:t>
-    </dgm:pt>
-    <dgm:pt modelId="{043983D4-9722-4121-94FA-300342BF1A54}" type="parTrans" cxnId="{154615D9-5CD1-43DB-80E9-F541256830AF}">
-      <dgm:prSet/>
-      <dgm:spPr/>
-      <dgm:t>
-        <a:bodyPr/>
-        <a:lstStyle/>
-        <a:p>
-          <a:endParaRPr lang="en-US"/>
-        </a:p>
-      </dgm:t>
-    </dgm:pt>
-    <dgm:pt modelId="{48A29F8F-0116-412A-820B-9E26C924E408}" type="sibTrans" cxnId="{154615D9-5CD1-43DB-80E9-F541256830AF}">
-      <dgm:prSet/>
-      <dgm:spPr/>
-      <dgm:t>
-        <a:bodyPr/>
-        <a:lstStyle/>
-        <a:p>
-          <a:endParaRPr lang="en-US"/>
-        </a:p>
-      </dgm:t>
-    </dgm:pt>
-    <dgm:pt modelId="{4C3EB5D5-0AB3-4288-A72E-575B3B8E2F0B}">
-      <dgm:prSet/>
-      <dgm:spPr/>
-      <dgm:t>
-        <a:bodyPr/>
-        <a:lstStyle/>
-        <a:p>
-          <a:r>
-            <a:rPr lang="en-US" dirty="0">
-              <a:solidFill>
-                <a:schemeClr val="tx1"/>
-              </a:solidFill>
-            </a:rPr>
-            <a:t>Submission enables women to flourish with strength, not fear.</a:t>
-          </a:r>
-          <a:endParaRPr lang="en-US" dirty="0"/>
-        </a:p>
-      </dgm:t>
-    </dgm:pt>
-    <dgm:pt modelId="{B54D9086-B3F8-4B62-83CD-AA2190A2CC1E}" type="parTrans" cxnId="{9AB03D41-292A-4328-82DE-563370C8C34D}">
-      <dgm:prSet/>
-      <dgm:spPr/>
-      <dgm:t>
-        <a:bodyPr/>
-        <a:lstStyle/>
-        <a:p>
-          <a:endParaRPr lang="en-US"/>
-        </a:p>
-      </dgm:t>
-    </dgm:pt>
-    <dgm:pt modelId="{365DB7EC-8B19-4D48-A06D-F1D392EB1998}" type="sibTrans" cxnId="{9AB03D41-292A-4328-82DE-563370C8C34D}">
-      <dgm:prSet/>
-      <dgm:spPr/>
-      <dgm:t>
-        <a:bodyPr/>
-        <a:lstStyle/>
-        <a:p>
-          <a:endParaRPr lang="en-US"/>
-        </a:p>
-      </dgm:t>
-    </dgm:pt>
-    <dgm:pt modelId="{6A6DB432-305C-42AF-BC41-C922E2910651}">
-      <dgm:prSet/>
-      <dgm:spPr/>
-      <dgm:t>
-        <a:bodyPr/>
-        <a:lstStyle/>
-        <a:p>
-          <a:r>
-            <a:rPr lang="en-US" dirty="0"/>
-            <a:t>We are meant to pursue unity, not compete for control. </a:t>
-          </a:r>
-        </a:p>
-      </dgm:t>
-    </dgm:pt>
-    <dgm:pt modelId="{334CB62A-47C2-4CBB-A479-C0787A0B8822}" type="parTrans" cxnId="{878E3BD5-C5F4-47B7-B48C-B31B88D2E957}">
-      <dgm:prSet/>
-      <dgm:spPr/>
-      <dgm:t>
-        <a:bodyPr/>
-        <a:lstStyle/>
-        <a:p>
-          <a:endParaRPr lang="en-US"/>
-        </a:p>
-      </dgm:t>
-    </dgm:pt>
-    <dgm:pt modelId="{BDB80D68-8824-4CD9-A3D3-15A0943CC836}" type="sibTrans" cxnId="{878E3BD5-C5F4-47B7-B48C-B31B88D2E957}">
-      <dgm:prSet/>
-      <dgm:spPr/>
-      <dgm:t>
-        <a:bodyPr/>
-        <a:lstStyle/>
-        <a:p>
-          <a:endParaRPr lang="en-US"/>
-        </a:p>
-      </dgm:t>
-    </dgm:pt>
-    <dgm:pt modelId="{1B295EBE-187F-43A0-8C48-16FCC81FA718}">
-      <dgm:prSet/>
-      <dgm:spPr/>
-      <dgm:t>
-        <a:bodyPr/>
-        <a:lstStyle/>
-        <a:p>
-          <a:r>
-            <a:rPr lang="en-US" dirty="0"/>
-            <a:t>Submission enables us to adorn the gospel, not obscure it.  </a:t>
-          </a:r>
-        </a:p>
-      </dgm:t>
-    </dgm:pt>
-    <dgm:pt modelId="{1D8A5448-9E63-4D6F-A0CD-233929B438D4}" type="parTrans" cxnId="{3778F3DC-D44B-4C7D-BA04-26AEE24EDD85}">
-      <dgm:prSet/>
-      <dgm:spPr/>
-      <dgm:t>
-        <a:bodyPr/>
-        <a:lstStyle/>
-        <a:p>
-          <a:endParaRPr lang="en-US"/>
-        </a:p>
-      </dgm:t>
-    </dgm:pt>
-    <dgm:pt modelId="{7F027F4D-48EF-4542-B5EB-1FD2B820541F}" type="sibTrans" cxnId="{3778F3DC-D44B-4C7D-BA04-26AEE24EDD85}">
-      <dgm:prSet/>
-      <dgm:spPr/>
-      <dgm:t>
-        <a:bodyPr/>
-        <a:lstStyle/>
-        <a:p>
-          <a:endParaRPr lang="en-US"/>
-        </a:p>
-      </dgm:t>
-    </dgm:pt>
-    <dgm:pt modelId="{6647696C-2F58-4C22-BE48-693DCFC7F6F6}">
-      <dgm:prSet/>
-      <dgm:spPr/>
-      <dgm:t>
-        <a:bodyPr/>
-        <a:lstStyle/>
-        <a:p>
-          <a:r>
-            <a:rPr lang="en-US"/>
-            <a:t>In Titus, submission is not about power; it is about posture.  </a:t>
-          </a:r>
-        </a:p>
-      </dgm:t>
-    </dgm:pt>
-    <dgm:pt modelId="{5626111B-7B85-459C-8916-0A1DF8E777E4}" type="parTrans" cxnId="{F1E497DB-FC93-4FFF-9DAC-BC45466444F2}">
-      <dgm:prSet/>
-      <dgm:spPr/>
-      <dgm:t>
-        <a:bodyPr/>
-        <a:lstStyle/>
-        <a:p>
-          <a:endParaRPr lang="en-US"/>
-        </a:p>
-      </dgm:t>
-    </dgm:pt>
-    <dgm:pt modelId="{A3D11DE5-C0ED-414D-817C-DA5424446931}" type="sibTrans" cxnId="{F1E497DB-FC93-4FFF-9DAC-BC45466444F2}">
-      <dgm:prSet/>
-      <dgm:spPr/>
-      <dgm:t>
-        <a:bodyPr/>
-        <a:lstStyle/>
-        <a:p>
-          <a:endParaRPr lang="en-US"/>
-        </a:p>
-      </dgm:t>
-    </dgm:pt>
-    <dgm:pt modelId="{C22CC60D-CA4F-4AC8-9F41-A59B31F45C30}">
-      <dgm:prSet/>
-      <dgm:spPr/>
-      <dgm:t>
-        <a:bodyPr/>
-        <a:lstStyle/>
-        <a:p>
-          <a:r>
-            <a:rPr lang="en-US"/>
-            <a:t>It is not about being less; it is about showing Christ more.</a:t>
-          </a:r>
-        </a:p>
-      </dgm:t>
-    </dgm:pt>
-    <dgm:pt modelId="{8AC639DC-6E75-440E-A78A-54109C8DA33D}" type="parTrans" cxnId="{C8ECD283-0DD7-405C-8747-AA5A4F9AC0A5}">
-      <dgm:prSet/>
-      <dgm:spPr/>
-      <dgm:t>
-        <a:bodyPr/>
-        <a:lstStyle/>
-        <a:p>
-          <a:endParaRPr lang="en-US"/>
-        </a:p>
-      </dgm:t>
-    </dgm:pt>
-    <dgm:pt modelId="{12C7E908-718D-4DD8-9183-4183D8D1BD33}" type="sibTrans" cxnId="{C8ECD283-0DD7-405C-8747-AA5A4F9AC0A5}">
-      <dgm:prSet/>
-      <dgm:spPr/>
-      <dgm:t>
-        <a:bodyPr/>
-        <a:lstStyle/>
-        <a:p>
-          <a:endParaRPr lang="en-US"/>
-        </a:p>
-      </dgm:t>
-    </dgm:pt>
-    <dgm:pt modelId="{99B167AD-4643-4CBB-BB40-47D8F2442F77}">
-      <dgm:prSet phldrT="[Text]"/>
-      <dgm:spPr/>
-      <dgm:t>
-        <a:bodyPr/>
-        <a:lstStyle/>
-        <a:p>
-          <a:r>
-            <a:rPr lang="en-US" dirty="0">
-              <a:solidFill>
-                <a:schemeClr val="tx1"/>
-              </a:solidFill>
-            </a:rPr>
-            <a:t>Submission enables children to grow with wisdom, not rebellion. </a:t>
-          </a:r>
-          <a:endParaRPr lang="en-US" dirty="0"/>
-        </a:p>
-      </dgm:t>
-    </dgm:pt>
-    <dgm:pt modelId="{DA9B2AEA-E802-44D8-87DB-B3C15EB55EB9}" type="parTrans" cxnId="{10323092-22B3-4103-A13A-2AE5B5E632E2}">
-      <dgm:prSet/>
-      <dgm:spPr/>
-      <dgm:t>
-        <a:bodyPr/>
-        <a:lstStyle/>
-        <a:p>
-          <a:endParaRPr lang="en-US"/>
-        </a:p>
-      </dgm:t>
-    </dgm:pt>
-    <dgm:pt modelId="{29EE9BD3-C75E-4675-88D4-4F8C7B822F89}" type="sibTrans" cxnId="{10323092-22B3-4103-A13A-2AE5B5E632E2}">
-      <dgm:prSet/>
-      <dgm:spPr/>
-      <dgm:t>
-        <a:bodyPr/>
-        <a:lstStyle/>
-        <a:p>
-          <a:endParaRPr lang="en-US"/>
-        </a:p>
-      </dgm:t>
-    </dgm:pt>
-    <dgm:pt modelId="{82BA294D-93C1-4B92-93A4-876D862943F2}">
-      <dgm:prSet phldrT="[Text]"/>
-      <dgm:spPr/>
-      <dgm:t>
-        <a:bodyPr/>
-        <a:lstStyle/>
-        <a:p>
-          <a:r>
-            <a:rPr lang="en-US" dirty="0">
-              <a:solidFill>
-                <a:schemeClr val="tx1"/>
-              </a:solidFill>
-            </a:rPr>
-            <a:t>Submission enables the church to worship with order, not chaos. </a:t>
-          </a:r>
-          <a:endParaRPr lang="en-US" dirty="0"/>
-        </a:p>
-      </dgm:t>
-    </dgm:pt>
-    <dgm:pt modelId="{FE987A4E-BB84-4851-B1BA-4A253D395B43}" type="parTrans" cxnId="{F6C90DEF-2E67-402B-BD14-1437EFF8ABB6}">
-      <dgm:prSet/>
-      <dgm:spPr/>
-      <dgm:t>
-        <a:bodyPr/>
-        <a:lstStyle/>
-        <a:p>
-          <a:endParaRPr lang="en-US"/>
-        </a:p>
-      </dgm:t>
-    </dgm:pt>
-    <dgm:pt modelId="{795B714A-6BE2-402F-A872-975590CBB247}" type="sibTrans" cxnId="{F6C90DEF-2E67-402B-BD14-1437EFF8ABB6}">
-      <dgm:prSet/>
-      <dgm:spPr/>
-      <dgm:t>
-        <a:bodyPr/>
-        <a:lstStyle/>
-        <a:p>
-          <a:endParaRPr lang="en-US"/>
-        </a:p>
-      </dgm:t>
-    </dgm:pt>
-    <dgm:pt modelId="{7E7FC992-D29D-4533-84D9-29DF031060B4}">
-      <dgm:prSet phldrT="[Text]"/>
-      <dgm:spPr/>
-      <dgm:t>
-        <a:bodyPr/>
-        <a:lstStyle/>
-        <a:p>
-          <a:r>
-            <a:rPr lang="en-US" dirty="0">
-              <a:solidFill>
-                <a:schemeClr val="tx1"/>
-              </a:solidFill>
-            </a:rPr>
-            <a:t>Submission enables relationships to thrive with peace, not power struggles.</a:t>
-          </a:r>
-          <a:endParaRPr lang="en-US" dirty="0"/>
-        </a:p>
-      </dgm:t>
-    </dgm:pt>
-    <dgm:pt modelId="{1D432795-C5AA-4EDD-BD03-DCFA9856B25A}" type="parTrans" cxnId="{3D469C62-13B5-4B1E-B17F-F856B1C37B38}">
-      <dgm:prSet/>
-      <dgm:spPr/>
-      <dgm:t>
-        <a:bodyPr/>
-        <a:lstStyle/>
-        <a:p>
-          <a:endParaRPr lang="en-US"/>
-        </a:p>
-      </dgm:t>
-    </dgm:pt>
-    <dgm:pt modelId="{39512189-88BC-4D5D-ACD5-9169B20B8095}" type="sibTrans" cxnId="{3D469C62-13B5-4B1E-B17F-F856B1C37B38}">
-      <dgm:prSet/>
-      <dgm:spPr/>
-      <dgm:t>
-        <a:bodyPr/>
-        <a:lstStyle/>
-        <a:p>
-          <a:endParaRPr lang="en-US"/>
-        </a:p>
-      </dgm:t>
-    </dgm:pt>
-    <dgm:pt modelId="{EEF72342-7E27-493F-9FA4-60CB8CB752B8}" type="pres">
-      <dgm:prSet presAssocID="{6D85D045-8121-4586-9983-0CE35674DCCD}" presName="vert0" presStyleCnt="0">
-        <dgm:presLayoutVars>
-          <dgm:dir/>
-          <dgm:animOne val="branch"/>
-          <dgm:animLvl val="lvl"/>
-        </dgm:presLayoutVars>
-      </dgm:prSet>
-      <dgm:spPr/>
-    </dgm:pt>
-    <dgm:pt modelId="{54825E1E-779B-4158-933B-9CA37EEBB5A4}" type="pres">
-      <dgm:prSet presAssocID="{A62FBFCF-936E-4E0E-986F-1AB9F501BC2E}" presName="thickLine" presStyleLbl="alignNode1" presStyleIdx="0" presStyleCnt="10"/>
-      <dgm:spPr/>
-    </dgm:pt>
-    <dgm:pt modelId="{56DD2141-7D09-47C8-8865-94BFD4F42156}" type="pres">
-      <dgm:prSet presAssocID="{A62FBFCF-936E-4E0E-986F-1AB9F501BC2E}" presName="horz1" presStyleCnt="0"/>
-      <dgm:spPr/>
-    </dgm:pt>
-    <dgm:pt modelId="{7F6C08A7-7683-4270-A582-047D31CEC77D}" type="pres">
-      <dgm:prSet presAssocID="{A62FBFCF-936E-4E0E-986F-1AB9F501BC2E}" presName="tx1" presStyleLbl="revTx" presStyleIdx="0" presStyleCnt="10"/>
-      <dgm:spPr/>
-    </dgm:pt>
-    <dgm:pt modelId="{F9D3A884-8AA3-4BC3-9193-2AE9688F9D4B}" type="pres">
-      <dgm:prSet presAssocID="{A62FBFCF-936E-4E0E-986F-1AB9F501BC2E}" presName="vert1" presStyleCnt="0"/>
-      <dgm:spPr/>
-    </dgm:pt>
-    <dgm:pt modelId="{0BCDB5A0-3494-4A59-B096-3B28FA2F0642}" type="pres">
-      <dgm:prSet presAssocID="{C1E46DE4-F611-4CA4-9416-BBE6182C5D2D}" presName="thickLine" presStyleLbl="alignNode1" presStyleIdx="1" presStyleCnt="10"/>
-      <dgm:spPr/>
-    </dgm:pt>
-    <dgm:pt modelId="{4EA04224-AA78-4715-8FD4-5F3378F76C80}" type="pres">
-      <dgm:prSet presAssocID="{C1E46DE4-F611-4CA4-9416-BBE6182C5D2D}" presName="horz1" presStyleCnt="0"/>
-      <dgm:spPr/>
-    </dgm:pt>
-    <dgm:pt modelId="{30412EF5-26B6-4B87-BF2E-3378E900C829}" type="pres">
-      <dgm:prSet presAssocID="{C1E46DE4-F611-4CA4-9416-BBE6182C5D2D}" presName="tx1" presStyleLbl="revTx" presStyleIdx="1" presStyleCnt="10"/>
-      <dgm:spPr/>
-    </dgm:pt>
-    <dgm:pt modelId="{95F632CB-2BDB-431E-AA32-B5C064568F72}" type="pres">
-      <dgm:prSet presAssocID="{C1E46DE4-F611-4CA4-9416-BBE6182C5D2D}" presName="vert1" presStyleCnt="0"/>
-      <dgm:spPr/>
-    </dgm:pt>
-    <dgm:pt modelId="{5FF38D51-F2AC-4341-8FBD-DB01A018D87E}" type="pres">
-      <dgm:prSet presAssocID="{4C3EB5D5-0AB3-4288-A72E-575B3B8E2F0B}" presName="thickLine" presStyleLbl="alignNode1" presStyleIdx="2" presStyleCnt="10"/>
-      <dgm:spPr/>
-    </dgm:pt>
-    <dgm:pt modelId="{82903E5D-714F-4835-82A7-05C9D8AEF8DC}" type="pres">
-      <dgm:prSet presAssocID="{4C3EB5D5-0AB3-4288-A72E-575B3B8E2F0B}" presName="horz1" presStyleCnt="0"/>
-      <dgm:spPr/>
-    </dgm:pt>
-    <dgm:pt modelId="{F66B75F4-426F-4C5F-A429-2527FA3E6DBD}" type="pres">
-      <dgm:prSet presAssocID="{4C3EB5D5-0AB3-4288-A72E-575B3B8E2F0B}" presName="tx1" presStyleLbl="revTx" presStyleIdx="2" presStyleCnt="10"/>
-      <dgm:spPr/>
-    </dgm:pt>
-    <dgm:pt modelId="{92E6B2D2-0822-4BA9-BA57-D5B9CE2B1CBD}" type="pres">
-      <dgm:prSet presAssocID="{4C3EB5D5-0AB3-4288-A72E-575B3B8E2F0B}" presName="vert1" presStyleCnt="0"/>
-      <dgm:spPr/>
-    </dgm:pt>
-    <dgm:pt modelId="{347F6AF4-88A2-4E81-9738-BE6898394961}" type="pres">
-      <dgm:prSet presAssocID="{99B167AD-4643-4CBB-BB40-47D8F2442F77}" presName="thickLine" presStyleLbl="alignNode1" presStyleIdx="3" presStyleCnt="10"/>
-      <dgm:spPr/>
-    </dgm:pt>
-    <dgm:pt modelId="{91A67061-927D-4192-866F-84D9F7DD84BF}" type="pres">
-      <dgm:prSet presAssocID="{99B167AD-4643-4CBB-BB40-47D8F2442F77}" presName="horz1" presStyleCnt="0"/>
-      <dgm:spPr/>
-    </dgm:pt>
-    <dgm:pt modelId="{709AA416-9CCF-4C5C-90DF-EEDC66BF7CD5}" type="pres">
-      <dgm:prSet presAssocID="{99B167AD-4643-4CBB-BB40-47D8F2442F77}" presName="tx1" presStyleLbl="revTx" presStyleIdx="3" presStyleCnt="10"/>
-      <dgm:spPr/>
-    </dgm:pt>
-    <dgm:pt modelId="{99CEB8EC-5EB5-4542-A874-0F2BDA41B68E}" type="pres">
-      <dgm:prSet presAssocID="{99B167AD-4643-4CBB-BB40-47D8F2442F77}" presName="vert1" presStyleCnt="0"/>
-      <dgm:spPr/>
-    </dgm:pt>
-    <dgm:pt modelId="{5C4A11B5-38AA-438B-9B05-08F170C793BB}" type="pres">
-      <dgm:prSet presAssocID="{82BA294D-93C1-4B92-93A4-876D862943F2}" presName="thickLine" presStyleLbl="alignNode1" presStyleIdx="4" presStyleCnt="10"/>
-      <dgm:spPr/>
-    </dgm:pt>
-    <dgm:pt modelId="{C935C3E0-B55A-404C-B498-2C2B00C7F011}" type="pres">
-      <dgm:prSet presAssocID="{82BA294D-93C1-4B92-93A4-876D862943F2}" presName="horz1" presStyleCnt="0"/>
-      <dgm:spPr/>
-    </dgm:pt>
-    <dgm:pt modelId="{3CFE9125-D6E4-424C-836A-455C01717B31}" type="pres">
-      <dgm:prSet presAssocID="{82BA294D-93C1-4B92-93A4-876D862943F2}" presName="tx1" presStyleLbl="revTx" presStyleIdx="4" presStyleCnt="10"/>
-      <dgm:spPr/>
-    </dgm:pt>
-    <dgm:pt modelId="{B9C0E8E3-BCF5-4298-8450-F29CE07A223E}" type="pres">
-      <dgm:prSet presAssocID="{82BA294D-93C1-4B92-93A4-876D862943F2}" presName="vert1" presStyleCnt="0"/>
-      <dgm:spPr/>
-    </dgm:pt>
-    <dgm:pt modelId="{0F882090-E75B-4358-9AC8-23AAC38A663B}" type="pres">
-      <dgm:prSet presAssocID="{7E7FC992-D29D-4533-84D9-29DF031060B4}" presName="thickLine" presStyleLbl="alignNode1" presStyleIdx="5" presStyleCnt="10"/>
-      <dgm:spPr/>
-    </dgm:pt>
-    <dgm:pt modelId="{C6F14976-45BB-4379-9277-E9915F7DA1B8}" type="pres">
-      <dgm:prSet presAssocID="{7E7FC992-D29D-4533-84D9-29DF031060B4}" presName="horz1" presStyleCnt="0"/>
-      <dgm:spPr/>
-    </dgm:pt>
-    <dgm:pt modelId="{CC2CA660-3680-420C-86CB-3B2A514EA11F}" type="pres">
-      <dgm:prSet presAssocID="{7E7FC992-D29D-4533-84D9-29DF031060B4}" presName="tx1" presStyleLbl="revTx" presStyleIdx="5" presStyleCnt="10"/>
-      <dgm:spPr/>
-    </dgm:pt>
-    <dgm:pt modelId="{6DBA6865-6A8D-492C-840E-1C94939FE7DF}" type="pres">
-      <dgm:prSet presAssocID="{7E7FC992-D29D-4533-84D9-29DF031060B4}" presName="vert1" presStyleCnt="0"/>
-      <dgm:spPr/>
-    </dgm:pt>
-    <dgm:pt modelId="{D2E5D5D3-CF4D-4076-826F-985A84D01D0B}" type="pres">
-      <dgm:prSet presAssocID="{6A6DB432-305C-42AF-BC41-C922E2910651}" presName="thickLine" presStyleLbl="alignNode1" presStyleIdx="6" presStyleCnt="10"/>
-      <dgm:spPr/>
-    </dgm:pt>
-    <dgm:pt modelId="{27E2794C-0DDA-4F75-9E74-BF5E97B71420}" type="pres">
-      <dgm:prSet presAssocID="{6A6DB432-305C-42AF-BC41-C922E2910651}" presName="horz1" presStyleCnt="0"/>
-      <dgm:spPr/>
-    </dgm:pt>
-    <dgm:pt modelId="{F85E306D-D5F2-48B3-87EF-4C8D87A0DFDE}" type="pres">
-      <dgm:prSet presAssocID="{6A6DB432-305C-42AF-BC41-C922E2910651}" presName="tx1" presStyleLbl="revTx" presStyleIdx="6" presStyleCnt="10"/>
-      <dgm:spPr/>
-    </dgm:pt>
-    <dgm:pt modelId="{FADD88C9-7267-4D70-9F41-F2A6316CB581}" type="pres">
-      <dgm:prSet presAssocID="{6A6DB432-305C-42AF-BC41-C922E2910651}" presName="vert1" presStyleCnt="0"/>
-      <dgm:spPr/>
-    </dgm:pt>
-    <dgm:pt modelId="{664F1045-8E89-4B39-972C-A21C9A70789B}" type="pres">
-      <dgm:prSet presAssocID="{1B295EBE-187F-43A0-8C48-16FCC81FA718}" presName="thickLine" presStyleLbl="alignNode1" presStyleIdx="7" presStyleCnt="10"/>
-      <dgm:spPr/>
-    </dgm:pt>
-    <dgm:pt modelId="{EC166736-E30C-454E-BD24-818C2C721EC1}" type="pres">
-      <dgm:prSet presAssocID="{1B295EBE-187F-43A0-8C48-16FCC81FA718}" presName="horz1" presStyleCnt="0"/>
-      <dgm:spPr/>
-    </dgm:pt>
-    <dgm:pt modelId="{3D0CE573-FF90-4F5F-8605-70D764C5A6BF}" type="pres">
-      <dgm:prSet presAssocID="{1B295EBE-187F-43A0-8C48-16FCC81FA718}" presName="tx1" presStyleLbl="revTx" presStyleIdx="7" presStyleCnt="10"/>
-      <dgm:spPr/>
-    </dgm:pt>
-    <dgm:pt modelId="{2D8054B3-10FF-4535-A3CF-556C30D4407F}" type="pres">
-      <dgm:prSet presAssocID="{1B295EBE-187F-43A0-8C48-16FCC81FA718}" presName="vert1" presStyleCnt="0"/>
-      <dgm:spPr/>
-    </dgm:pt>
-    <dgm:pt modelId="{CCE7BCD6-272F-43A0-AA9E-4FB81BFDB011}" type="pres">
-      <dgm:prSet presAssocID="{6647696C-2F58-4C22-BE48-693DCFC7F6F6}" presName="thickLine" presStyleLbl="alignNode1" presStyleIdx="8" presStyleCnt="10"/>
-      <dgm:spPr/>
-    </dgm:pt>
-    <dgm:pt modelId="{7B52F040-468D-4121-B336-155717EFBCCF}" type="pres">
-      <dgm:prSet presAssocID="{6647696C-2F58-4C22-BE48-693DCFC7F6F6}" presName="horz1" presStyleCnt="0"/>
-      <dgm:spPr/>
-    </dgm:pt>
-    <dgm:pt modelId="{2EA7DBA8-167C-404A-9F22-280ECD96DC77}" type="pres">
-      <dgm:prSet presAssocID="{6647696C-2F58-4C22-BE48-693DCFC7F6F6}" presName="tx1" presStyleLbl="revTx" presStyleIdx="8" presStyleCnt="10"/>
-      <dgm:spPr/>
-    </dgm:pt>
-    <dgm:pt modelId="{598E2FAA-E67A-4980-A4E8-F7ECBDCF8070}" type="pres">
-      <dgm:prSet presAssocID="{6647696C-2F58-4C22-BE48-693DCFC7F6F6}" presName="vert1" presStyleCnt="0"/>
-      <dgm:spPr/>
-    </dgm:pt>
-    <dgm:pt modelId="{124DCCA8-4781-4A0D-91F3-0DA78EB6146C}" type="pres">
-      <dgm:prSet presAssocID="{C22CC60D-CA4F-4AC8-9F41-A59B31F45C30}" presName="thickLine" presStyleLbl="alignNode1" presStyleIdx="9" presStyleCnt="10"/>
-      <dgm:spPr/>
-    </dgm:pt>
-    <dgm:pt modelId="{6CBF7661-BBE6-4AF7-B384-BD716802121F}" type="pres">
-      <dgm:prSet presAssocID="{C22CC60D-CA4F-4AC8-9F41-A59B31F45C30}" presName="horz1" presStyleCnt="0"/>
-      <dgm:spPr/>
-    </dgm:pt>
-    <dgm:pt modelId="{ED36F9FA-DCEF-4578-991E-002E510837CA}" type="pres">
-      <dgm:prSet presAssocID="{C22CC60D-CA4F-4AC8-9F41-A59B31F45C30}" presName="tx1" presStyleLbl="revTx" presStyleIdx="9" presStyleCnt="10"/>
-      <dgm:spPr/>
-    </dgm:pt>
-    <dgm:pt modelId="{D2A91ED4-6384-40D0-BA46-2946FD54A5BC}" type="pres">
-      <dgm:prSet presAssocID="{C22CC60D-CA4F-4AC8-9F41-A59B31F45C30}" presName="vert1" presStyleCnt="0"/>
-      <dgm:spPr/>
-    </dgm:pt>
-  </dgm:ptLst>
-  <dgm:cxnLst>
-    <dgm:cxn modelId="{F54C6503-BB28-4B1D-8984-9A4691C85182}" type="presOf" srcId="{1B295EBE-187F-43A0-8C48-16FCC81FA718}" destId="{3D0CE573-FF90-4F5F-8605-70D764C5A6BF}" srcOrd="0" destOrd="0" presId="urn:microsoft.com/office/officeart/2008/layout/LinedList"/>
-    <dgm:cxn modelId="{D8DA0312-4794-4B30-A049-94C93A7275DF}" type="presOf" srcId="{6647696C-2F58-4C22-BE48-693DCFC7F6F6}" destId="{2EA7DBA8-167C-404A-9F22-280ECD96DC77}" srcOrd="0" destOrd="0" presId="urn:microsoft.com/office/officeart/2008/layout/LinedList"/>
-    <dgm:cxn modelId="{D1673515-D94B-4B4D-9959-CC7E06E99082}" type="presOf" srcId="{99B167AD-4643-4CBB-BB40-47D8F2442F77}" destId="{709AA416-9CCF-4C5C-90DF-EEDC66BF7CD5}" srcOrd="0" destOrd="0" presId="urn:microsoft.com/office/officeart/2008/layout/LinedList"/>
-    <dgm:cxn modelId="{06A61725-277E-40F2-91EF-9BFDB4EBC837}" type="presOf" srcId="{7E7FC992-D29D-4533-84D9-29DF031060B4}" destId="{CC2CA660-3680-420C-86CB-3B2A514EA11F}" srcOrd="0" destOrd="0" presId="urn:microsoft.com/office/officeart/2008/layout/LinedList"/>
-    <dgm:cxn modelId="{CAD17429-FD38-4B4F-A2B9-3BF3C5E2D6FD}" type="presOf" srcId="{82BA294D-93C1-4B92-93A4-876D862943F2}" destId="{3CFE9125-D6E4-424C-836A-455C01717B31}" srcOrd="0" destOrd="0" presId="urn:microsoft.com/office/officeart/2008/layout/LinedList"/>
-    <dgm:cxn modelId="{4701CD35-3E16-4732-8267-283ED23FAC95}" srcId="{6D85D045-8121-4586-9983-0CE35674DCCD}" destId="{A62FBFCF-936E-4E0E-986F-1AB9F501BC2E}" srcOrd="0" destOrd="0" parTransId="{25EC894E-07AF-4FA9-80FF-F61BEF7C8111}" sibTransId="{10B5F0E0-2B11-418E-A997-9C91E0753581}"/>
-    <dgm:cxn modelId="{103FAE5F-B38E-4B3F-AD94-486167B6238B}" type="presOf" srcId="{6D85D045-8121-4586-9983-0CE35674DCCD}" destId="{EEF72342-7E27-493F-9FA4-60CB8CB752B8}" srcOrd="0" destOrd="0" presId="urn:microsoft.com/office/officeart/2008/layout/LinedList"/>
-    <dgm:cxn modelId="{9AB03D41-292A-4328-82DE-563370C8C34D}" srcId="{6D85D045-8121-4586-9983-0CE35674DCCD}" destId="{4C3EB5D5-0AB3-4288-A72E-575B3B8E2F0B}" srcOrd="2" destOrd="0" parTransId="{B54D9086-B3F8-4B62-83CD-AA2190A2CC1E}" sibTransId="{365DB7EC-8B19-4D48-A06D-F1D392EB1998}"/>
-    <dgm:cxn modelId="{3D469C62-13B5-4B1E-B17F-F856B1C37B38}" srcId="{6D85D045-8121-4586-9983-0CE35674DCCD}" destId="{7E7FC992-D29D-4533-84D9-29DF031060B4}" srcOrd="5" destOrd="0" parTransId="{1D432795-C5AA-4EDD-BD03-DCFA9856B25A}" sibTransId="{39512189-88BC-4D5D-ACD5-9169B20B8095}"/>
-    <dgm:cxn modelId="{C8ECD283-0DD7-405C-8747-AA5A4F9AC0A5}" srcId="{6D85D045-8121-4586-9983-0CE35674DCCD}" destId="{C22CC60D-CA4F-4AC8-9F41-A59B31F45C30}" srcOrd="9" destOrd="0" parTransId="{8AC639DC-6E75-440E-A78A-54109C8DA33D}" sibTransId="{12C7E908-718D-4DD8-9183-4183D8D1BD33}"/>
-    <dgm:cxn modelId="{4C676B8C-2FD6-4779-B656-73524E9BCB9F}" type="presOf" srcId="{C22CC60D-CA4F-4AC8-9F41-A59B31F45C30}" destId="{ED36F9FA-DCEF-4578-991E-002E510837CA}" srcOrd="0" destOrd="0" presId="urn:microsoft.com/office/officeart/2008/layout/LinedList"/>
-    <dgm:cxn modelId="{96C8A391-6DDF-4042-A437-9601E821AB26}" type="presOf" srcId="{A62FBFCF-936E-4E0E-986F-1AB9F501BC2E}" destId="{7F6C08A7-7683-4270-A582-047D31CEC77D}" srcOrd="0" destOrd="0" presId="urn:microsoft.com/office/officeart/2008/layout/LinedList"/>
-    <dgm:cxn modelId="{10323092-22B3-4103-A13A-2AE5B5E632E2}" srcId="{6D85D045-8121-4586-9983-0CE35674DCCD}" destId="{99B167AD-4643-4CBB-BB40-47D8F2442F77}" srcOrd="3" destOrd="0" parTransId="{DA9B2AEA-E802-44D8-87DB-B3C15EB55EB9}" sibTransId="{29EE9BD3-C75E-4675-88D4-4F8C7B822F89}"/>
-    <dgm:cxn modelId="{A8C2AC9C-C0BC-4B52-897B-ED15671D5821}" type="presOf" srcId="{6A6DB432-305C-42AF-BC41-C922E2910651}" destId="{F85E306D-D5F2-48B3-87EF-4C8D87A0DFDE}" srcOrd="0" destOrd="0" presId="urn:microsoft.com/office/officeart/2008/layout/LinedList"/>
-    <dgm:cxn modelId="{F33F50B2-B82C-450B-BAE1-9A71552053A1}" type="presOf" srcId="{C1E46DE4-F611-4CA4-9416-BBE6182C5D2D}" destId="{30412EF5-26B6-4B87-BF2E-3378E900C829}" srcOrd="0" destOrd="0" presId="urn:microsoft.com/office/officeart/2008/layout/LinedList"/>
-    <dgm:cxn modelId="{D2424DD4-BB8C-4521-9E0B-87B0F635630D}" type="presOf" srcId="{4C3EB5D5-0AB3-4288-A72E-575B3B8E2F0B}" destId="{F66B75F4-426F-4C5F-A429-2527FA3E6DBD}" srcOrd="0" destOrd="0" presId="urn:microsoft.com/office/officeart/2008/layout/LinedList"/>
-    <dgm:cxn modelId="{878E3BD5-C5F4-47B7-B48C-B31B88D2E957}" srcId="{6D85D045-8121-4586-9983-0CE35674DCCD}" destId="{6A6DB432-305C-42AF-BC41-C922E2910651}" srcOrd="6" destOrd="0" parTransId="{334CB62A-47C2-4CBB-A479-C0787A0B8822}" sibTransId="{BDB80D68-8824-4CD9-A3D3-15A0943CC836}"/>
-    <dgm:cxn modelId="{154615D9-5CD1-43DB-80E9-F541256830AF}" srcId="{6D85D045-8121-4586-9983-0CE35674DCCD}" destId="{C1E46DE4-F611-4CA4-9416-BBE6182C5D2D}" srcOrd="1" destOrd="0" parTransId="{043983D4-9722-4121-94FA-300342BF1A54}" sibTransId="{48A29F8F-0116-412A-820B-9E26C924E408}"/>
-    <dgm:cxn modelId="{F1E497DB-FC93-4FFF-9DAC-BC45466444F2}" srcId="{6D85D045-8121-4586-9983-0CE35674DCCD}" destId="{6647696C-2F58-4C22-BE48-693DCFC7F6F6}" srcOrd="8" destOrd="0" parTransId="{5626111B-7B85-459C-8916-0A1DF8E777E4}" sibTransId="{A3D11DE5-C0ED-414D-817C-DA5424446931}"/>
-    <dgm:cxn modelId="{3778F3DC-D44B-4C7D-BA04-26AEE24EDD85}" srcId="{6D85D045-8121-4586-9983-0CE35674DCCD}" destId="{1B295EBE-187F-43A0-8C48-16FCC81FA718}" srcOrd="7" destOrd="0" parTransId="{1D8A5448-9E63-4D6F-A0CD-233929B438D4}" sibTransId="{7F027F4D-48EF-4542-B5EB-1FD2B820541F}"/>
-    <dgm:cxn modelId="{F6C90DEF-2E67-402B-BD14-1437EFF8ABB6}" srcId="{6D85D045-8121-4586-9983-0CE35674DCCD}" destId="{82BA294D-93C1-4B92-93A4-876D862943F2}" srcOrd="4" destOrd="0" parTransId="{FE987A4E-BB84-4851-B1BA-4A253D395B43}" sibTransId="{795B714A-6BE2-402F-A872-975590CBB247}"/>
-    <dgm:cxn modelId="{0B29FE3D-89EC-47D4-A961-DC9DD3930BB8}" type="presParOf" srcId="{EEF72342-7E27-493F-9FA4-60CB8CB752B8}" destId="{54825E1E-779B-4158-933B-9CA37EEBB5A4}" srcOrd="0" destOrd="0" presId="urn:microsoft.com/office/officeart/2008/layout/LinedList"/>
-    <dgm:cxn modelId="{4D9C7623-FAC0-4AB3-9B35-6573A57BBA7B}" type="presParOf" srcId="{EEF72342-7E27-493F-9FA4-60CB8CB752B8}" destId="{56DD2141-7D09-47C8-8865-94BFD4F42156}" srcOrd="1" destOrd="0" presId="urn:microsoft.com/office/officeart/2008/layout/LinedList"/>
-    <dgm:cxn modelId="{C8141859-3B9D-429A-B816-2D8762BAE978}" type="presParOf" srcId="{56DD2141-7D09-47C8-8865-94BFD4F42156}" destId="{7F6C08A7-7683-4270-A582-047D31CEC77D}" srcOrd="0" destOrd="0" presId="urn:microsoft.com/office/officeart/2008/layout/LinedList"/>
-    <dgm:cxn modelId="{2A91A823-3243-4FD4-A0D4-AD3A559BFB09}" type="presParOf" srcId="{56DD2141-7D09-47C8-8865-94BFD4F42156}" destId="{F9D3A884-8AA3-4BC3-9193-2AE9688F9D4B}" srcOrd="1" destOrd="0" presId="urn:microsoft.com/office/officeart/2008/layout/LinedList"/>
-    <dgm:cxn modelId="{603E2E73-F395-4474-B52C-3D3BCA272A7B}" type="presParOf" srcId="{EEF72342-7E27-493F-9FA4-60CB8CB752B8}" destId="{0BCDB5A0-3494-4A59-B096-3B28FA2F0642}" srcOrd="2" destOrd="0" presId="urn:microsoft.com/office/officeart/2008/layout/LinedList"/>
-    <dgm:cxn modelId="{EECF5087-4CB1-4A36-B53D-720832D1A70E}" type="presParOf" srcId="{EEF72342-7E27-493F-9FA4-60CB8CB752B8}" destId="{4EA04224-AA78-4715-8FD4-5F3378F76C80}" srcOrd="3" destOrd="0" presId="urn:microsoft.com/office/officeart/2008/layout/LinedList"/>
-    <dgm:cxn modelId="{1767E506-EA86-47EB-849E-E5739FD276B5}" type="presParOf" srcId="{4EA04224-AA78-4715-8FD4-5F3378F76C80}" destId="{30412EF5-26B6-4B87-BF2E-3378E900C829}" srcOrd="0" destOrd="0" presId="urn:microsoft.com/office/officeart/2008/layout/LinedList"/>
-    <dgm:cxn modelId="{9605CD2A-3D76-45C9-B7F5-38E79B815D68}" type="presParOf" srcId="{4EA04224-AA78-4715-8FD4-5F3378F76C80}" destId="{95F632CB-2BDB-431E-AA32-B5C064568F72}" srcOrd="1" destOrd="0" presId="urn:microsoft.com/office/officeart/2008/layout/LinedList"/>
-    <dgm:cxn modelId="{9933DA58-ADF7-43C8-8EE5-6E5EC622B316}" type="presParOf" srcId="{EEF72342-7E27-493F-9FA4-60CB8CB752B8}" destId="{5FF38D51-F2AC-4341-8FBD-DB01A018D87E}" srcOrd="4" destOrd="0" presId="urn:microsoft.com/office/officeart/2008/layout/LinedList"/>
-    <dgm:cxn modelId="{73913B49-58AC-4064-8A22-7970F7A0839C}" type="presParOf" srcId="{EEF72342-7E27-493F-9FA4-60CB8CB752B8}" destId="{82903E5D-714F-4835-82A7-05C9D8AEF8DC}" srcOrd="5" destOrd="0" presId="urn:microsoft.com/office/officeart/2008/layout/LinedList"/>
-    <dgm:cxn modelId="{64DBC325-8186-40D3-9A0C-BC88FD406B3C}" type="presParOf" srcId="{82903E5D-714F-4835-82A7-05C9D8AEF8DC}" destId="{F66B75F4-426F-4C5F-A429-2527FA3E6DBD}" srcOrd="0" destOrd="0" presId="urn:microsoft.com/office/officeart/2008/layout/LinedList"/>
-    <dgm:cxn modelId="{9A51C140-9A3F-450C-8470-7C672E444C31}" type="presParOf" srcId="{82903E5D-714F-4835-82A7-05C9D8AEF8DC}" destId="{92E6B2D2-0822-4BA9-BA57-D5B9CE2B1CBD}" srcOrd="1" destOrd="0" presId="urn:microsoft.com/office/officeart/2008/layout/LinedList"/>
-    <dgm:cxn modelId="{5090CCF4-58C5-4B9E-91D1-9153C4945525}" type="presParOf" srcId="{EEF72342-7E27-493F-9FA4-60CB8CB752B8}" destId="{347F6AF4-88A2-4E81-9738-BE6898394961}" srcOrd="6" destOrd="0" presId="urn:microsoft.com/office/officeart/2008/layout/LinedList"/>
-    <dgm:cxn modelId="{1344481D-B514-4AF9-829B-BA97A8382517}" type="presParOf" srcId="{EEF72342-7E27-493F-9FA4-60CB8CB752B8}" destId="{91A67061-927D-4192-866F-84D9F7DD84BF}" srcOrd="7" destOrd="0" presId="urn:microsoft.com/office/officeart/2008/layout/LinedList"/>
-    <dgm:cxn modelId="{9ADDC4CC-BD19-457C-B320-BE53B5B1992E}" type="presParOf" srcId="{91A67061-927D-4192-866F-84D9F7DD84BF}" destId="{709AA416-9CCF-4C5C-90DF-EEDC66BF7CD5}" srcOrd="0" destOrd="0" presId="urn:microsoft.com/office/officeart/2008/layout/LinedList"/>
-    <dgm:cxn modelId="{9AFFE6FD-E439-44F2-8E8B-51987B9B74B1}" type="presParOf" srcId="{91A67061-927D-4192-866F-84D9F7DD84BF}" destId="{99CEB8EC-5EB5-4542-A874-0F2BDA41B68E}" srcOrd="1" destOrd="0" presId="urn:microsoft.com/office/officeart/2008/layout/LinedList"/>
-    <dgm:cxn modelId="{99AF1741-E7BF-4EB4-890F-E82FF54A5B8A}" type="presParOf" srcId="{EEF72342-7E27-493F-9FA4-60CB8CB752B8}" destId="{5C4A11B5-38AA-438B-9B05-08F170C793BB}" srcOrd="8" destOrd="0" presId="urn:microsoft.com/office/officeart/2008/layout/LinedList"/>
-    <dgm:cxn modelId="{A6E20A78-2982-410A-ABF9-3CC8A6C2FD23}" type="presParOf" srcId="{EEF72342-7E27-493F-9FA4-60CB8CB752B8}" destId="{C935C3E0-B55A-404C-B498-2C2B00C7F011}" srcOrd="9" destOrd="0" presId="urn:microsoft.com/office/officeart/2008/layout/LinedList"/>
-    <dgm:cxn modelId="{AD91EFA5-E285-4348-BF3D-0761E3B79105}" type="presParOf" srcId="{C935C3E0-B55A-404C-B498-2C2B00C7F011}" destId="{3CFE9125-D6E4-424C-836A-455C01717B31}" srcOrd="0" destOrd="0" presId="urn:microsoft.com/office/officeart/2008/layout/LinedList"/>
-    <dgm:cxn modelId="{E405AD08-3D72-44CE-B209-499843FAC443}" type="presParOf" srcId="{C935C3E0-B55A-404C-B498-2C2B00C7F011}" destId="{B9C0E8E3-BCF5-4298-8450-F29CE07A223E}" srcOrd="1" destOrd="0" presId="urn:microsoft.com/office/officeart/2008/layout/LinedList"/>
-    <dgm:cxn modelId="{0D717112-A018-4EED-9EDE-1EBFE7E651CC}" type="presParOf" srcId="{EEF72342-7E27-493F-9FA4-60CB8CB752B8}" destId="{0F882090-E75B-4358-9AC8-23AAC38A663B}" srcOrd="10" destOrd="0" presId="urn:microsoft.com/office/officeart/2008/layout/LinedList"/>
-    <dgm:cxn modelId="{8BE66363-82F2-4441-9D03-DDA9CA7529B6}" type="presParOf" srcId="{EEF72342-7E27-493F-9FA4-60CB8CB752B8}" destId="{C6F14976-45BB-4379-9277-E9915F7DA1B8}" srcOrd="11" destOrd="0" presId="urn:microsoft.com/office/officeart/2008/layout/LinedList"/>
-    <dgm:cxn modelId="{7EF242F8-638E-4871-A9BC-16962ABBE96E}" type="presParOf" srcId="{C6F14976-45BB-4379-9277-E9915F7DA1B8}" destId="{CC2CA660-3680-420C-86CB-3B2A514EA11F}" srcOrd="0" destOrd="0" presId="urn:microsoft.com/office/officeart/2008/layout/LinedList"/>
-    <dgm:cxn modelId="{6B83FD4F-DB24-49B5-B897-D5EC3092144F}" type="presParOf" srcId="{C6F14976-45BB-4379-9277-E9915F7DA1B8}" destId="{6DBA6865-6A8D-492C-840E-1C94939FE7DF}" srcOrd="1" destOrd="0" presId="urn:microsoft.com/office/officeart/2008/layout/LinedList"/>
-    <dgm:cxn modelId="{F8026757-16D0-4132-B8D3-E82D683126D4}" type="presParOf" srcId="{EEF72342-7E27-493F-9FA4-60CB8CB752B8}" destId="{D2E5D5D3-CF4D-4076-826F-985A84D01D0B}" srcOrd="12" destOrd="0" presId="urn:microsoft.com/office/officeart/2008/layout/LinedList"/>
-    <dgm:cxn modelId="{A108BCF0-4725-44D9-836F-E0A3E580896B}" type="presParOf" srcId="{EEF72342-7E27-493F-9FA4-60CB8CB752B8}" destId="{27E2794C-0DDA-4F75-9E74-BF5E97B71420}" srcOrd="13" destOrd="0" presId="urn:microsoft.com/office/officeart/2008/layout/LinedList"/>
-    <dgm:cxn modelId="{C341AE91-E326-4529-AE37-73E25BCA5F43}" type="presParOf" srcId="{27E2794C-0DDA-4F75-9E74-BF5E97B71420}" destId="{F85E306D-D5F2-48B3-87EF-4C8D87A0DFDE}" srcOrd="0" destOrd="0" presId="urn:microsoft.com/office/officeart/2008/layout/LinedList"/>
-    <dgm:cxn modelId="{4C6F71AC-A237-42F5-8423-37C674A7A068}" type="presParOf" srcId="{27E2794C-0DDA-4F75-9E74-BF5E97B71420}" destId="{FADD88C9-7267-4D70-9F41-F2A6316CB581}" srcOrd="1" destOrd="0" presId="urn:microsoft.com/office/officeart/2008/layout/LinedList"/>
-    <dgm:cxn modelId="{042C4501-E23D-4CCA-BC39-8FFEAAEE743D}" type="presParOf" srcId="{EEF72342-7E27-493F-9FA4-60CB8CB752B8}" destId="{664F1045-8E89-4B39-972C-A21C9A70789B}" srcOrd="14" destOrd="0" presId="urn:microsoft.com/office/officeart/2008/layout/LinedList"/>
-    <dgm:cxn modelId="{63834E04-971B-4DCD-B1B4-7FC2171CE3DD}" type="presParOf" srcId="{EEF72342-7E27-493F-9FA4-60CB8CB752B8}" destId="{EC166736-E30C-454E-BD24-818C2C721EC1}" srcOrd="15" destOrd="0" presId="urn:microsoft.com/office/officeart/2008/layout/LinedList"/>
-    <dgm:cxn modelId="{C221A4EC-539E-4B86-8C21-4E19719ECE92}" type="presParOf" srcId="{EC166736-E30C-454E-BD24-818C2C721EC1}" destId="{3D0CE573-FF90-4F5F-8605-70D764C5A6BF}" srcOrd="0" destOrd="0" presId="urn:microsoft.com/office/officeart/2008/layout/LinedList"/>
-    <dgm:cxn modelId="{154BD1F5-820B-4D67-879F-9DFA1965275A}" type="presParOf" srcId="{EC166736-E30C-454E-BD24-818C2C721EC1}" destId="{2D8054B3-10FF-4535-A3CF-556C30D4407F}" srcOrd="1" destOrd="0" presId="urn:microsoft.com/office/officeart/2008/layout/LinedList"/>
-    <dgm:cxn modelId="{CB077B01-8AB4-4D5C-8B0C-DB4809D09916}" type="presParOf" srcId="{EEF72342-7E27-493F-9FA4-60CB8CB752B8}" destId="{CCE7BCD6-272F-43A0-AA9E-4FB81BFDB011}" srcOrd="16" destOrd="0" presId="urn:microsoft.com/office/officeart/2008/layout/LinedList"/>
-    <dgm:cxn modelId="{D3DAE2CA-8A4C-4D30-8D21-A4B2216110F4}" type="presParOf" srcId="{EEF72342-7E27-493F-9FA4-60CB8CB752B8}" destId="{7B52F040-468D-4121-B336-155717EFBCCF}" srcOrd="17" destOrd="0" presId="urn:microsoft.com/office/officeart/2008/layout/LinedList"/>
-    <dgm:cxn modelId="{C77F9AFA-B2D5-408B-A745-582ED18C9D4E}" type="presParOf" srcId="{7B52F040-468D-4121-B336-155717EFBCCF}" destId="{2EA7DBA8-167C-404A-9F22-280ECD96DC77}" srcOrd="0" destOrd="0" presId="urn:microsoft.com/office/officeart/2008/layout/LinedList"/>
-    <dgm:cxn modelId="{CFAAAE70-C6FA-4734-A964-57A26C64BC36}" type="presParOf" srcId="{7B52F040-468D-4121-B336-155717EFBCCF}" destId="{598E2FAA-E67A-4980-A4E8-F7ECBDCF8070}" srcOrd="1" destOrd="0" presId="urn:microsoft.com/office/officeart/2008/layout/LinedList"/>
-    <dgm:cxn modelId="{703C86A9-7A05-489C-AE90-67EF87F5C333}" type="presParOf" srcId="{EEF72342-7E27-493F-9FA4-60CB8CB752B8}" destId="{124DCCA8-4781-4A0D-91F3-0DA78EB6146C}" srcOrd="18" destOrd="0" presId="urn:microsoft.com/office/officeart/2008/layout/LinedList"/>
-    <dgm:cxn modelId="{8CC59919-8C87-4CB8-9F97-C2B1B1E0916F}" type="presParOf" srcId="{EEF72342-7E27-493F-9FA4-60CB8CB752B8}" destId="{6CBF7661-BBE6-4AF7-B384-BD716802121F}" srcOrd="19" destOrd="0" presId="urn:microsoft.com/office/officeart/2008/layout/LinedList"/>
-    <dgm:cxn modelId="{D99773E5-0E52-44E8-B7E1-2412632699C3}" type="presParOf" srcId="{6CBF7661-BBE6-4AF7-B384-BD716802121F}" destId="{ED36F9FA-DCEF-4578-991E-002E510837CA}" srcOrd="0" destOrd="0" presId="urn:microsoft.com/office/officeart/2008/layout/LinedList"/>
-    <dgm:cxn modelId="{1CE445FB-FD30-41EA-9291-1BE7DEF94040}" type="presParOf" srcId="{6CBF7661-BBE6-4AF7-B384-BD716802121F}" destId="{D2A91ED4-6384-40D0-BA46-2946FD54A5BC}" srcOrd="1" destOrd="0" presId="urn:microsoft.com/office/officeart/2008/layout/LinedList"/>
-  </dgm:cxnLst>
-  <dgm:bg/>
-  <dgm:whole/>
-  <dgm:extLst>
-    <a:ext uri="http://schemas.microsoft.com/office/drawing/2008/diagram">
-      <dsp:dataModelExt xmlns:dsp="http://schemas.microsoft.com/office/drawing/2008/diagram" relId="rId7" minVer="http://schemas.openxmlformats.org/drawingml/2006/diagram"/>
-    </a:ext>
-  </dgm:extLst>
-</dgm:dataModel>
-</file>
-
-<file path=ppt/diagrams/drawing1.xml><?xml version="1.0" encoding="utf-8"?>
-<dsp:drawing xmlns:dgm="http://schemas.openxmlformats.org/drawingml/2006/diagram" xmlns:dsp="http://schemas.microsoft.com/office/drawing/2008/diagram" xmlns:a="http://schemas.openxmlformats.org/drawingml/2006/main">
-  <dsp:spTree>
-    <dsp:nvGrpSpPr>
-      <dsp:cNvPr id="0" name=""/>
-      <dsp:cNvGrpSpPr/>
-    </dsp:nvGrpSpPr>
-    <dsp:grpSpPr/>
-    <dsp:sp modelId="{54825E1E-779B-4158-933B-9CA37EEBB5A4}">
-      <dsp:nvSpPr>
-        <dsp:cNvPr id="0" name=""/>
-        <dsp:cNvSpPr/>
-      </dsp:nvSpPr>
-      <dsp:spPr>
-        <a:xfrm>
-          <a:off x="0" y="646"/>
-          <a:ext cx="8199120" cy="0"/>
-        </a:xfrm>
-        <a:prstGeom prst="line">
-          <a:avLst/>
-        </a:prstGeom>
-        <a:solidFill>
-          <a:schemeClr val="accent1">
-            <a:hueOff val="0"/>
-            <a:satOff val="0"/>
-            <a:lumOff val="0"/>
-            <a:alphaOff val="0"/>
-          </a:schemeClr>
-        </a:solidFill>
-        <a:ln w="10795" cap="flat" cmpd="sng" algn="ctr">
-          <a:solidFill>
-            <a:schemeClr val="accent1">
-              <a:hueOff val="0"/>
-              <a:satOff val="0"/>
-              <a:lumOff val="0"/>
-              <a:alphaOff val="0"/>
-            </a:schemeClr>
-          </a:solidFill>
-          <a:prstDash val="solid"/>
-        </a:ln>
-        <a:effectLst/>
-      </dsp:spPr>
-      <dsp:style>
-        <a:lnRef idx="2">
-          <a:scrgbClr r="0" g="0" b="0"/>
-        </a:lnRef>
-        <a:fillRef idx="1">
-          <a:scrgbClr r="0" g="0" b="0"/>
-        </a:fillRef>
-        <a:effectRef idx="0">
-          <a:scrgbClr r="0" g="0" b="0"/>
-        </a:effectRef>
-        <a:fontRef idx="minor">
-          <a:schemeClr val="lt1"/>
-        </a:fontRef>
-      </dsp:style>
-    </dsp:sp>
-    <dsp:sp modelId="{7F6C08A7-7683-4270-A582-047D31CEC77D}">
-      <dsp:nvSpPr>
-        <dsp:cNvPr id="0" name=""/>
-        <dsp:cNvSpPr/>
-      </dsp:nvSpPr>
-      <dsp:spPr>
-        <a:xfrm>
-          <a:off x="0" y="646"/>
-          <a:ext cx="8199120" cy="529206"/>
-        </a:xfrm>
-        <a:prstGeom prst="rect">
-          <a:avLst/>
-        </a:prstGeom>
-        <a:noFill/>
-        <a:ln>
-          <a:noFill/>
-        </a:ln>
-        <a:effectLst/>
-      </dsp:spPr>
-      <dsp:style>
-        <a:lnRef idx="0">
-          <a:scrgbClr r="0" g="0" b="0"/>
-        </a:lnRef>
-        <a:fillRef idx="0">
-          <a:scrgbClr r="0" g="0" b="0"/>
-        </a:fillRef>
-        <a:effectRef idx="0">
-          <a:scrgbClr r="0" g="0" b="0"/>
-        </a:effectRef>
-        <a:fontRef idx="minor"/>
-      </dsp:style>
-      <dsp:txBody>
-        <a:bodyPr spcFirstLastPara="0" vert="horz" wrap="square" lIns="76200" tIns="76200" rIns="76200" bIns="76200" numCol="1" spcCol="1270" anchor="t" anchorCtr="0">
-          <a:noAutofit/>
-        </a:bodyPr>
-        <a:lstStyle/>
-        <a:p>
-          <a:pPr marL="0" lvl="0" indent="0" algn="l" defTabSz="889000">
-            <a:lnSpc>
-              <a:spcPct val="90000"/>
-            </a:lnSpc>
-            <a:spcBef>
-              <a:spcPct val="0"/>
-            </a:spcBef>
-            <a:spcAft>
-              <a:spcPct val="35000"/>
-            </a:spcAft>
-            <a:buNone/>
-          </a:pPr>
-          <a:r>
-            <a:rPr lang="en-US" sz="2000" kern="1200"/>
-            <a:t>Submission is not losing your voice; it is aligning your heart with the gospel.  </a:t>
-          </a:r>
-        </a:p>
-      </dsp:txBody>
-      <dsp:txXfrm>
-        <a:off x="0" y="646"/>
-        <a:ext cx="8199120" cy="529206"/>
-      </dsp:txXfrm>
-    </dsp:sp>
-    <dsp:sp modelId="{0BCDB5A0-3494-4A59-B096-3B28FA2F0642}">
-      <dsp:nvSpPr>
-        <dsp:cNvPr id="0" name=""/>
-        <dsp:cNvSpPr/>
-      </dsp:nvSpPr>
-      <dsp:spPr>
-        <a:xfrm>
-          <a:off x="0" y="529852"/>
-          <a:ext cx="8199120" cy="0"/>
-        </a:xfrm>
-        <a:prstGeom prst="line">
-          <a:avLst/>
-        </a:prstGeom>
-        <a:solidFill>
-          <a:schemeClr val="accent1">
-            <a:hueOff val="0"/>
-            <a:satOff val="0"/>
-            <a:lumOff val="0"/>
-            <a:alphaOff val="0"/>
-          </a:schemeClr>
-        </a:solidFill>
-        <a:ln w="10795" cap="flat" cmpd="sng" algn="ctr">
-          <a:solidFill>
-            <a:schemeClr val="accent1">
-              <a:hueOff val="0"/>
-              <a:satOff val="0"/>
-              <a:lumOff val="0"/>
-              <a:alphaOff val="0"/>
-            </a:schemeClr>
-          </a:solidFill>
-          <a:prstDash val="solid"/>
-        </a:ln>
-        <a:effectLst/>
-      </dsp:spPr>
-      <dsp:style>
-        <a:lnRef idx="2">
-          <a:scrgbClr r="0" g="0" b="0"/>
-        </a:lnRef>
-        <a:fillRef idx="1">
-          <a:scrgbClr r="0" g="0" b="0"/>
-        </a:fillRef>
-        <a:effectRef idx="0">
-          <a:scrgbClr r="0" g="0" b="0"/>
-        </a:effectRef>
-        <a:fontRef idx="minor">
-          <a:schemeClr val="lt1"/>
-        </a:fontRef>
-      </dsp:style>
-    </dsp:sp>
-    <dsp:sp modelId="{30412EF5-26B6-4B87-BF2E-3378E900C829}">
-      <dsp:nvSpPr>
-        <dsp:cNvPr id="0" name=""/>
-        <dsp:cNvSpPr/>
-      </dsp:nvSpPr>
-      <dsp:spPr>
-        <a:xfrm>
-          <a:off x="0" y="529852"/>
-          <a:ext cx="8199120" cy="529206"/>
-        </a:xfrm>
-        <a:prstGeom prst="rect">
-          <a:avLst/>
-        </a:prstGeom>
-        <a:noFill/>
-        <a:ln>
-          <a:noFill/>
-        </a:ln>
-        <a:effectLst/>
-      </dsp:spPr>
-      <dsp:style>
-        <a:lnRef idx="0">
-          <a:scrgbClr r="0" g="0" b="0"/>
-        </a:lnRef>
-        <a:fillRef idx="0">
-          <a:scrgbClr r="0" g="0" b="0"/>
-        </a:fillRef>
-        <a:effectRef idx="0">
-          <a:scrgbClr r="0" g="0" b="0"/>
-        </a:effectRef>
-        <a:fontRef idx="minor"/>
-      </dsp:style>
-      <dsp:txBody>
-        <a:bodyPr spcFirstLastPara="0" vert="horz" wrap="square" lIns="76200" tIns="76200" rIns="76200" bIns="76200" numCol="1" spcCol="1270" anchor="t" anchorCtr="0">
-          <a:noAutofit/>
-        </a:bodyPr>
-        <a:lstStyle/>
-        <a:p>
-          <a:pPr marL="0" lvl="0" indent="0" algn="l" defTabSz="889000">
-            <a:lnSpc>
-              <a:spcPct val="90000"/>
-            </a:lnSpc>
-            <a:spcBef>
-              <a:spcPct val="0"/>
-            </a:spcBef>
-            <a:spcAft>
-              <a:spcPct val="35000"/>
-            </a:spcAft>
-            <a:buNone/>
-          </a:pPr>
-          <a:r>
-            <a:rPr lang="en-US" sz="2000" kern="1200" dirty="0">
-              <a:solidFill>
-                <a:schemeClr val="tx1"/>
-              </a:solidFill>
-            </a:rPr>
-            <a:t>Submission enables men to lead with gentleness, not pride. </a:t>
-          </a:r>
-          <a:endParaRPr lang="en-US" sz="2000" kern="1200" dirty="0"/>
-        </a:p>
-      </dsp:txBody>
-      <dsp:txXfrm>
-        <a:off x="0" y="529852"/>
-        <a:ext cx="8199120" cy="529206"/>
-      </dsp:txXfrm>
-    </dsp:sp>
-    <dsp:sp modelId="{5FF38D51-F2AC-4341-8FBD-DB01A018D87E}">
-      <dsp:nvSpPr>
-        <dsp:cNvPr id="0" name=""/>
-        <dsp:cNvSpPr/>
-      </dsp:nvSpPr>
-      <dsp:spPr>
-        <a:xfrm>
-          <a:off x="0" y="1059059"/>
-          <a:ext cx="8199120" cy="0"/>
-        </a:xfrm>
-        <a:prstGeom prst="line">
-          <a:avLst/>
-        </a:prstGeom>
-        <a:solidFill>
-          <a:schemeClr val="accent1">
-            <a:hueOff val="0"/>
-            <a:satOff val="0"/>
-            <a:lumOff val="0"/>
-            <a:alphaOff val="0"/>
-          </a:schemeClr>
-        </a:solidFill>
-        <a:ln w="10795" cap="flat" cmpd="sng" algn="ctr">
-          <a:solidFill>
-            <a:schemeClr val="accent1">
-              <a:hueOff val="0"/>
-              <a:satOff val="0"/>
-              <a:lumOff val="0"/>
-              <a:alphaOff val="0"/>
-            </a:schemeClr>
-          </a:solidFill>
-          <a:prstDash val="solid"/>
-        </a:ln>
-        <a:effectLst/>
-      </dsp:spPr>
-      <dsp:style>
-        <a:lnRef idx="2">
-          <a:scrgbClr r="0" g="0" b="0"/>
-        </a:lnRef>
-        <a:fillRef idx="1">
-          <a:scrgbClr r="0" g="0" b="0"/>
-        </a:fillRef>
-        <a:effectRef idx="0">
-          <a:scrgbClr r="0" g="0" b="0"/>
-        </a:effectRef>
-        <a:fontRef idx="minor">
-          <a:schemeClr val="lt1"/>
-        </a:fontRef>
-      </dsp:style>
-    </dsp:sp>
-    <dsp:sp modelId="{F66B75F4-426F-4C5F-A429-2527FA3E6DBD}">
-      <dsp:nvSpPr>
-        <dsp:cNvPr id="0" name=""/>
-        <dsp:cNvSpPr/>
-      </dsp:nvSpPr>
-      <dsp:spPr>
-        <a:xfrm>
-          <a:off x="0" y="1059059"/>
-          <a:ext cx="8199120" cy="529206"/>
-        </a:xfrm>
-        <a:prstGeom prst="rect">
-          <a:avLst/>
-        </a:prstGeom>
-        <a:noFill/>
-        <a:ln>
-          <a:noFill/>
-        </a:ln>
-        <a:effectLst/>
-      </dsp:spPr>
-      <dsp:style>
-        <a:lnRef idx="0">
-          <a:scrgbClr r="0" g="0" b="0"/>
-        </a:lnRef>
-        <a:fillRef idx="0">
-          <a:scrgbClr r="0" g="0" b="0"/>
-        </a:fillRef>
-        <a:effectRef idx="0">
-          <a:scrgbClr r="0" g="0" b="0"/>
-        </a:effectRef>
-        <a:fontRef idx="minor"/>
-      </dsp:style>
-      <dsp:txBody>
-        <a:bodyPr spcFirstLastPara="0" vert="horz" wrap="square" lIns="76200" tIns="76200" rIns="76200" bIns="76200" numCol="1" spcCol="1270" anchor="t" anchorCtr="0">
-          <a:noAutofit/>
-        </a:bodyPr>
-        <a:lstStyle/>
-        <a:p>
-          <a:pPr marL="0" lvl="0" indent="0" algn="l" defTabSz="889000">
-            <a:lnSpc>
-              <a:spcPct val="90000"/>
-            </a:lnSpc>
-            <a:spcBef>
-              <a:spcPct val="0"/>
-            </a:spcBef>
-            <a:spcAft>
-              <a:spcPct val="35000"/>
-            </a:spcAft>
-            <a:buNone/>
-          </a:pPr>
-          <a:r>
-            <a:rPr lang="en-US" sz="2000" kern="1200" dirty="0">
-              <a:solidFill>
-                <a:schemeClr val="tx1"/>
-              </a:solidFill>
-            </a:rPr>
-            <a:t>Submission enables women to flourish with strength, not fear.</a:t>
-          </a:r>
-          <a:endParaRPr lang="en-US" sz="2000" kern="1200" dirty="0"/>
-        </a:p>
-      </dsp:txBody>
-      <dsp:txXfrm>
-        <a:off x="0" y="1059059"/>
-        <a:ext cx="8199120" cy="529206"/>
-      </dsp:txXfrm>
-    </dsp:sp>
-    <dsp:sp modelId="{347F6AF4-88A2-4E81-9738-BE6898394961}">
-      <dsp:nvSpPr>
-        <dsp:cNvPr id="0" name=""/>
-        <dsp:cNvSpPr/>
-      </dsp:nvSpPr>
-      <dsp:spPr>
-        <a:xfrm>
-          <a:off x="0" y="1588266"/>
-          <a:ext cx="8199120" cy="0"/>
-        </a:xfrm>
-        <a:prstGeom prst="line">
-          <a:avLst/>
-        </a:prstGeom>
-        <a:solidFill>
-          <a:schemeClr val="accent1">
-            <a:hueOff val="0"/>
-            <a:satOff val="0"/>
-            <a:lumOff val="0"/>
-            <a:alphaOff val="0"/>
-          </a:schemeClr>
-        </a:solidFill>
-        <a:ln w="10795" cap="flat" cmpd="sng" algn="ctr">
-          <a:solidFill>
-            <a:schemeClr val="accent1">
-              <a:hueOff val="0"/>
-              <a:satOff val="0"/>
-              <a:lumOff val="0"/>
-              <a:alphaOff val="0"/>
-            </a:schemeClr>
-          </a:solidFill>
-          <a:prstDash val="solid"/>
-        </a:ln>
-        <a:effectLst/>
-      </dsp:spPr>
-      <dsp:style>
-        <a:lnRef idx="2">
-          <a:scrgbClr r="0" g="0" b="0"/>
-        </a:lnRef>
-        <a:fillRef idx="1">
-          <a:scrgbClr r="0" g="0" b="0"/>
-        </a:fillRef>
-        <a:effectRef idx="0">
-          <a:scrgbClr r="0" g="0" b="0"/>
-        </a:effectRef>
-        <a:fontRef idx="minor">
-          <a:schemeClr val="lt1"/>
-        </a:fontRef>
-      </dsp:style>
-    </dsp:sp>
-    <dsp:sp modelId="{709AA416-9CCF-4C5C-90DF-EEDC66BF7CD5}">
-      <dsp:nvSpPr>
-        <dsp:cNvPr id="0" name=""/>
-        <dsp:cNvSpPr/>
-      </dsp:nvSpPr>
-      <dsp:spPr>
-        <a:xfrm>
-          <a:off x="0" y="1588266"/>
-          <a:ext cx="8199120" cy="529206"/>
-        </a:xfrm>
-        <a:prstGeom prst="rect">
-          <a:avLst/>
-        </a:prstGeom>
-        <a:noFill/>
-        <a:ln>
-          <a:noFill/>
-        </a:ln>
-        <a:effectLst/>
-      </dsp:spPr>
-      <dsp:style>
-        <a:lnRef idx="0">
-          <a:scrgbClr r="0" g="0" b="0"/>
-        </a:lnRef>
-        <a:fillRef idx="0">
-          <a:scrgbClr r="0" g="0" b="0"/>
-        </a:fillRef>
-        <a:effectRef idx="0">
-          <a:scrgbClr r="0" g="0" b="0"/>
-        </a:effectRef>
-        <a:fontRef idx="minor"/>
-      </dsp:style>
-      <dsp:txBody>
-        <a:bodyPr spcFirstLastPara="0" vert="horz" wrap="square" lIns="76200" tIns="76200" rIns="76200" bIns="76200" numCol="1" spcCol="1270" anchor="t" anchorCtr="0">
-          <a:noAutofit/>
-        </a:bodyPr>
-        <a:lstStyle/>
-        <a:p>
-          <a:pPr marL="0" lvl="0" indent="0" algn="l" defTabSz="889000">
-            <a:lnSpc>
-              <a:spcPct val="90000"/>
-            </a:lnSpc>
-            <a:spcBef>
-              <a:spcPct val="0"/>
-            </a:spcBef>
-            <a:spcAft>
-              <a:spcPct val="35000"/>
-            </a:spcAft>
-            <a:buNone/>
-          </a:pPr>
-          <a:r>
-            <a:rPr lang="en-US" sz="2000" kern="1200" dirty="0">
-              <a:solidFill>
-                <a:schemeClr val="tx1"/>
-              </a:solidFill>
-            </a:rPr>
-            <a:t>Submission enables children to grow with wisdom, not rebellion. </a:t>
-          </a:r>
-          <a:endParaRPr lang="en-US" sz="2000" kern="1200" dirty="0"/>
-        </a:p>
-      </dsp:txBody>
-      <dsp:txXfrm>
-        <a:off x="0" y="1588266"/>
-        <a:ext cx="8199120" cy="529206"/>
-      </dsp:txXfrm>
-    </dsp:sp>
-    <dsp:sp modelId="{5C4A11B5-38AA-438B-9B05-08F170C793BB}">
-      <dsp:nvSpPr>
-        <dsp:cNvPr id="0" name=""/>
-        <dsp:cNvSpPr/>
-      </dsp:nvSpPr>
-      <dsp:spPr>
-        <a:xfrm>
-          <a:off x="0" y="2117473"/>
-          <a:ext cx="8199120" cy="0"/>
-        </a:xfrm>
-        <a:prstGeom prst="line">
-          <a:avLst/>
-        </a:prstGeom>
-        <a:solidFill>
-          <a:schemeClr val="accent1">
-            <a:hueOff val="0"/>
-            <a:satOff val="0"/>
-            <a:lumOff val="0"/>
-            <a:alphaOff val="0"/>
-          </a:schemeClr>
-        </a:solidFill>
-        <a:ln w="10795" cap="flat" cmpd="sng" algn="ctr">
-          <a:solidFill>
-            <a:schemeClr val="accent1">
-              <a:hueOff val="0"/>
-              <a:satOff val="0"/>
-              <a:lumOff val="0"/>
-              <a:alphaOff val="0"/>
-            </a:schemeClr>
-          </a:solidFill>
-          <a:prstDash val="solid"/>
-        </a:ln>
-        <a:effectLst/>
-      </dsp:spPr>
-      <dsp:style>
-        <a:lnRef idx="2">
-          <a:scrgbClr r="0" g="0" b="0"/>
-        </a:lnRef>
-        <a:fillRef idx="1">
-          <a:scrgbClr r="0" g="0" b="0"/>
-        </a:fillRef>
-        <a:effectRef idx="0">
-          <a:scrgbClr r="0" g="0" b="0"/>
-        </a:effectRef>
-        <a:fontRef idx="minor">
-          <a:schemeClr val="lt1"/>
-        </a:fontRef>
-      </dsp:style>
-    </dsp:sp>
-    <dsp:sp modelId="{3CFE9125-D6E4-424C-836A-455C01717B31}">
-      <dsp:nvSpPr>
-        <dsp:cNvPr id="0" name=""/>
-        <dsp:cNvSpPr/>
-      </dsp:nvSpPr>
-      <dsp:spPr>
-        <a:xfrm>
-          <a:off x="0" y="2117473"/>
-          <a:ext cx="8199120" cy="529206"/>
-        </a:xfrm>
-        <a:prstGeom prst="rect">
-          <a:avLst/>
-        </a:prstGeom>
-        <a:noFill/>
-        <a:ln>
-          <a:noFill/>
-        </a:ln>
-        <a:effectLst/>
-      </dsp:spPr>
-      <dsp:style>
-        <a:lnRef idx="0">
-          <a:scrgbClr r="0" g="0" b="0"/>
-        </a:lnRef>
-        <a:fillRef idx="0">
-          <a:scrgbClr r="0" g="0" b="0"/>
-        </a:fillRef>
-        <a:effectRef idx="0">
-          <a:scrgbClr r="0" g="0" b="0"/>
-        </a:effectRef>
-        <a:fontRef idx="minor"/>
-      </dsp:style>
-      <dsp:txBody>
-        <a:bodyPr spcFirstLastPara="0" vert="horz" wrap="square" lIns="76200" tIns="76200" rIns="76200" bIns="76200" numCol="1" spcCol="1270" anchor="t" anchorCtr="0">
-          <a:noAutofit/>
-        </a:bodyPr>
-        <a:lstStyle/>
-        <a:p>
-          <a:pPr marL="0" lvl="0" indent="0" algn="l" defTabSz="889000">
-            <a:lnSpc>
-              <a:spcPct val="90000"/>
-            </a:lnSpc>
-            <a:spcBef>
-              <a:spcPct val="0"/>
-            </a:spcBef>
-            <a:spcAft>
-              <a:spcPct val="35000"/>
-            </a:spcAft>
-            <a:buNone/>
-          </a:pPr>
-          <a:r>
-            <a:rPr lang="en-US" sz="2000" kern="1200" dirty="0">
-              <a:solidFill>
-                <a:schemeClr val="tx1"/>
-              </a:solidFill>
-            </a:rPr>
-            <a:t>Submission enables the church to worship with order, not chaos. </a:t>
-          </a:r>
-          <a:endParaRPr lang="en-US" sz="2000" kern="1200" dirty="0"/>
-        </a:p>
-      </dsp:txBody>
-      <dsp:txXfrm>
-        <a:off x="0" y="2117473"/>
-        <a:ext cx="8199120" cy="529206"/>
-      </dsp:txXfrm>
-    </dsp:sp>
-    <dsp:sp modelId="{0F882090-E75B-4358-9AC8-23AAC38A663B}">
-      <dsp:nvSpPr>
-        <dsp:cNvPr id="0" name=""/>
-        <dsp:cNvSpPr/>
-      </dsp:nvSpPr>
-      <dsp:spPr>
-        <a:xfrm>
-          <a:off x="0" y="2646680"/>
-          <a:ext cx="8199120" cy="0"/>
-        </a:xfrm>
-        <a:prstGeom prst="line">
-          <a:avLst/>
-        </a:prstGeom>
-        <a:solidFill>
-          <a:schemeClr val="accent1">
-            <a:hueOff val="0"/>
-            <a:satOff val="0"/>
-            <a:lumOff val="0"/>
-            <a:alphaOff val="0"/>
-          </a:schemeClr>
-        </a:solidFill>
-        <a:ln w="10795" cap="flat" cmpd="sng" algn="ctr">
-          <a:solidFill>
-            <a:schemeClr val="accent1">
-              <a:hueOff val="0"/>
-              <a:satOff val="0"/>
-              <a:lumOff val="0"/>
-              <a:alphaOff val="0"/>
-            </a:schemeClr>
-          </a:solidFill>
-          <a:prstDash val="solid"/>
-        </a:ln>
-        <a:effectLst/>
-      </dsp:spPr>
-      <dsp:style>
-        <a:lnRef idx="2">
-          <a:scrgbClr r="0" g="0" b="0"/>
-        </a:lnRef>
-        <a:fillRef idx="1">
-          <a:scrgbClr r="0" g="0" b="0"/>
-        </a:fillRef>
-        <a:effectRef idx="0">
-          <a:scrgbClr r="0" g="0" b="0"/>
-        </a:effectRef>
-        <a:fontRef idx="minor">
-          <a:schemeClr val="lt1"/>
-        </a:fontRef>
-      </dsp:style>
-    </dsp:sp>
-    <dsp:sp modelId="{CC2CA660-3680-420C-86CB-3B2A514EA11F}">
-      <dsp:nvSpPr>
-        <dsp:cNvPr id="0" name=""/>
-        <dsp:cNvSpPr/>
-      </dsp:nvSpPr>
-      <dsp:spPr>
-        <a:xfrm>
-          <a:off x="0" y="2646680"/>
-          <a:ext cx="8199120" cy="529206"/>
-        </a:xfrm>
-        <a:prstGeom prst="rect">
-          <a:avLst/>
-        </a:prstGeom>
-        <a:noFill/>
-        <a:ln>
-          <a:noFill/>
-        </a:ln>
-        <a:effectLst/>
-      </dsp:spPr>
-      <dsp:style>
-        <a:lnRef idx="0">
-          <a:scrgbClr r="0" g="0" b="0"/>
-        </a:lnRef>
-        <a:fillRef idx="0">
-          <a:scrgbClr r="0" g="0" b="0"/>
-        </a:fillRef>
-        <a:effectRef idx="0">
-          <a:scrgbClr r="0" g="0" b="0"/>
-        </a:effectRef>
-        <a:fontRef idx="minor"/>
-      </dsp:style>
-      <dsp:txBody>
-        <a:bodyPr spcFirstLastPara="0" vert="horz" wrap="square" lIns="76200" tIns="76200" rIns="76200" bIns="76200" numCol="1" spcCol="1270" anchor="t" anchorCtr="0">
-          <a:noAutofit/>
-        </a:bodyPr>
-        <a:lstStyle/>
-        <a:p>
-          <a:pPr marL="0" lvl="0" indent="0" algn="l" defTabSz="889000">
-            <a:lnSpc>
-              <a:spcPct val="90000"/>
-            </a:lnSpc>
-            <a:spcBef>
-              <a:spcPct val="0"/>
-            </a:spcBef>
-            <a:spcAft>
-              <a:spcPct val="35000"/>
-            </a:spcAft>
-            <a:buNone/>
-          </a:pPr>
-          <a:r>
-            <a:rPr lang="en-US" sz="2000" kern="1200" dirty="0">
-              <a:solidFill>
-                <a:schemeClr val="tx1"/>
-              </a:solidFill>
-            </a:rPr>
-            <a:t>Submission enables relationships to thrive with peace, not power struggles.</a:t>
-          </a:r>
-          <a:endParaRPr lang="en-US" sz="2000" kern="1200" dirty="0"/>
-        </a:p>
-      </dsp:txBody>
-      <dsp:txXfrm>
-        <a:off x="0" y="2646680"/>
-        <a:ext cx="8199120" cy="529206"/>
-      </dsp:txXfrm>
-    </dsp:sp>
-    <dsp:sp modelId="{D2E5D5D3-CF4D-4076-826F-985A84D01D0B}">
-      <dsp:nvSpPr>
-        <dsp:cNvPr id="0" name=""/>
-        <dsp:cNvSpPr/>
-      </dsp:nvSpPr>
-      <dsp:spPr>
-        <a:xfrm>
-          <a:off x="0" y="3175886"/>
-          <a:ext cx="8199120" cy="0"/>
-        </a:xfrm>
-        <a:prstGeom prst="line">
-          <a:avLst/>
-        </a:prstGeom>
-        <a:solidFill>
-          <a:schemeClr val="accent1">
-            <a:hueOff val="0"/>
-            <a:satOff val="0"/>
-            <a:lumOff val="0"/>
-            <a:alphaOff val="0"/>
-          </a:schemeClr>
-        </a:solidFill>
-        <a:ln w="10795" cap="flat" cmpd="sng" algn="ctr">
-          <a:solidFill>
-            <a:schemeClr val="accent1">
-              <a:hueOff val="0"/>
-              <a:satOff val="0"/>
-              <a:lumOff val="0"/>
-              <a:alphaOff val="0"/>
-            </a:schemeClr>
-          </a:solidFill>
-          <a:prstDash val="solid"/>
-        </a:ln>
-        <a:effectLst/>
-      </dsp:spPr>
-      <dsp:style>
-        <a:lnRef idx="2">
-          <a:scrgbClr r="0" g="0" b="0"/>
-        </a:lnRef>
-        <a:fillRef idx="1">
-          <a:scrgbClr r="0" g="0" b="0"/>
-        </a:fillRef>
-        <a:effectRef idx="0">
-          <a:scrgbClr r="0" g="0" b="0"/>
-        </a:effectRef>
-        <a:fontRef idx="minor">
-          <a:schemeClr val="lt1"/>
-        </a:fontRef>
-      </dsp:style>
-    </dsp:sp>
-    <dsp:sp modelId="{F85E306D-D5F2-48B3-87EF-4C8D87A0DFDE}">
-      <dsp:nvSpPr>
-        <dsp:cNvPr id="0" name=""/>
-        <dsp:cNvSpPr/>
-      </dsp:nvSpPr>
-      <dsp:spPr>
-        <a:xfrm>
-          <a:off x="0" y="3175886"/>
-          <a:ext cx="8199120" cy="529206"/>
-        </a:xfrm>
-        <a:prstGeom prst="rect">
-          <a:avLst/>
-        </a:prstGeom>
-        <a:noFill/>
-        <a:ln>
-          <a:noFill/>
-        </a:ln>
-        <a:effectLst/>
-      </dsp:spPr>
-      <dsp:style>
-        <a:lnRef idx="0">
-          <a:scrgbClr r="0" g="0" b="0"/>
-        </a:lnRef>
-        <a:fillRef idx="0">
-          <a:scrgbClr r="0" g="0" b="0"/>
-        </a:fillRef>
-        <a:effectRef idx="0">
-          <a:scrgbClr r="0" g="0" b="0"/>
-        </a:effectRef>
-        <a:fontRef idx="minor"/>
-      </dsp:style>
-      <dsp:txBody>
-        <a:bodyPr spcFirstLastPara="0" vert="horz" wrap="square" lIns="76200" tIns="76200" rIns="76200" bIns="76200" numCol="1" spcCol="1270" anchor="t" anchorCtr="0">
-          <a:noAutofit/>
-        </a:bodyPr>
-        <a:lstStyle/>
-        <a:p>
-          <a:pPr marL="0" lvl="0" indent="0" algn="l" defTabSz="889000">
-            <a:lnSpc>
-              <a:spcPct val="90000"/>
-            </a:lnSpc>
-            <a:spcBef>
-              <a:spcPct val="0"/>
-            </a:spcBef>
-            <a:spcAft>
-              <a:spcPct val="35000"/>
-            </a:spcAft>
-            <a:buNone/>
-          </a:pPr>
-          <a:r>
-            <a:rPr lang="en-US" sz="2000" kern="1200" dirty="0"/>
-            <a:t>We are meant to pursue unity, not compete for control. </a:t>
-          </a:r>
-        </a:p>
-      </dsp:txBody>
-      <dsp:txXfrm>
-        <a:off x="0" y="3175886"/>
-        <a:ext cx="8199120" cy="529206"/>
-      </dsp:txXfrm>
-    </dsp:sp>
-    <dsp:sp modelId="{664F1045-8E89-4B39-972C-A21C9A70789B}">
-      <dsp:nvSpPr>
-        <dsp:cNvPr id="0" name=""/>
-        <dsp:cNvSpPr/>
-      </dsp:nvSpPr>
-      <dsp:spPr>
-        <a:xfrm>
-          <a:off x="0" y="3705093"/>
-          <a:ext cx="8199120" cy="0"/>
-        </a:xfrm>
-        <a:prstGeom prst="line">
-          <a:avLst/>
-        </a:prstGeom>
-        <a:solidFill>
-          <a:schemeClr val="accent1">
-            <a:hueOff val="0"/>
-            <a:satOff val="0"/>
-            <a:lumOff val="0"/>
-            <a:alphaOff val="0"/>
-          </a:schemeClr>
-        </a:solidFill>
-        <a:ln w="10795" cap="flat" cmpd="sng" algn="ctr">
-          <a:solidFill>
-            <a:schemeClr val="accent1">
-              <a:hueOff val="0"/>
-              <a:satOff val="0"/>
-              <a:lumOff val="0"/>
-              <a:alphaOff val="0"/>
-            </a:schemeClr>
-          </a:solidFill>
-          <a:prstDash val="solid"/>
-        </a:ln>
-        <a:effectLst/>
-      </dsp:spPr>
-      <dsp:style>
-        <a:lnRef idx="2">
-          <a:scrgbClr r="0" g="0" b="0"/>
-        </a:lnRef>
-        <a:fillRef idx="1">
-          <a:scrgbClr r="0" g="0" b="0"/>
-        </a:fillRef>
-        <a:effectRef idx="0">
-          <a:scrgbClr r="0" g="0" b="0"/>
-        </a:effectRef>
-        <a:fontRef idx="minor">
-          <a:schemeClr val="lt1"/>
-        </a:fontRef>
-      </dsp:style>
-    </dsp:sp>
-    <dsp:sp modelId="{3D0CE573-FF90-4F5F-8605-70D764C5A6BF}">
-      <dsp:nvSpPr>
-        <dsp:cNvPr id="0" name=""/>
-        <dsp:cNvSpPr/>
-      </dsp:nvSpPr>
-      <dsp:spPr>
-        <a:xfrm>
-          <a:off x="0" y="3705093"/>
-          <a:ext cx="8199120" cy="529206"/>
-        </a:xfrm>
-        <a:prstGeom prst="rect">
-          <a:avLst/>
-        </a:prstGeom>
-        <a:noFill/>
-        <a:ln>
-          <a:noFill/>
-        </a:ln>
-        <a:effectLst/>
-      </dsp:spPr>
-      <dsp:style>
-        <a:lnRef idx="0">
-          <a:scrgbClr r="0" g="0" b="0"/>
-        </a:lnRef>
-        <a:fillRef idx="0">
-          <a:scrgbClr r="0" g="0" b="0"/>
-        </a:fillRef>
-        <a:effectRef idx="0">
-          <a:scrgbClr r="0" g="0" b="0"/>
-        </a:effectRef>
-        <a:fontRef idx="minor"/>
-      </dsp:style>
-      <dsp:txBody>
-        <a:bodyPr spcFirstLastPara="0" vert="horz" wrap="square" lIns="76200" tIns="76200" rIns="76200" bIns="76200" numCol="1" spcCol="1270" anchor="t" anchorCtr="0">
-          <a:noAutofit/>
-        </a:bodyPr>
-        <a:lstStyle/>
-        <a:p>
-          <a:pPr marL="0" lvl="0" indent="0" algn="l" defTabSz="889000">
-            <a:lnSpc>
-              <a:spcPct val="90000"/>
-            </a:lnSpc>
-            <a:spcBef>
-              <a:spcPct val="0"/>
-            </a:spcBef>
-            <a:spcAft>
-              <a:spcPct val="35000"/>
-            </a:spcAft>
-            <a:buNone/>
-          </a:pPr>
-          <a:r>
-            <a:rPr lang="en-US" sz="2000" kern="1200" dirty="0"/>
-            <a:t>Submission enables us to adorn the gospel, not obscure it.  </a:t>
-          </a:r>
-        </a:p>
-      </dsp:txBody>
-      <dsp:txXfrm>
-        <a:off x="0" y="3705093"/>
-        <a:ext cx="8199120" cy="529206"/>
-      </dsp:txXfrm>
-    </dsp:sp>
-    <dsp:sp modelId="{CCE7BCD6-272F-43A0-AA9E-4FB81BFDB011}">
-      <dsp:nvSpPr>
-        <dsp:cNvPr id="0" name=""/>
-        <dsp:cNvSpPr/>
-      </dsp:nvSpPr>
-      <dsp:spPr>
-        <a:xfrm>
-          <a:off x="0" y="4234300"/>
-          <a:ext cx="8199120" cy="0"/>
-        </a:xfrm>
-        <a:prstGeom prst="line">
-          <a:avLst/>
-        </a:prstGeom>
-        <a:solidFill>
-          <a:schemeClr val="accent1">
-            <a:hueOff val="0"/>
-            <a:satOff val="0"/>
-            <a:lumOff val="0"/>
-            <a:alphaOff val="0"/>
-          </a:schemeClr>
-        </a:solidFill>
-        <a:ln w="10795" cap="flat" cmpd="sng" algn="ctr">
-          <a:solidFill>
-            <a:schemeClr val="accent1">
-              <a:hueOff val="0"/>
-              <a:satOff val="0"/>
-              <a:lumOff val="0"/>
-              <a:alphaOff val="0"/>
-            </a:schemeClr>
-          </a:solidFill>
-          <a:prstDash val="solid"/>
-        </a:ln>
-        <a:effectLst/>
-      </dsp:spPr>
-      <dsp:style>
-        <a:lnRef idx="2">
-          <a:scrgbClr r="0" g="0" b="0"/>
-        </a:lnRef>
-        <a:fillRef idx="1">
-          <a:scrgbClr r="0" g="0" b="0"/>
-        </a:fillRef>
-        <a:effectRef idx="0">
-          <a:scrgbClr r="0" g="0" b="0"/>
-        </a:effectRef>
-        <a:fontRef idx="minor">
-          <a:schemeClr val="lt1"/>
-        </a:fontRef>
-      </dsp:style>
-    </dsp:sp>
-    <dsp:sp modelId="{2EA7DBA8-167C-404A-9F22-280ECD96DC77}">
-      <dsp:nvSpPr>
-        <dsp:cNvPr id="0" name=""/>
-        <dsp:cNvSpPr/>
-      </dsp:nvSpPr>
-      <dsp:spPr>
-        <a:xfrm>
-          <a:off x="0" y="4234300"/>
-          <a:ext cx="8199120" cy="529206"/>
-        </a:xfrm>
-        <a:prstGeom prst="rect">
-          <a:avLst/>
-        </a:prstGeom>
-        <a:noFill/>
-        <a:ln>
-          <a:noFill/>
-        </a:ln>
-        <a:effectLst/>
-      </dsp:spPr>
-      <dsp:style>
-        <a:lnRef idx="0">
-          <a:scrgbClr r="0" g="0" b="0"/>
-        </a:lnRef>
-        <a:fillRef idx="0">
-          <a:scrgbClr r="0" g="0" b="0"/>
-        </a:fillRef>
-        <a:effectRef idx="0">
-          <a:scrgbClr r="0" g="0" b="0"/>
-        </a:effectRef>
-        <a:fontRef idx="minor"/>
-      </dsp:style>
-      <dsp:txBody>
-        <a:bodyPr spcFirstLastPara="0" vert="horz" wrap="square" lIns="76200" tIns="76200" rIns="76200" bIns="76200" numCol="1" spcCol="1270" anchor="t" anchorCtr="0">
-          <a:noAutofit/>
-        </a:bodyPr>
-        <a:lstStyle/>
-        <a:p>
-          <a:pPr marL="0" lvl="0" indent="0" algn="l" defTabSz="889000">
-            <a:lnSpc>
-              <a:spcPct val="90000"/>
-            </a:lnSpc>
-            <a:spcBef>
-              <a:spcPct val="0"/>
-            </a:spcBef>
-            <a:spcAft>
-              <a:spcPct val="35000"/>
-            </a:spcAft>
-            <a:buNone/>
-          </a:pPr>
-          <a:r>
-            <a:rPr lang="en-US" sz="2000" kern="1200"/>
-            <a:t>In Titus, submission is not about power; it is about posture.  </a:t>
-          </a:r>
-        </a:p>
-      </dsp:txBody>
-      <dsp:txXfrm>
-        <a:off x="0" y="4234300"/>
-        <a:ext cx="8199120" cy="529206"/>
-      </dsp:txXfrm>
-    </dsp:sp>
-    <dsp:sp modelId="{124DCCA8-4781-4A0D-91F3-0DA78EB6146C}">
-      <dsp:nvSpPr>
-        <dsp:cNvPr id="0" name=""/>
-        <dsp:cNvSpPr/>
-      </dsp:nvSpPr>
-      <dsp:spPr>
-        <a:xfrm>
-          <a:off x="0" y="4763507"/>
-          <a:ext cx="8199120" cy="0"/>
-        </a:xfrm>
-        <a:prstGeom prst="line">
-          <a:avLst/>
-        </a:prstGeom>
-        <a:solidFill>
-          <a:schemeClr val="accent1">
-            <a:hueOff val="0"/>
-            <a:satOff val="0"/>
-            <a:lumOff val="0"/>
-            <a:alphaOff val="0"/>
-          </a:schemeClr>
-        </a:solidFill>
-        <a:ln w="10795" cap="flat" cmpd="sng" algn="ctr">
-          <a:solidFill>
-            <a:schemeClr val="accent1">
-              <a:hueOff val="0"/>
-              <a:satOff val="0"/>
-              <a:lumOff val="0"/>
-              <a:alphaOff val="0"/>
-            </a:schemeClr>
-          </a:solidFill>
-          <a:prstDash val="solid"/>
-        </a:ln>
-        <a:effectLst/>
-      </dsp:spPr>
-      <dsp:style>
-        <a:lnRef idx="2">
-          <a:scrgbClr r="0" g="0" b="0"/>
-        </a:lnRef>
-        <a:fillRef idx="1">
-          <a:scrgbClr r="0" g="0" b="0"/>
-        </a:fillRef>
-        <a:effectRef idx="0">
-          <a:scrgbClr r="0" g="0" b="0"/>
-        </a:effectRef>
-        <a:fontRef idx="minor">
-          <a:schemeClr val="lt1"/>
-        </a:fontRef>
-      </dsp:style>
-    </dsp:sp>
-    <dsp:sp modelId="{ED36F9FA-DCEF-4578-991E-002E510837CA}">
-      <dsp:nvSpPr>
-        <dsp:cNvPr id="0" name=""/>
-        <dsp:cNvSpPr/>
-      </dsp:nvSpPr>
-      <dsp:spPr>
-        <a:xfrm>
-          <a:off x="0" y="4763507"/>
-          <a:ext cx="8199120" cy="529206"/>
-        </a:xfrm>
-        <a:prstGeom prst="rect">
-          <a:avLst/>
-        </a:prstGeom>
-        <a:noFill/>
-        <a:ln>
-          <a:noFill/>
-        </a:ln>
-        <a:effectLst/>
-      </dsp:spPr>
-      <dsp:style>
-        <a:lnRef idx="0">
-          <a:scrgbClr r="0" g="0" b="0"/>
-        </a:lnRef>
-        <a:fillRef idx="0">
-          <a:scrgbClr r="0" g="0" b="0"/>
-        </a:fillRef>
-        <a:effectRef idx="0">
-          <a:scrgbClr r="0" g="0" b="0"/>
-        </a:effectRef>
-        <a:fontRef idx="minor"/>
-      </dsp:style>
-      <dsp:txBody>
-        <a:bodyPr spcFirstLastPara="0" vert="horz" wrap="square" lIns="76200" tIns="76200" rIns="76200" bIns="76200" numCol="1" spcCol="1270" anchor="t" anchorCtr="0">
-          <a:noAutofit/>
-        </a:bodyPr>
-        <a:lstStyle/>
-        <a:p>
-          <a:pPr marL="0" lvl="0" indent="0" algn="l" defTabSz="889000">
-            <a:lnSpc>
-              <a:spcPct val="90000"/>
-            </a:lnSpc>
-            <a:spcBef>
-              <a:spcPct val="0"/>
-            </a:spcBef>
-            <a:spcAft>
-              <a:spcPct val="35000"/>
-            </a:spcAft>
-            <a:buNone/>
-          </a:pPr>
-          <a:r>
-            <a:rPr lang="en-US" sz="2000" kern="1200"/>
-            <a:t>It is not about being less; it is about showing Christ more.</a:t>
-          </a:r>
-        </a:p>
-      </dsp:txBody>
-      <dsp:txXfrm>
-        <a:off x="0" y="4763507"/>
-        <a:ext cx="8199120" cy="529206"/>
-      </dsp:txXfrm>
-    </dsp:sp>
-  </dsp:spTree>
-</dsp:drawing>
-</file>
-
-<file path=ppt/diagrams/layout1.xml><?xml version="1.0" encoding="utf-8"?>
-<dgm:layoutDef xmlns:dgm="http://schemas.openxmlformats.org/drawingml/2006/diagram" xmlns:a="http://schemas.openxmlformats.org/drawingml/2006/main" uniqueId="urn:microsoft.com/office/officeart/2008/layout/LinedList">
-  <dgm:title val=""/>
-  <dgm:desc val=""/>
-  <dgm:catLst>
-    <dgm:cat type="hierarchy" pri="8000"/>
-    <dgm:cat type="list" pri="2500"/>
-  </dgm:catLst>
-  <dgm:sampData>
-    <dgm:dataModel>
-      <dgm:ptLst>
-        <dgm:pt modelId="0" type="doc"/>
-        <dgm:pt modelId="1">
-          <dgm:prSet phldr="1"/>
-        </dgm:pt>
-        <dgm:pt modelId="11">
-          <dgm:prSet phldr="1"/>
-        </dgm:pt>
-        <dgm:pt modelId="12">
-          <dgm:prSet phldr="1"/>
-        </dgm:pt>
-        <dgm:pt modelId="13">
-          <dgm:prSet phldr="1"/>
-        </dgm:pt>
-      </dgm:ptLst>
-      <dgm:cxnLst>
-        <dgm:cxn modelId="2" srcId="0" destId="1" srcOrd="0" destOrd="0"/>
-        <dgm:cxn modelId="3" srcId="1" destId="11" srcOrd="0" destOrd="0"/>
-        <dgm:cxn modelId="4" srcId="1" destId="12" srcOrd="1" destOrd="0"/>
-        <dgm:cxn modelId="5" srcId="1" destId="13" srcOrd="2" destOrd="0"/>
-      </dgm:cxnLst>
-      <dgm:bg/>
-      <dgm:whole/>
-    </dgm:dataModel>
-  </dgm:sampData>
-  <dgm:styleData>
-    <dgm:dataModel>
-      <dgm:ptLst>
-        <dgm:pt modelId="0" type="doc"/>
-        <dgm:pt modelId="1">
-          <dgm:prSet phldr="1"/>
-        </dgm:pt>
-        <dgm:pt modelId="11">
-          <dgm:prSet phldr="1"/>
-        </dgm:pt>
-        <dgm:pt modelId="12">
-          <dgm:prSet phldr="1"/>
-        </dgm:pt>
-      </dgm:ptLst>
-      <dgm:cxnLst>
-        <dgm:cxn modelId="2" srcId="0" destId="1" srcOrd="0" destOrd="0"/>
-        <dgm:cxn modelId="3" srcId="1" destId="11" srcOrd="0" destOrd="0"/>
-        <dgm:cxn modelId="4" srcId="1" destId="12" srcOrd="1" destOrd="0"/>
-      </dgm:cxnLst>
-      <dgm:bg/>
-      <dgm:whole/>
-    </dgm:dataModel>
-  </dgm:styleData>
-  <dgm:clrData>
-    <dgm:dataModel>
-      <dgm:ptLst>
-        <dgm:pt modelId="0" type="doc"/>
-        <dgm:pt modelId="1">
-          <dgm:prSet phldr="1"/>
-        </dgm:pt>
-        <dgm:pt modelId="11">
-          <dgm:prSet phldr="1"/>
-        </dgm:pt>
-        <dgm:pt modelId="12">
-          <dgm:prSet phldr="1"/>
-        </dgm:pt>
-      </dgm:ptLst>
-      <dgm:cxnLst>
-        <dgm:cxn modelId="2" srcId="0" destId="1" srcOrd="0" destOrd="0"/>
-        <dgm:cxn modelId="3" srcId="1" destId="11" srcOrd="0" destOrd="0"/>
-        <dgm:cxn modelId="4" srcId="1" destId="12" srcOrd="1" destOrd="0"/>
-      </dgm:cxnLst>
-      <dgm:bg/>
-      <dgm:whole/>
-    </dgm:dataModel>
-  </dgm:clrData>
-  <dgm:layoutNode name="vert0">
-    <dgm:varLst>
-      <dgm:dir/>
-      <dgm:animOne val="branch"/>
-      <dgm:animLvl val="lvl"/>
-    </dgm:varLst>
-    <dgm:choose name="Name0">
-      <dgm:if name="Name1" func="var" arg="dir" op="equ" val="norm">
-        <dgm:alg type="lin">
-          <dgm:param type="linDir" val="fromT"/>
-          <dgm:param type="nodeHorzAlign" val="l"/>
-        </dgm:alg>
-      </dgm:if>
-      <dgm:else name="Name2">
-        <dgm:alg type="lin">
-          <dgm:param type="linDir" val="fromT"/>
-          <dgm:param type="nodeHorzAlign" val="r"/>
-        </dgm:alg>
-      </dgm:else>
-    </dgm:choose>
-    <dgm:shape xmlns:r="http://schemas.openxmlformats.org/officeDocument/2006/relationships" r:blip="">
-      <dgm:adjLst/>
-    </dgm:shape>
-    <dgm:presOf/>
-    <dgm:constrLst>
-      <dgm:constr type="w" for="ch" forName="horz1" refType="w"/>
-      <dgm:constr type="h" for="ch" forName="horz1" refType="h"/>
-      <dgm:constr type="h" for="des" forName="vert1" refType="h"/>
-      <dgm:constr type="h" for="des" forName="tx1" refType="h"/>
-      <dgm:constr type="h" for="des" forName="horz2" refType="h"/>
-      <dgm:constr type="h" for="des" forName="vert2" refType="h"/>
-      <dgm:constr type="h" for="des" forName="horz3" refType="h"/>
-      <dgm:constr type="h" for="des" forName="vert3" refType="h"/>
-      <dgm:constr type="h" for="des" forName="horz4" refType="h"/>
-      <dgm:constr type="h" for="des" ptType="node" refType="h"/>
-      <dgm:constr type="primFontSz" for="des" forName="tx1" op="equ" val="65"/>
-      <dgm:constr type="primFontSz" for="des" forName="tx2" op="equ" val="65"/>
-      <dgm:constr type="primFontSz" for="des" forName="tx3" op="equ" val="65"/>
-      <dgm:constr type="primFontSz" for="des" forName="tx4" op="equ" val="65"/>
-      <dgm:constr type="w" for="des" forName="thickLine" refType="w"/>
-      <dgm:constr type="h" for="des" forName="thickLine"/>
-      <dgm:constr type="h" for="des" forName="thinLine1"/>
-      <dgm:constr type="h" for="des" forName="thinLine2b"/>
-      <dgm:constr type="h" for="des" forName="thinLine3"/>
-      <dgm:constr type="h" for="des" forName="vertSpace2a" refType="h" fact="0.05"/>
-      <dgm:constr type="h" for="des" forName="vertSpace2b" refType="h" refFor="des" refForName="vertSpace2a"/>
-    </dgm:constrLst>
-    <dgm:forEach name="Name3" axis="ch" ptType="node">
-      <dgm:layoutNode name="thickLine" styleLbl="alignNode1">
-        <dgm:alg type="sp"/>
-        <dgm:shape xmlns:r="http://schemas.openxmlformats.org/officeDocument/2006/relationships" type="line" r:blip="">
-          <dgm:adjLst/>
-        </dgm:shape>
-        <dgm:presOf/>
-      </dgm:layoutNode>
-      <dgm:layoutNode name="horz1">
-        <dgm:choose name="Name4">
-          <dgm:if name="Name5" func="var" arg="dir" op="equ" val="norm">
-            <dgm:alg type="lin">
-              <dgm:param type="linDir" val="fromL"/>
-              <dgm:param type="nodeVertAlign" val="t"/>
-            </dgm:alg>
-          </dgm:if>
-          <dgm:else name="Name6">
-            <dgm:alg type="lin">
-              <dgm:param type="linDir" val="fromR"/>
-              <dgm:param type="nodeVertAlign" val="t"/>
-            </dgm:alg>
-          </dgm:else>
-        </dgm:choose>
-        <dgm:shape xmlns:r="http://schemas.openxmlformats.org/officeDocument/2006/relationships" r:blip="">
-          <dgm:adjLst/>
-        </dgm:shape>
-        <dgm:presOf/>
-        <dgm:choose name="Name7">
-          <dgm:if name="Name8" axis="root des" func="maxDepth" op="equ" val="1">
-            <dgm:constrLst>
-              <dgm:constr type="w" for="ch" forName="tx1" refType="w"/>
-            </dgm:constrLst>
-          </dgm:if>
-          <dgm:if name="Name9" axis="root des" func="maxDepth" op="equ" val="2">
-            <dgm:constrLst>
-              <dgm:constr type="w" for="ch" forName="tx1" refType="w" fact="0.2"/>
-              <dgm:constr type="w" for="des" forName="tx2" refType="w" fact="0.785"/>
-              <dgm:constr type="w" for="des" forName="horzSpace2" refType="w" fact="0.015"/>
-              <dgm:constr type="w" for="des" forName="thinLine2b" refType="w" fact="0.8"/>
-            </dgm:constrLst>
-          </dgm:if>
-          <dgm:if name="Name10" axis="root des" func="maxDepth" op="equ" val="3">
-            <dgm:constrLst>
-              <dgm:constr type="w" for="ch" forName="tx1" refType="w" fact="0.2"/>
-              <dgm:constr type="w" for="des" forName="tx2" refType="w" fact="0.385"/>
-              <dgm:constr type="w" for="des" forName="tx3" refType="w" fact="0.385"/>
-              <dgm:constr type="w" for="des" forName="horzSpace2" refType="w" fact="0.015"/>
-              <dgm:constr type="w" for="des" forName="horzSpace3" refType="w" fact="0.015"/>
-              <dgm:constr type="w" for="des" forName="thinLine2b" refType="w" fact="0.8"/>
-              <dgm:constr type="w" for="des" forName="thinLine3" refType="w" fact="0.385"/>
-            </dgm:constrLst>
-          </dgm:if>
-          <dgm:if name="Name11" axis="root des" func="maxDepth" op="gte" val="4">
-            <dgm:constrLst>
-              <dgm:constr type="w" for="ch" forName="tx1" refType="w" fact="0.2"/>
-              <dgm:constr type="w" for="des" forName="tx2" refType="w" fact="0.2516"/>
-              <dgm:constr type="w" for="des" forName="tx3" refType="w" fact="0.2516"/>
-              <dgm:constr type="w" for="des" forName="tx4" refType="w" fact="0.2516"/>
-              <dgm:constr type="w" for="des" forName="horzSpace2" refType="w" fact="0.015"/>
-              <dgm:constr type="w" for="des" forName="horzSpace3" refType="w" fact="0.015"/>
-              <dgm:constr type="w" for="des" forName="horzSpace4" refType="w" fact="0.015"/>
-              <dgm:constr type="w" for="des" forName="thinLine2b" refType="w" fact="0.8"/>
-              <dgm:constr type="w" for="des" forName="thinLine3" refType="w" fact="0.5332"/>
-            </dgm:constrLst>
-          </dgm:if>
-          <dgm:else name="Name12"/>
-        </dgm:choose>
-        <dgm:layoutNode name="tx1" styleLbl="revTx">
-          <dgm:alg type="tx">
-            <dgm:param type="parTxLTRAlign" val="l"/>
-            <dgm:param type="parTxRTLAlign" val="r"/>
-            <dgm:param type="txAnchorVert" val="t"/>
-          </dgm:alg>
-          <dgm:shape xmlns:r="http://schemas.openxmlformats.org/officeDocument/2006/relationships" type="rect" r:blip="">
-            <dgm:adjLst/>
-          </dgm:shape>
-          <dgm:presOf axis="self"/>
-          <dgm:constrLst>
-            <dgm:constr type="tMarg" refType="primFontSz" fact="0.3"/>
-            <dgm:constr type="bMarg" refType="primFontSz" fact="0.3"/>
-            <dgm:constr type="lMarg" refType="primFontSz" fact="0.3"/>
-            <dgm:constr type="rMarg" refType="primFontSz" fact="0.3"/>
-          </dgm:constrLst>
-          <dgm:ruleLst>
-            <dgm:rule type="primFontSz" val="5" fact="NaN" max="NaN"/>
-          </dgm:ruleLst>
-        </dgm:layoutNode>
-        <dgm:layoutNode name="vert1">
-          <dgm:choose name="Name13">
-            <dgm:if name="Name14" func="var" arg="dir" op="equ" val="norm">
-              <dgm:alg type="lin">
-                <dgm:param type="linDir" val="fromT"/>
-                <dgm:param type="nodeHorzAlign" val="l"/>
-              </dgm:alg>
-            </dgm:if>
-            <dgm:else name="Name15">
-              <dgm:alg type="lin">
-                <dgm:param type="linDir" val="fromT"/>
-                <dgm:param type="nodeHorzAlign" val="r"/>
-              </dgm:alg>
-            </dgm:else>
-          </dgm:choose>
-          <dgm:shape xmlns:r="http://schemas.openxmlformats.org/officeDocument/2006/relationships" r:blip="">
-            <dgm:adjLst/>
-          </dgm:shape>
-          <dgm:presOf/>
-          <dgm:forEach name="Name16" axis="ch" ptType="node">
-            <dgm:choose name="Name17">
-              <dgm:if name="Name18" axis="self" ptType="node" func="pos" op="equ" val="1">
-                <dgm:layoutNode name="vertSpace2a">
-                  <dgm:alg type="sp"/>
-                  <dgm:shape xmlns:r="http://schemas.openxmlformats.org/officeDocument/2006/relationships" r:blip="">
-                    <dgm:adjLst/>
-                  </dgm:shape>
-                  <dgm:presOf/>
-                </dgm:layoutNode>
-              </dgm:if>
-              <dgm:else name="Name19"/>
-            </dgm:choose>
-            <dgm:layoutNode name="horz2">
-              <dgm:choose name="Name20">
-                <dgm:if name="Name21" func="var" arg="dir" op="equ" val="norm">
-                  <dgm:alg type="lin">
-                    <dgm:param type="linDir" val="fromL"/>
-                    <dgm:param type="nodeVertAlign" val="t"/>
-                  </dgm:alg>
-                </dgm:if>
-                <dgm:else name="Name22">
-                  <dgm:alg type="lin">
-                    <dgm:param type="linDir" val="fromR"/>
-                    <dgm:param type="nodeVertAlign" val="t"/>
-                  </dgm:alg>
-                </dgm:else>
-              </dgm:choose>
-              <dgm:shape xmlns:r="http://schemas.openxmlformats.org/officeDocument/2006/relationships" r:blip="">
-                <dgm:adjLst/>
-              </dgm:shape>
-              <dgm:presOf/>
-              <dgm:layoutNode name="horzSpace2">
-                <dgm:alg type="sp"/>
-                <dgm:shape xmlns:r="http://schemas.openxmlformats.org/officeDocument/2006/relationships" r:blip="">
-                  <dgm:adjLst/>
-                </dgm:shape>
-                <dgm:presOf/>
-              </dgm:layoutNode>
-              <dgm:layoutNode name="tx2" styleLbl="revTx">
-                <dgm:alg type="tx">
-                  <dgm:param type="parTxLTRAlign" val="l"/>
-                  <dgm:param type="parTxRTLAlign" val="r"/>
-                  <dgm:param type="txAnchorVert" val="t"/>
-                </dgm:alg>
-                <dgm:shape xmlns:r="http://schemas.openxmlformats.org/officeDocument/2006/relationships" type="rect" r:blip="">
-                  <dgm:adjLst/>
-                </dgm:shape>
-                <dgm:presOf axis="self"/>
-                <dgm:constrLst>
-                  <dgm:constr type="tMarg" refType="primFontSz" fact="0.3"/>
-                  <dgm:constr type="bMarg" refType="primFontSz" fact="0.3"/>
-                  <dgm:constr type="lMarg" refType="primFontSz" fact="0.3"/>
-                  <dgm:constr type="rMarg" refType="primFontSz" fact="0.3"/>
-                </dgm:constrLst>
-                <dgm:ruleLst>
-                  <dgm:rule type="primFontSz" val="5" fact="NaN" max="NaN"/>
-                </dgm:ruleLst>
-              </dgm:layoutNode>
-              <dgm:layoutNode name="vert2">
-                <dgm:choose name="Name23">
-                  <dgm:if name="Name24" func="var" arg="dir" op="equ" val="norm">
-                    <dgm:alg type="lin">
-                      <dgm:param type="linDir" val="fromT"/>
-                      <dgm:param type="nodeHorzAlign" val="l"/>
-                    </dgm:alg>
-                  </dgm:if>
-                  <dgm:else name="Name25">
-                    <dgm:alg type="lin">
-                      <dgm:param type="linDir" val="fromT"/>
-                      <dgm:param type="nodeHorzAlign" val="r"/>
-                    </dgm:alg>
-                  </dgm:else>
-                </dgm:choose>
-                <dgm:shape xmlns:r="http://schemas.openxmlformats.org/officeDocument/2006/relationships" r:blip="">
-                  <dgm:adjLst/>
-                </dgm:shape>
-                <dgm:presOf/>
-                <dgm:forEach name="Name26" axis="ch" ptType="node">
-                  <dgm:layoutNode name="horz3">
-                    <dgm:choose name="Name27">
-                      <dgm:if name="Name28" func="var" arg="dir" op="equ" val="norm">
-                        <dgm:alg type="lin">
-                          <dgm:param type="linDir" val="fromL"/>
-                          <dgm:param type="nodeVertAlign" val="t"/>
-                        </dgm:alg>
-                      </dgm:if>
-                      <dgm:else name="Name29">
-                        <dgm:alg type="lin">
-                          <dgm:param type="linDir" val="fromR"/>
-                          <dgm:param type="nodeVertAlign" val="t"/>
-                        </dgm:alg>
-                      </dgm:else>
-                    </dgm:choose>
-                    <dgm:shape xmlns:r="http://schemas.openxmlformats.org/officeDocument/2006/relationships" r:blip="">
-                      <dgm:adjLst/>
-                    </dgm:shape>
-                    <dgm:presOf/>
-                    <dgm:layoutNode name="horzSpace3">
-                      <dgm:alg type="sp"/>
-                      <dgm:shape xmlns:r="http://schemas.openxmlformats.org/officeDocument/2006/relationships" r:blip="">
-                        <dgm:adjLst/>
-                      </dgm:shape>
-                      <dgm:presOf/>
-                    </dgm:layoutNode>
-                    <dgm:layoutNode name="tx3" styleLbl="revTx">
-                      <dgm:alg type="tx">
-                        <dgm:param type="parTxLTRAlign" val="l"/>
-                        <dgm:param type="parTxRTLAlign" val="r"/>
-                        <dgm:param type="txAnchorVert" val="t"/>
-                      </dgm:alg>
-                      <dgm:shape xmlns:r="http://schemas.openxmlformats.org/officeDocument/2006/relationships" type="rect" r:blip="">
-                        <dgm:adjLst/>
-                      </dgm:shape>
-                      <dgm:presOf axis="self"/>
-                      <dgm:constrLst>
-                        <dgm:constr type="tMarg" refType="primFontSz" fact="0.3"/>
-                        <dgm:constr type="bMarg" refType="primFontSz" fact="0.3"/>
-                        <dgm:constr type="lMarg" refType="primFontSz" fact="0.3"/>
-                        <dgm:constr type="rMarg" refType="primFontSz" fact="0.3"/>
-                      </dgm:constrLst>
-                      <dgm:ruleLst>
-                        <dgm:rule type="primFontSz" val="5" fact="NaN" max="NaN"/>
-                      </dgm:ruleLst>
-                    </dgm:layoutNode>
-                    <dgm:layoutNode name="vert3">
-                      <dgm:choose name="Name30">
-                        <dgm:if name="Name31" func="var" arg="dir" op="equ" val="norm">
-                          <dgm:alg type="lin">
-                            <dgm:param type="linDir" val="fromT"/>
-                            <dgm:param type="nodeHorzAlign" val="l"/>
-                          </dgm:alg>
-                        </dgm:if>
-                        <dgm:else name="Name32">
-                          <dgm:alg type="lin">
-                            <dgm:param type="linDir" val="fromT"/>
-                            <dgm:param type="nodeHorzAlign" val="r"/>
-                          </dgm:alg>
-                        </dgm:else>
-                      </dgm:choose>
-                      <dgm:shape xmlns:r="http://schemas.openxmlformats.org/officeDocument/2006/relationships" r:blip="">
-                        <dgm:adjLst/>
-                      </dgm:shape>
-                      <dgm:presOf/>
-                      <dgm:forEach name="Name33" axis="ch" ptType="node">
-                        <dgm:layoutNode name="horz4">
-                          <dgm:choose name="Name34">
-                            <dgm:if name="Name35" func="var" arg="dir" op="equ" val="norm">
-                              <dgm:alg type="lin">
-                                <dgm:param type="linDir" val="fromL"/>
-                                <dgm:param type="nodeVertAlign" val="t"/>
-                              </dgm:alg>
-                            </dgm:if>
-                            <dgm:else name="Name36">
-                              <dgm:alg type="lin">
-                                <dgm:param type="linDir" val="fromR"/>
-                                <dgm:param type="nodeVertAlign" val="t"/>
-                              </dgm:alg>
-                            </dgm:else>
-                          </dgm:choose>
-                          <dgm:shape xmlns:r="http://schemas.openxmlformats.org/officeDocument/2006/relationships" r:blip="">
-                            <dgm:adjLst/>
-                          </dgm:shape>
-                          <dgm:presOf/>
-                          <dgm:layoutNode name="horzSpace4">
-                            <dgm:alg type="sp"/>
-                            <dgm:shape xmlns:r="http://schemas.openxmlformats.org/officeDocument/2006/relationships" r:blip="">
-                              <dgm:adjLst/>
-                            </dgm:shape>
-                            <dgm:presOf/>
-                          </dgm:layoutNode>
-                          <dgm:layoutNode name="tx4" styleLbl="revTx">
-                            <dgm:varLst>
-                              <dgm:bulletEnabled val="1"/>
-                            </dgm:varLst>
-                            <dgm:alg type="tx">
-                              <dgm:param type="parTxLTRAlign" val="l"/>
-                              <dgm:param type="parTxRTLAlign" val="r"/>
-                              <dgm:param type="txAnchorVert" val="t"/>
-                            </dgm:alg>
-                            <dgm:shape xmlns:r="http://schemas.openxmlformats.org/officeDocument/2006/relationships" type="rect" r:blip="">
-                              <dgm:adjLst/>
-                            </dgm:shape>
-                            <dgm:presOf axis="desOrSelf" ptType="node"/>
-                            <dgm:constrLst>
-                              <dgm:constr type="tMarg" refType="primFontSz" fact="0.3"/>
-                              <dgm:constr type="bMarg" refType="primFontSz" fact="0.3"/>
-                              <dgm:constr type="lMarg" refType="primFontSz" fact="0.3"/>
-                              <dgm:constr type="rMarg" refType="primFontSz" fact="0.3"/>
-                            </dgm:constrLst>
-                            <dgm:ruleLst>
-                              <dgm:rule type="primFontSz" val="5" fact="NaN" max="NaN"/>
-                            </dgm:ruleLst>
-                          </dgm:layoutNode>
-                        </dgm:layoutNode>
-                      </dgm:forEach>
-                    </dgm:layoutNode>
-                  </dgm:layoutNode>
-                  <dgm:forEach name="Name37" axis="followSib" ptType="sibTrans" cnt="1">
-                    <dgm:layoutNode name="thinLine3" styleLbl="callout">
-                      <dgm:alg type="sp"/>
-                      <dgm:shape xmlns:r="http://schemas.openxmlformats.org/officeDocument/2006/relationships" type="line" r:blip="">
-                        <dgm:adjLst/>
-                      </dgm:shape>
-                      <dgm:presOf/>
-                    </dgm:layoutNode>
-                  </dgm:forEach>
-                </dgm:forEach>
-              </dgm:layoutNode>
-            </dgm:layoutNode>
-            <dgm:layoutNode name="thinLine2b" styleLbl="callout">
-              <dgm:alg type="sp"/>
-              <dgm:shape xmlns:r="http://schemas.openxmlformats.org/officeDocument/2006/relationships" type="line" r:blip="">
-                <dgm:adjLst/>
-              </dgm:shape>
-              <dgm:presOf/>
-            </dgm:layoutNode>
-            <dgm:layoutNode name="vertSpace2b">
-              <dgm:alg type="sp"/>
-              <dgm:shape xmlns:r="http://schemas.openxmlformats.org/officeDocument/2006/relationships" r:blip="">
-                <dgm:adjLst/>
-              </dgm:shape>
-              <dgm:presOf/>
-            </dgm:layoutNode>
-          </dgm:forEach>
-        </dgm:layoutNode>
-      </dgm:layoutNode>
-    </dgm:forEach>
-  </dgm:layoutNode>
-</dgm:layoutDef>
-</file>
-
-<file path=ppt/diagrams/quickStyle1.xml><?xml version="1.0" encoding="utf-8"?>
-<dgm:styleDef xmlns:dgm="http://schemas.openxmlformats.org/drawingml/2006/diagram" xmlns:a="http://schemas.openxmlformats.org/drawingml/2006/main" uniqueId="urn:microsoft.com/office/officeart/2005/8/quickstyle/simple1">
-  <dgm:title val=""/>
-  <dgm:desc val=""/>
-  <dgm:catLst>
-    <dgm:cat type="simple" pri="10100"/>
-  </dgm:catLst>
-  <dgm:scene3d>
-    <a:camera prst="orthographicFront"/>
-    <a:lightRig rig="threePt" dir="t"/>
-  </dgm:scene3d>
-  <dgm:styleLbl name="node0">
-    <dgm:scene3d>
-      <a:camera prst="orthographicFront"/>
-      <a:lightRig rig="threePt" dir="t"/>
-    </dgm:scene3d>
-    <dgm:sp3d/>
-    <dgm:txPr/>
-    <dgm:style>
-      <a:lnRef idx="2">
-        <a:scrgbClr r="0" g="0" b="0"/>
-      </a:lnRef>
-      <a:fillRef idx="1">
-        <a:scrgbClr r="0" g="0" b="0"/>
-      </a:fillRef>
-      <a:effectRef idx="0">
-        <a:scrgbClr r="0" g="0" b="0"/>
-      </a:effectRef>
-      <a:fontRef idx="minor">
-        <a:schemeClr val="lt1"/>
-      </a:fontRef>
-    </dgm:style>
-  </dgm:styleLbl>
-  <dgm:styleLbl name="lnNode1">
-    <dgm:scene3d>
-      <a:camera prst="orthographicFront"/>
-      <a:lightRig rig="threePt" dir="t"/>
-    </dgm:scene3d>
-    <dgm:sp3d/>
-    <dgm:txPr/>
-    <dgm:style>
-      <a:lnRef idx="2">
-        <a:scrgbClr r="0" g="0" b="0"/>
-      </a:lnRef>
-      <a:fillRef idx="1">
-        <a:scrgbClr r="0" g="0" b="0"/>
-      </a:fillRef>
-      <a:effectRef idx="0">
-        <a:scrgbClr r="0" g="0" b="0"/>
-      </a:effectRef>
-      <a:fontRef idx="minor">
-        <a:schemeClr val="lt1"/>
-      </a:fontRef>
-    </dgm:style>
-  </dgm:styleLbl>
-  <dgm:styleLbl name="vennNode1">
-    <dgm:scene3d>
-      <a:camera prst="orthographicFront"/>
-      <a:lightRig rig="threePt" dir="t"/>
-    </dgm:scene3d>
-    <dgm:sp3d/>
-    <dgm:txPr/>
-    <dgm:style>
-      <a:lnRef idx="2">
-        <a:scrgbClr r="0" g="0" b="0"/>
-      </a:lnRef>
-      <a:fillRef idx="1">
-        <a:scrgbClr r="0" g="0" b="0"/>
-      </a:fillRef>
-      <a:effectRef idx="0">
-        <a:scrgbClr r="0" g="0" b="0"/>
-      </a:effectRef>
-      <a:fontRef idx="minor">
-        <a:schemeClr val="tx1"/>
-      </a:fontRef>
-    </dgm:style>
-  </dgm:styleLbl>
-  <dgm:styleLbl name="alignNode1">
-    <dgm:scene3d>
-      <a:camera prst="orthographicFront"/>
-      <a:lightRig rig="threePt" dir="t"/>
-    </dgm:scene3d>
-    <dgm:sp3d/>
-    <dgm:txPr/>
-    <dgm:style>
-      <a:lnRef idx="2">
-        <a:scrgbClr r="0" g="0" b="0"/>
-      </a:lnRef>
-      <a:fillRef idx="1">
-        <a:scrgbClr r="0" g="0" b="0"/>
-      </a:fillRef>
-      <a:effectRef idx="0">
-        <a:scrgbClr r="0" g="0" b="0"/>
-      </a:effectRef>
-      <a:fontRef idx="minor">
-        <a:schemeClr val="lt1"/>
-      </a:fontRef>
-    </dgm:style>
-  </dgm:styleLbl>
-  <dgm:styleLbl name="node1">
-    <dgm:scene3d>
-      <a:camera prst="orthographicFront"/>
-      <a:lightRig rig="threePt" dir="t"/>
-    </dgm:scene3d>
-    <dgm:sp3d/>
-    <dgm:txPr/>
-    <dgm:style>
-      <a:lnRef idx="2">
-        <a:scrgbClr r="0" g="0" b="0"/>
-      </a:lnRef>
-      <a:fillRef idx="1">
-        <a:scrgbClr r="0" g="0" b="0"/>
-      </a:fillRef>
-      <a:effectRef idx="0">
-        <a:scrgbClr r="0" g="0" b="0"/>
-      </a:effectRef>
-      <a:fontRef idx="minor">
-        <a:schemeClr val="lt1"/>
-      </a:fontRef>
-    </dgm:style>
-  </dgm:styleLbl>
-  <dgm:styleLbl name="node2">
-    <dgm:scene3d>
-      <a:camera prst="orthographicFront"/>
-      <a:lightRig rig="threePt" dir="t"/>
-    </dgm:scene3d>
-    <dgm:sp3d/>
-    <dgm:txPr/>
-    <dgm:style>
-      <a:lnRef idx="2">
-        <a:scrgbClr r="0" g="0" b="0"/>
-      </a:lnRef>
-      <a:fillRef idx="1">
-        <a:scrgbClr r="0" g="0" b="0"/>
-      </a:fillRef>
-      <a:effectRef idx="0">
-        <a:scrgbClr r="0" g="0" b="0"/>
-      </a:effectRef>
-      <a:fontRef idx="minor">
-        <a:schemeClr val="lt1"/>
-      </a:fontRef>
-    </dgm:style>
-  </dgm:styleLbl>
-  <dgm:styleLbl name="node3">
-    <dgm:scene3d>
-      <a:camera prst="orthographicFront"/>
-      <a:lightRig rig="threePt" dir="t"/>
-    </dgm:scene3d>
-    <dgm:sp3d/>
-    <dgm:txPr/>
-    <dgm:style>
-      <a:lnRef idx="2">
-        <a:scrgbClr r="0" g="0" b="0"/>
-      </a:lnRef>
-      <a:fillRef idx="1">
-        <a:scrgbClr r="0" g="0" b="0"/>
-      </a:fillRef>
-      <a:effectRef idx="0">
-        <a:scrgbClr r="0" g="0" b="0"/>
-      </a:effectRef>
-      <a:fontRef idx="minor">
-        <a:schemeClr val="lt1"/>
-      </a:fontRef>
-    </dgm:style>
-  </dgm:styleLbl>
-  <dgm:styleLbl name="node4">
-    <dgm:scene3d>
-      <a:camera prst="orthographicFront"/>
-      <a:lightRig rig="threePt" dir="t"/>
-    </dgm:scene3d>
-    <dgm:sp3d/>
-    <dgm:txPr/>
-    <dgm:style>
-      <a:lnRef idx="2">
-        <a:scrgbClr r="0" g="0" b="0"/>
-      </a:lnRef>
-      <a:fillRef idx="1">
-        <a:scrgbClr r="0" g="0" b="0"/>
-      </a:fillRef>
-      <a:effectRef idx="0">
-        <a:scrgbClr r="0" g="0" b="0"/>
-      </a:effectRef>
-      <a:fontRef idx="minor">
-        <a:schemeClr val="lt1"/>
-      </a:fontRef>
-    </dgm:style>
-  </dgm:styleLbl>
-  <dgm:styleLbl name="fgImgPlace1">
-    <dgm:scene3d>
-      <a:camera prst="orthographicFront"/>
-      <a:lightRig rig="threePt" dir="t"/>
-    </dgm:scene3d>
-    <dgm:sp3d/>
-    <dgm:txPr/>
-    <dgm:style>
-      <a:lnRef idx="2">
-        <a:scrgbClr r="0" g="0" b="0"/>
-      </a:lnRef>
-      <a:fillRef idx="1">
-        <a:scrgbClr r="0" g="0" b="0"/>
-      </a:fillRef>
-      <a:effectRef idx="0">
-        <a:scrgbClr r="0" g="0" b="0"/>
-      </a:effectRef>
-      <a:fontRef idx="minor"/>
-    </dgm:style>
-  </dgm:styleLbl>
-  <dgm:styleLbl name="alignImgPlace1">
-    <dgm:scene3d>
-      <a:camera prst="orthographicFront"/>
-      <a:lightRig rig="threePt" dir="t"/>
-    </dgm:scene3d>
-    <dgm:sp3d/>
-    <dgm:txPr/>
-    <dgm:style>
-      <a:lnRef idx="2">
-        <a:scrgbClr r="0" g="0" b="0"/>
-      </a:lnRef>
-      <a:fillRef idx="1">
-        <a:scrgbClr r="0" g="0" b="0"/>
-      </a:fillRef>
-      <a:effectRef idx="0">
-        <a:scrgbClr r="0" g="0" b="0"/>
-      </a:effectRef>
-      <a:fontRef idx="minor"/>
-    </dgm:style>
-  </dgm:styleLbl>
-  <dgm:styleLbl name="bgImgPlace1">
-    <dgm:scene3d>
-      <a:camera prst="orthographicFront"/>
-      <a:lightRig rig="threePt" dir="t"/>
-    </dgm:scene3d>
-    <dgm:sp3d/>
-    <dgm:txPr/>
-    <dgm:style>
-      <a:lnRef idx="2">
-        <a:scrgbClr r="0" g="0" b="0"/>
-      </a:lnRef>
-      <a:fillRef idx="1">
-        <a:scrgbClr r="0" g="0" b="0"/>
-      </a:fillRef>
-      <a:effectRef idx="0">
-        <a:scrgbClr r="0" g="0" b="0"/>
-      </a:effectRef>
-      <a:fontRef idx="minor"/>
-    </dgm:style>
-  </dgm:styleLbl>
-  <dgm:styleLbl name="sibTrans2D1">
-    <dgm:scene3d>
-      <a:camera prst="orthographicFront"/>
-      <a:lightRig rig="threePt" dir="t"/>
-    </dgm:scene3d>
-    <dgm:sp3d/>
-    <dgm:txPr/>
-    <dgm:style>
-      <a:lnRef idx="0">
-        <a:scrgbClr r="0" g="0" b="0"/>
-      </a:lnRef>
-      <a:fillRef idx="1">
-        <a:scrgbClr r="0" g="0" b="0"/>
-      </a:fillRef>
-      <a:effectRef idx="0">
-        <a:scrgbClr r="0" g="0" b="0"/>
-      </a:effectRef>
-      <a:fontRef idx="minor">
-        <a:schemeClr val="lt1"/>
-      </a:fontRef>
-    </dgm:style>
-  </dgm:styleLbl>
-  <dgm:styleLbl name="fgSibTrans2D1">
-    <dgm:scene3d>
-      <a:camera prst="orthographicFront"/>
-      <a:lightRig rig="threePt" dir="t"/>
-    </dgm:scene3d>
-    <dgm:sp3d/>
-    <dgm:txPr/>
-    <dgm:style>
-      <a:lnRef idx="0">
-        <a:scrgbClr r="0" g="0" b="0"/>
-      </a:lnRef>
-      <a:fillRef idx="1">
-        <a:scrgbClr r="0" g="0" b="0"/>
-      </a:fillRef>
-      <a:effectRef idx="0">
-        <a:scrgbClr r="0" g="0" b="0"/>
-      </a:effectRef>
-      <a:fontRef idx="minor">
-        <a:schemeClr val="lt1"/>
-      </a:fontRef>
-    </dgm:style>
-  </dgm:styleLbl>
-  <dgm:styleLbl name="bgSibTrans2D1">
-    <dgm:scene3d>
-      <a:camera prst="orthographicFront"/>
-      <a:lightRig rig="threePt" dir="t"/>
-    </dgm:scene3d>
-    <dgm:sp3d/>
-    <dgm:txPr/>
-    <dgm:style>
-      <a:lnRef idx="0">
-        <a:scrgbClr r="0" g="0" b="0"/>
-      </a:lnRef>
-      <a:fillRef idx="1">
-        <a:scrgbClr r="0" g="0" b="0"/>
-      </a:fillRef>
-      <a:effectRef idx="0">
-        <a:scrgbClr r="0" g="0" b="0"/>
-      </a:effectRef>
-      <a:fontRef idx="minor">
-        <a:schemeClr val="lt1"/>
-      </a:fontRef>
-    </dgm:style>
-  </dgm:styleLbl>
-  <dgm:styleLbl name="sibTrans1D1">
-    <dgm:scene3d>
-      <a:camera prst="orthographicFront"/>
-      <a:lightRig rig="threePt" dir="t"/>
-    </dgm:scene3d>
-    <dgm:sp3d/>
-    <dgm:txPr/>
-    <dgm:style>
-      <a:lnRef idx="1">
-        <a:scrgbClr r="0" g="0" b="0"/>
-      </a:lnRef>
-      <a:fillRef idx="0">
-        <a:scrgbClr r="0" g="0" b="0"/>
-      </a:fillRef>
-      <a:effectRef idx="0">
-        <a:scrgbClr r="0" g="0" b="0"/>
-      </a:effectRef>
-      <a:fontRef idx="minor"/>
-    </dgm:style>
-  </dgm:styleLbl>
-  <dgm:styleLbl name="callout">
-    <dgm:scene3d>
-      <a:camera prst="orthographicFront"/>
-      <a:lightRig rig="threePt" dir="t"/>
-    </dgm:scene3d>
-    <dgm:sp3d/>
-    <dgm:txPr/>
-    <dgm:style>
-      <a:lnRef idx="2">
-        <a:scrgbClr r="0" g="0" b="0"/>
-      </a:lnRef>
-      <a:fillRef idx="1">
-        <a:scrgbClr r="0" g="0" b="0"/>
-      </a:fillRef>
-      <a:effectRef idx="0">
-        <a:scrgbClr r="0" g="0" b="0"/>
-      </a:effectRef>
-      <a:fontRef idx="minor"/>
-    </dgm:style>
-  </dgm:styleLbl>
-  <dgm:styleLbl name="asst0">
-    <dgm:scene3d>
-      <a:camera prst="orthographicFront"/>
-      <a:lightRig rig="threePt" dir="t"/>
-    </dgm:scene3d>
-    <dgm:sp3d/>
-    <dgm:txPr/>
-    <dgm:style>
-      <a:lnRef idx="2">
-        <a:scrgbClr r="0" g="0" b="0"/>
-      </a:lnRef>
-      <a:fillRef idx="1">
-        <a:scrgbClr r="0" g="0" b="0"/>
-      </a:fillRef>
-      <a:effectRef idx="0">
-        <a:scrgbClr r="0" g="0" b="0"/>
-      </a:effectRef>
-      <a:fontRef idx="minor">
-        <a:schemeClr val="lt1"/>
-      </a:fontRef>
-    </dgm:style>
-  </dgm:styleLbl>
-  <dgm:styleLbl name="asst1">
-    <dgm:scene3d>
-      <a:camera prst="orthographicFront"/>
-      <a:lightRig rig="threePt" dir="t"/>
-    </dgm:scene3d>
-    <dgm:sp3d/>
-    <dgm:txPr/>
-    <dgm:style>
-      <a:lnRef idx="2">
-        <a:scrgbClr r="0" g="0" b="0"/>
-      </a:lnRef>
-      <a:fillRef idx="1">
-        <a:scrgbClr r="0" g="0" b="0"/>
-      </a:fillRef>
-      <a:effectRef idx="0">
-        <a:scrgbClr r="0" g="0" b="0"/>
-      </a:effectRef>
-      <a:fontRef idx="minor">
-        <a:schemeClr val="lt1"/>
-      </a:fontRef>
-    </dgm:style>
-  </dgm:styleLbl>
-  <dgm:styleLbl name="asst2">
-    <dgm:scene3d>
-      <a:camera prst="orthographicFront"/>
-      <a:lightRig rig="threePt" dir="t"/>
-    </dgm:scene3d>
-    <dgm:sp3d/>
-    <dgm:txPr/>
-    <dgm:style>
-      <a:lnRef idx="2">
-        <a:scrgbClr r="0" g="0" b="0"/>
-      </a:lnRef>
-      <a:fillRef idx="1">
-        <a:scrgbClr r="0" g="0" b="0"/>
-      </a:fillRef>
-      <a:effectRef idx="0">
-        <a:scrgbClr r="0" g="0" b="0"/>
-      </a:effectRef>
-      <a:fontRef idx="minor">
-        <a:schemeClr val="lt1"/>
-      </a:fontRef>
-    </dgm:style>
-  </dgm:styleLbl>
-  <dgm:styleLbl name="asst3">
-    <dgm:scene3d>
-      <a:camera prst="orthographicFront"/>
-      <a:lightRig rig="threePt" dir="t"/>
-    </dgm:scene3d>
-    <dgm:sp3d/>
-    <dgm:txPr/>
-    <dgm:style>
-      <a:lnRef idx="2">
-        <a:scrgbClr r="0" g="0" b="0"/>
-      </a:lnRef>
-      <a:fillRef idx="1">
-        <a:scrgbClr r="0" g="0" b="0"/>
-      </a:fillRef>
-      <a:effectRef idx="0">
-        <a:scrgbClr r="0" g="0" b="0"/>
-      </a:effectRef>
-      <a:fontRef idx="minor">
-        <a:schemeClr val="lt1"/>
-      </a:fontRef>
-    </dgm:style>
-  </dgm:styleLbl>
-  <dgm:styleLbl name="asst4">
-    <dgm:scene3d>
-      <a:camera prst="orthographicFront"/>
-      <a:lightRig rig="threePt" dir="t"/>
-    </dgm:scene3d>
-    <dgm:sp3d/>
-    <dgm:txPr/>
-    <dgm:style>
-      <a:lnRef idx="2">
-        <a:scrgbClr r="0" g="0" b="0"/>
-      </a:lnRef>
-      <a:fillRef idx="1">
-        <a:scrgbClr r="0" g="0" b="0"/>
-      </a:fillRef>
-      <a:effectRef idx="0">
-        <a:scrgbClr r="0" g="0" b="0"/>
-      </a:effectRef>
-      <a:fontRef idx="minor">
-        <a:schemeClr val="lt1"/>
-      </a:fontRef>
-    </dgm:style>
-  </dgm:styleLbl>
-  <dgm:styleLbl name="parChTrans2D1">
-    <dgm:scene3d>
-      <a:camera prst="orthographicFront"/>
-      <a:lightRig rig="threePt" dir="t"/>
-    </dgm:scene3d>
-    <dgm:sp3d/>
-    <dgm:txPr/>
-    <dgm:style>
-      <a:lnRef idx="2">
-        <a:scrgbClr r="0" g="0" b="0"/>
-      </a:lnRef>
-      <a:fillRef idx="1">
-        <a:scrgbClr r="0" g="0" b="0"/>
-      </a:fillRef>
-      <a:effectRef idx="0">
-        <a:scrgbClr r="0" g="0" b="0"/>
-      </a:effectRef>
-      <a:fontRef idx="minor">
-        <a:schemeClr val="lt1"/>
-      </a:fontRef>
-    </dgm:style>
-  </dgm:styleLbl>
-  <dgm:styleLbl name="parChTrans2D2">
-    <dgm:scene3d>
-      <a:camera prst="orthographicFront"/>
-      <a:lightRig rig="threePt" dir="t"/>
-    </dgm:scene3d>
-    <dgm:sp3d/>
-    <dgm:txPr/>
-    <dgm:style>
-      <a:lnRef idx="2">
-        <a:scrgbClr r="0" g="0" b="0"/>
-      </a:lnRef>
-      <a:fillRef idx="1">
-        <a:scrgbClr r="0" g="0" b="0"/>
-      </a:fillRef>
-      <a:effectRef idx="0">
-        <a:scrgbClr r="0" g="0" b="0"/>
-      </a:effectRef>
-      <a:fontRef idx="minor">
-        <a:schemeClr val="lt1"/>
-      </a:fontRef>
-    </dgm:style>
-  </dgm:styleLbl>
-  <dgm:styleLbl name="parChTrans2D3">
-    <dgm:scene3d>
-      <a:camera prst="orthographicFront"/>
-      <a:lightRig rig="threePt" dir="t"/>
-    </dgm:scene3d>
-    <dgm:sp3d/>
-    <dgm:txPr/>
-    <dgm:style>
-      <a:lnRef idx="2">
-        <a:scrgbClr r="0" g="0" b="0"/>
-      </a:lnRef>
-      <a:fillRef idx="1">
-        <a:scrgbClr r="0" g="0" b="0"/>
-      </a:fillRef>
-      <a:effectRef idx="0">
-        <a:scrgbClr r="0" g="0" b="0"/>
-      </a:effectRef>
-      <a:fontRef idx="minor">
-        <a:schemeClr val="lt1"/>
-      </a:fontRef>
-    </dgm:style>
-  </dgm:styleLbl>
-  <dgm:styleLbl name="parChTrans2D4">
-    <dgm:scene3d>
-      <a:camera prst="orthographicFront"/>
-      <a:lightRig rig="threePt" dir="t"/>
-    </dgm:scene3d>
-    <dgm:sp3d/>
-    <dgm:txPr/>
-    <dgm:style>
-      <a:lnRef idx="2">
-        <a:scrgbClr r="0" g="0" b="0"/>
-      </a:lnRef>
-      <a:fillRef idx="1">
-        <a:scrgbClr r="0" g="0" b="0"/>
-      </a:fillRef>
-      <a:effectRef idx="0">
-        <a:scrgbClr r="0" g="0" b="0"/>
-      </a:effectRef>
-      <a:fontRef idx="minor">
-        <a:schemeClr val="lt1"/>
-      </a:fontRef>
-    </dgm:style>
-  </dgm:styleLbl>
-  <dgm:styleLbl name="parChTrans1D1">
-    <dgm:scene3d>
-      <a:camera prst="orthographicFront"/>
-      <a:lightRig rig="threePt" dir="t"/>
-    </dgm:scene3d>
-    <dgm:sp3d/>
-    <dgm:txPr/>
-    <dgm:style>
-      <a:lnRef idx="2">
-        <a:scrgbClr r="0" g="0" b="0"/>
-      </a:lnRef>
-      <a:fillRef idx="0">
-        <a:scrgbClr r="0" g="0" b="0"/>
-      </a:fillRef>
-      <a:effectRef idx="0">
-        <a:scrgbClr r="0" g="0" b="0"/>
-      </a:effectRef>
-      <a:fontRef idx="minor"/>
-    </dgm:style>
-  </dgm:styleLbl>
-  <dgm:styleLbl name="parChTrans1D2">
-    <dgm:scene3d>
-      <a:camera prst="orthographicFront"/>
-      <a:lightRig rig="threePt" dir="t"/>
-    </dgm:scene3d>
-    <dgm:sp3d/>
-    <dgm:txPr/>
-    <dgm:style>
-      <a:lnRef idx="2">
-        <a:scrgbClr r="0" g="0" b="0"/>
-      </a:lnRef>
-      <a:fillRef idx="0">
-        <a:scrgbClr r="0" g="0" b="0"/>
-      </a:fillRef>
-      <a:effectRef idx="0">
-        <a:scrgbClr r="0" g="0" b="0"/>
-      </a:effectRef>
-      <a:fontRef idx="minor"/>
-    </dgm:style>
-  </dgm:styleLbl>
-  <dgm:styleLbl name="parChTrans1D3">
-    <dgm:scene3d>
-      <a:camera prst="orthographicFront"/>
-      <a:lightRig rig="threePt" dir="t"/>
-    </dgm:scene3d>
-    <dgm:sp3d/>
-    <dgm:txPr/>
-    <dgm:style>
-      <a:lnRef idx="2">
-        <a:scrgbClr r="0" g="0" b="0"/>
-      </a:lnRef>
-      <a:fillRef idx="0">
-        <a:scrgbClr r="0" g="0" b="0"/>
-      </a:fillRef>
-      <a:effectRef idx="0">
-        <a:scrgbClr r="0" g="0" b="0"/>
-      </a:effectRef>
-      <a:fontRef idx="minor"/>
-    </dgm:style>
-  </dgm:styleLbl>
-  <dgm:styleLbl name="parChTrans1D4">
-    <dgm:scene3d>
-      <a:camera prst="orthographicFront"/>
-      <a:lightRig rig="threePt" dir="t"/>
-    </dgm:scene3d>
-    <dgm:sp3d/>
-    <dgm:txPr/>
-    <dgm:style>
-      <a:lnRef idx="2">
-        <a:scrgbClr r="0" g="0" b="0"/>
-      </a:lnRef>
-      <a:fillRef idx="0">
-        <a:scrgbClr r="0" g="0" b="0"/>
-      </a:fillRef>
-      <a:effectRef idx="0">
-        <a:scrgbClr r="0" g="0" b="0"/>
-      </a:effectRef>
-      <a:fontRef idx="minor"/>
-    </dgm:style>
-  </dgm:styleLbl>
-  <dgm:styleLbl name="fgAcc1">
-    <dgm:scene3d>
-      <a:camera prst="orthographicFront"/>
-      <a:lightRig rig="threePt" dir="t"/>
-    </dgm:scene3d>
-    <dgm:sp3d/>
-    <dgm:txPr/>
-    <dgm:style>
-      <a:lnRef idx="2">
-        <a:scrgbClr r="0" g="0" b="0"/>
-      </a:lnRef>
-      <a:fillRef idx="1">
-        <a:scrgbClr r="0" g="0" b="0"/>
-      </a:fillRef>
-      <a:effectRef idx="0">
-        <a:scrgbClr r="0" g="0" b="0"/>
-      </a:effectRef>
-      <a:fontRef idx="minor"/>
-    </dgm:style>
-  </dgm:styleLbl>
-  <dgm:styleLbl name="conFgAcc1">
-    <dgm:scene3d>
-      <a:camera prst="orthographicFront"/>
-      <a:lightRig rig="threePt" dir="t"/>
-    </dgm:scene3d>
-    <dgm:sp3d/>
-    <dgm:txPr/>
-    <dgm:style>
-      <a:lnRef idx="2">
-        <a:scrgbClr r="0" g="0" b="0"/>
-      </a:lnRef>
-      <a:fillRef idx="1">
-        <a:scrgbClr r="0" g="0" b="0"/>
-      </a:fillRef>
-      <a:effectRef idx="0">
-        <a:scrgbClr r="0" g="0" b="0"/>
-      </a:effectRef>
-      <a:fontRef idx="minor"/>
-    </dgm:style>
-  </dgm:styleLbl>
-  <dgm:styleLbl name="alignAcc1">
-    <dgm:scene3d>
-      <a:camera prst="orthographicFront"/>
-      <a:lightRig rig="threePt" dir="t"/>
-    </dgm:scene3d>
-    <dgm:sp3d/>
-    <dgm:txPr/>
-    <dgm:style>
-      <a:lnRef idx="2">
-        <a:scrgbClr r="0" g="0" b="0"/>
-      </a:lnRef>
-      <a:fillRef idx="1">
-        <a:scrgbClr r="0" g="0" b="0"/>
-      </a:fillRef>
-      <a:effectRef idx="0">
-        <a:scrgbClr r="0" g="0" b="0"/>
-      </a:effectRef>
-      <a:fontRef idx="minor"/>
-    </dgm:style>
-  </dgm:styleLbl>
-  <dgm:styleLbl name="trAlignAcc1">
-    <dgm:scene3d>
-      <a:camera prst="orthographicFront"/>
-      <a:lightRig rig="threePt" dir="t"/>
-    </dgm:scene3d>
-    <dgm:sp3d/>
-    <dgm:txPr/>
-    <dgm:style>
-      <a:lnRef idx="1">
-        <a:scrgbClr r="0" g="0" b="0"/>
-      </a:lnRef>
-      <a:fillRef idx="1">
-        <a:scrgbClr r="0" g="0" b="0"/>
-      </a:fillRef>
-      <a:effectRef idx="0">
-        <a:scrgbClr r="0" g="0" b="0"/>
-      </a:effectRef>
-      <a:fontRef idx="minor"/>
-    </dgm:style>
-  </dgm:styleLbl>
-  <dgm:styleLbl name="bgAcc1">
-    <dgm:scene3d>
-      <a:camera prst="orthographicFront"/>
-      <a:lightRig rig="threePt" dir="t"/>
-    </dgm:scene3d>
-    <dgm:sp3d/>
-    <dgm:txPr/>
-    <dgm:style>
-      <a:lnRef idx="2">
-        <a:scrgbClr r="0" g="0" b="0"/>
-      </a:lnRef>
-      <a:fillRef idx="1">
-        <a:scrgbClr r="0" g="0" b="0"/>
-      </a:fillRef>
-      <a:effectRef idx="0">
-        <a:scrgbClr r="0" g="0" b="0"/>
-      </a:effectRef>
-      <a:fontRef idx="minor"/>
-    </dgm:style>
-  </dgm:styleLbl>
-  <dgm:styleLbl name="solidFgAcc1">
-    <dgm:scene3d>
-      <a:camera prst="orthographicFront"/>
-      <a:lightRig rig="threePt" dir="t"/>
-    </dgm:scene3d>
-    <dgm:sp3d/>
-    <dgm:txPr/>
-    <dgm:style>
-      <a:lnRef idx="2">
-        <a:scrgbClr r="0" g="0" b="0"/>
-      </a:lnRef>
-      <a:fillRef idx="1">
-        <a:scrgbClr r="0" g="0" b="0"/>
-      </a:fillRef>
-      <a:effectRef idx="0">
-        <a:scrgbClr r="0" g="0" b="0"/>
-      </a:effectRef>
-      <a:fontRef idx="minor"/>
-    </dgm:style>
-  </dgm:styleLbl>
-  <dgm:styleLbl name="solidAlignAcc1">
-    <dgm:scene3d>
-      <a:camera prst="orthographicFront"/>
-      <a:lightRig rig="threePt" dir="t"/>
-    </dgm:scene3d>
-    <dgm:sp3d/>
-    <dgm:txPr/>
-    <dgm:style>
-      <a:lnRef idx="2">
-        <a:scrgbClr r="0" g="0" b="0"/>
-      </a:lnRef>
-      <a:fillRef idx="1">
-        <a:scrgbClr r="0" g="0" b="0"/>
-      </a:fillRef>
-      <a:effectRef idx="0">
-        <a:scrgbClr r="0" g="0" b="0"/>
-      </a:effectRef>
-      <a:fontRef idx="minor"/>
-    </dgm:style>
-  </dgm:styleLbl>
-  <dgm:styleLbl name="solidBgAcc1">
-    <dgm:scene3d>
-      <a:camera prst="orthographicFront"/>
-      <a:lightRig rig="threePt" dir="t"/>
-    </dgm:scene3d>
-    <dgm:sp3d/>
-    <dgm:txPr/>
-    <dgm:style>
-      <a:lnRef idx="2">
-        <a:scrgbClr r="0" g="0" b="0"/>
-      </a:lnRef>
-      <a:fillRef idx="1">
-        <a:scrgbClr r="0" g="0" b="0"/>
-      </a:fillRef>
-      <a:effectRef idx="0">
-        <a:scrgbClr r="0" g="0" b="0"/>
-      </a:effectRef>
-      <a:fontRef idx="minor"/>
-    </dgm:style>
-  </dgm:styleLbl>
-  <dgm:styleLbl name="fgAccFollowNode1">
-    <dgm:scene3d>
-      <a:camera prst="orthographicFront"/>
-      <a:lightRig rig="threePt" dir="t"/>
-    </dgm:scene3d>
-    <dgm:sp3d/>
-    <dgm:txPr/>
-    <dgm:style>
-      <a:lnRef idx="2">
-        <a:scrgbClr r="0" g="0" b="0"/>
-      </a:lnRef>
-      <a:fillRef idx="1">
-        <a:scrgbClr r="0" g="0" b="0"/>
-      </a:fillRef>
-      <a:effectRef idx="0">
-        <a:scrgbClr r="0" g="0" b="0"/>
-      </a:effectRef>
-      <a:fontRef idx="minor"/>
-    </dgm:style>
-  </dgm:styleLbl>
-  <dgm:styleLbl name="alignAccFollowNode1">
-    <dgm:scene3d>
-      <a:camera prst="orthographicFront"/>
-      <a:lightRig rig="threePt" dir="t"/>
-    </dgm:scene3d>
-    <dgm:sp3d/>
-    <dgm:txPr/>
-    <dgm:style>
-      <a:lnRef idx="2">
-        <a:scrgbClr r="0" g="0" b="0"/>
-      </a:lnRef>
-      <a:fillRef idx="1">
-        <a:scrgbClr r="0" g="0" b="0"/>
-      </a:fillRef>
-      <a:effectRef idx="0">
-        <a:scrgbClr r="0" g="0" b="0"/>
-      </a:effectRef>
-      <a:fontRef idx="minor"/>
-    </dgm:style>
-  </dgm:styleLbl>
-  <dgm:styleLbl name="bgAccFollowNode1">
-    <dgm:scene3d>
-      <a:camera prst="orthographicFront"/>
-      <a:lightRig rig="threePt" dir="t"/>
-    </dgm:scene3d>
-    <dgm:sp3d/>
-    <dgm:txPr/>
-    <dgm:style>
-      <a:lnRef idx="2">
-        <a:scrgbClr r="0" g="0" b="0"/>
-      </a:lnRef>
-      <a:fillRef idx="1">
-        <a:scrgbClr r="0" g="0" b="0"/>
-      </a:fillRef>
-      <a:effectRef idx="0">
-        <a:scrgbClr r="0" g="0" b="0"/>
-      </a:effectRef>
-      <a:fontRef idx="minor"/>
-    </dgm:style>
-  </dgm:styleLbl>
-  <dgm:styleLbl name="fgAcc0">
-    <dgm:scene3d>
-      <a:camera prst="orthographicFront"/>
-      <a:lightRig rig="threePt" dir="t"/>
-    </dgm:scene3d>
-    <dgm:sp3d/>
-    <dgm:txPr/>
-    <dgm:style>
-      <a:lnRef idx="2">
-        <a:scrgbClr r="0" g="0" b="0"/>
-      </a:lnRef>
-      <a:fillRef idx="1">
-        <a:scrgbClr r="0" g="0" b="0"/>
-      </a:fillRef>
-      <a:effectRef idx="0">
-        <a:scrgbClr r="0" g="0" b="0"/>
-      </a:effectRef>
-      <a:fontRef idx="minor"/>
-    </dgm:style>
-  </dgm:styleLbl>
-  <dgm:styleLbl name="fgAcc2">
-    <dgm:scene3d>
-      <a:camera prst="orthographicFront"/>
-      <a:lightRig rig="threePt" dir="t"/>
-    </dgm:scene3d>
-    <dgm:sp3d/>
-    <dgm:txPr/>
-    <dgm:style>
-      <a:lnRef idx="2">
-        <a:scrgbClr r="0" g="0" b="0"/>
-      </a:lnRef>
-      <a:fillRef idx="1">
-        <a:scrgbClr r="0" g="0" b="0"/>
-      </a:fillRef>
-      <a:effectRef idx="0">
-        <a:scrgbClr r="0" g="0" b="0"/>
-      </a:effectRef>
-      <a:fontRef idx="minor"/>
-    </dgm:style>
-  </dgm:styleLbl>
-  <dgm:styleLbl name="fgAcc3">
-    <dgm:scene3d>
-      <a:camera prst="orthographicFront"/>
-      <a:lightRig rig="threePt" dir="t"/>
-    </dgm:scene3d>
-    <dgm:sp3d/>
-    <dgm:txPr/>
-    <dgm:style>
-      <a:lnRef idx="2">
-        <a:scrgbClr r="0" g="0" b="0"/>
-      </a:lnRef>
-      <a:fillRef idx="1">
-        <a:scrgbClr r="0" g="0" b="0"/>
-      </a:fillRef>
-      <a:effectRef idx="0">
-        <a:scrgbClr r="0" g="0" b="0"/>
-      </a:effectRef>
-      <a:fontRef idx="minor"/>
-    </dgm:style>
-  </dgm:styleLbl>
-  <dgm:styleLbl name="fgAcc4">
-    <dgm:scene3d>
-      <a:camera prst="orthographicFront"/>
-      <a:lightRig rig="threePt" dir="t"/>
-    </dgm:scene3d>
-    <dgm:sp3d/>
-    <dgm:txPr/>
-    <dgm:style>
-      <a:lnRef idx="2">
-        <a:scrgbClr r="0" g="0" b="0"/>
-      </a:lnRef>
-      <a:fillRef idx="1">
-        <a:scrgbClr r="0" g="0" b="0"/>
-      </a:fillRef>
-      <a:effectRef idx="0">
-        <a:scrgbClr r="0" g="0" b="0"/>
-      </a:effectRef>
-      <a:fontRef idx="minor"/>
-    </dgm:style>
-  </dgm:styleLbl>
-  <dgm:styleLbl name="bgShp">
-    <dgm:scene3d>
-      <a:camera prst="orthographicFront"/>
-      <a:lightRig rig="threePt" dir="t"/>
-    </dgm:scene3d>
-    <dgm:sp3d/>
-    <dgm:txPr/>
-    <dgm:style>
-      <a:lnRef idx="0">
-        <a:scrgbClr r="0" g="0" b="0"/>
-      </a:lnRef>
-      <a:fillRef idx="1">
-        <a:scrgbClr r="0" g="0" b="0"/>
-      </a:fillRef>
-      <a:effectRef idx="0">
-        <a:scrgbClr r="0" g="0" b="0"/>
-      </a:effectRef>
-      <a:fontRef idx="minor"/>
-    </dgm:style>
-  </dgm:styleLbl>
-  <dgm:styleLbl name="dkBgShp">
-    <dgm:scene3d>
-      <a:camera prst="orthographicFront"/>
-      <a:lightRig rig="threePt" dir="t"/>
-    </dgm:scene3d>
-    <dgm:sp3d/>
-    <dgm:txPr/>
-    <dgm:style>
-      <a:lnRef idx="0">
-        <a:scrgbClr r="0" g="0" b="0"/>
-      </a:lnRef>
-      <a:fillRef idx="1">
-        <a:scrgbClr r="0" g="0" b="0"/>
-      </a:fillRef>
-      <a:effectRef idx="0">
-        <a:scrgbClr r="0" g="0" b="0"/>
-      </a:effectRef>
-      <a:fontRef idx="minor"/>
-    </dgm:style>
-  </dgm:styleLbl>
-  <dgm:styleLbl name="trBgShp">
-    <dgm:scene3d>
-      <a:camera prst="orthographicFront"/>
-      <a:lightRig rig="threePt" dir="t"/>
-    </dgm:scene3d>
-    <dgm:sp3d/>
-    <dgm:txPr/>
-    <dgm:style>
-      <a:lnRef idx="0">
-        <a:scrgbClr r="0" g="0" b="0"/>
-      </a:lnRef>
-      <a:fillRef idx="1">
-        <a:scrgbClr r="0" g="0" b="0"/>
-      </a:fillRef>
-      <a:effectRef idx="0">
-        <a:scrgbClr r="0" g="0" b="0"/>
-      </a:effectRef>
-      <a:fontRef idx="minor"/>
-    </dgm:style>
-  </dgm:styleLbl>
-  <dgm:styleLbl name="fgShp">
-    <dgm:scene3d>
-      <a:camera prst="orthographicFront"/>
-      <a:lightRig rig="threePt" dir="t"/>
-    </dgm:scene3d>
-    <dgm:sp3d/>
-    <dgm:txPr/>
-    <dgm:style>
-      <a:lnRef idx="2">
-        <a:scrgbClr r="0" g="0" b="0"/>
-      </a:lnRef>
-      <a:fillRef idx="1">
-        <a:scrgbClr r="0" g="0" b="0"/>
-      </a:fillRef>
-      <a:effectRef idx="0">
-        <a:scrgbClr r="0" g="0" b="0"/>
-      </a:effectRef>
-      <a:fontRef idx="minor"/>
-    </dgm:style>
-  </dgm:styleLbl>
-  <dgm:styleLbl name="revTx">
-    <dgm:scene3d>
-      <a:camera prst="orthographicFront"/>
-      <a:lightRig rig="threePt" dir="t"/>
-    </dgm:scene3d>
-    <dgm:sp3d/>
-    <dgm:txPr/>
-    <dgm:style>
-      <a:lnRef idx="0">
-        <a:scrgbClr r="0" g="0" b="0"/>
-      </a:lnRef>
-      <a:fillRef idx="0">
-        <a:scrgbClr r="0" g="0" b="0"/>
-      </a:fillRef>
-      <a:effectRef idx="0">
-        <a:scrgbClr r="0" g="0" b="0"/>
-      </a:effectRef>
-      <a:fontRef idx="minor"/>
-    </dgm:style>
-  </dgm:styleLbl>
-</dgm:styleDef>
 </file>
 
 <file path=ppt/notesMasters/notesMaster1.xml><?xml version="1.0" encoding="utf-8"?>
@@ -9916,37 +5899,143 @@
           </a:p>
         </p:txBody>
       </p:sp>
-      <p:graphicFrame>
-        <p:nvGraphicFramePr>
-          <p:cNvPr id="7" name="Content Placeholder 2">
+      <p:sp>
+        <p:nvSpPr>
+          <p:cNvPr id="3" name="Content Placeholder 2">
             <a:extLst>
               <a:ext uri="{FF2B5EF4-FFF2-40B4-BE49-F238E27FC236}">
-                <a16:creationId xmlns:a16="http://schemas.microsoft.com/office/drawing/2014/main" id="{22D97159-D2D0-A9FE-91A1-DFE17C60C78C}"/>
+                <a16:creationId xmlns:a16="http://schemas.microsoft.com/office/drawing/2014/main" id="{C474A00C-BB7C-BAB0-9BA9-4A707D6513BF}"/>
               </a:ext>
             </a:extLst>
           </p:cNvPr>
-          <p:cNvGraphicFramePr>
-            <a:graphicFrameLocks noGrp="1"/>
-          </p:cNvGraphicFramePr>
+          <p:cNvSpPr>
+            <a:spLocks noGrp="1"/>
+          </p:cNvSpPr>
           <p:nvPr>
             <p:ph idx="1"/>
-            <p:extLst>
-              <p:ext uri="{D42A27DB-BD31-4B8C-83A1-F6EECF244321}">
-                <p14:modId xmlns:p14="http://schemas.microsoft.com/office/powerpoint/2010/main" val="2657159952"/>
-              </p:ext>
-            </p:extLst>
-          </p:nvPr>
-        </p:nvGraphicFramePr>
-        <p:xfrm>
-          <a:off x="3545840" y="762000"/>
-          <a:ext cx="8199120" cy="5293360"/>
-        </p:xfrm>
-        <a:graphic>
-          <a:graphicData uri="http://schemas.openxmlformats.org/drawingml/2006/diagram">
-            <dgm:relIds xmlns:dgm="http://schemas.openxmlformats.org/drawingml/2006/diagram" xmlns:r="http://schemas.openxmlformats.org/officeDocument/2006/relationships" r:dm="rId3" r:lo="rId4" r:qs="rId5" r:cs="rId6"/>
-          </a:graphicData>
-        </a:graphic>
-      </p:graphicFrame>
+          </p:nvPr>
+        </p:nvSpPr>
+        <p:spPr>
+          <a:xfrm>
+            <a:off x="3498574" y="864108"/>
+            <a:ext cx="8269356" cy="5120640"/>
+          </a:xfrm>
+        </p:spPr>
+        <p:txBody>
+          <a:bodyPr/>
+          <a:lstStyle/>
+          <a:p>
+            <a:pPr lvl="0"/>
+            <a:r>
+              <a:rPr lang="en-US" dirty="0">
+                <a:solidFill>
+                  <a:schemeClr val="tx1"/>
+                </a:solidFill>
+              </a:rPr>
+              <a:t>Submission is not losing your voice; it is aligning your heart with the gospel.  </a:t>
+            </a:r>
+          </a:p>
+          <a:p>
+            <a:pPr lvl="0"/>
+            <a:r>
+              <a:rPr lang="en-US" dirty="0">
+                <a:solidFill>
+                  <a:schemeClr val="tx1"/>
+                </a:solidFill>
+              </a:rPr>
+              <a:t>Submission enables men to lead with gentleness, not pride. </a:t>
+            </a:r>
+          </a:p>
+          <a:p>
+            <a:pPr lvl="0"/>
+            <a:r>
+              <a:rPr lang="en-US" dirty="0">
+                <a:solidFill>
+                  <a:schemeClr val="tx1"/>
+                </a:solidFill>
+              </a:rPr>
+              <a:t>Submission enables women to flourish with strength, not fear.</a:t>
+            </a:r>
+          </a:p>
+          <a:p>
+            <a:pPr lvl="0"/>
+            <a:r>
+              <a:rPr lang="en-US" dirty="0">
+                <a:solidFill>
+                  <a:schemeClr val="tx1"/>
+                </a:solidFill>
+              </a:rPr>
+              <a:t>Submission enables children to grow with wisdom, not rebellion. </a:t>
+            </a:r>
+          </a:p>
+          <a:p>
+            <a:pPr lvl="0"/>
+            <a:r>
+              <a:rPr lang="en-US" dirty="0">
+                <a:solidFill>
+                  <a:schemeClr val="tx1"/>
+                </a:solidFill>
+              </a:rPr>
+              <a:t>Submission enables the church to worship with order, not chaos. </a:t>
+            </a:r>
+          </a:p>
+          <a:p>
+            <a:pPr lvl="0"/>
+            <a:r>
+              <a:rPr lang="en-US" dirty="0">
+                <a:solidFill>
+                  <a:schemeClr val="tx1"/>
+                </a:solidFill>
+              </a:rPr>
+              <a:t>Submission enables relationships to thrive with peace, not power struggles.</a:t>
+            </a:r>
+          </a:p>
+          <a:p>
+            <a:pPr lvl="0"/>
+            <a:r>
+              <a:rPr lang="en-US" dirty="0">
+                <a:solidFill>
+                  <a:schemeClr val="tx1"/>
+                </a:solidFill>
+              </a:rPr>
+              <a:t>We are meant to pursue unity, not compete for control. </a:t>
+            </a:r>
+          </a:p>
+          <a:p>
+            <a:pPr lvl="0"/>
+            <a:r>
+              <a:rPr lang="en-US" dirty="0">
+                <a:solidFill>
+                  <a:schemeClr val="tx1"/>
+                </a:solidFill>
+              </a:rPr>
+              <a:t>Submission enables us to adorn the gospel, not obscure it.  </a:t>
+            </a:r>
+          </a:p>
+          <a:p>
+            <a:pPr lvl="0"/>
+            <a:r>
+              <a:rPr lang="en-US" dirty="0">
+                <a:solidFill>
+                  <a:schemeClr val="tx1"/>
+                </a:solidFill>
+              </a:rPr>
+              <a:t>In Titus, submission is not about power; it is about posture.  </a:t>
+            </a:r>
+          </a:p>
+          <a:p>
+            <a:pPr lvl="0"/>
+            <a:r>
+              <a:rPr lang="en-US" dirty="0">
+                <a:solidFill>
+                  <a:schemeClr val="tx1"/>
+                </a:solidFill>
+              </a:rPr>
+              <a:t>It is not about being less; it is about showing Christ more.</a:t>
+            </a:r>
+          </a:p>
+        </p:txBody>
+      </p:sp>
     </p:spTree>
     <p:extLst>
       <p:ext uri="{BB962C8B-B14F-4D97-AF65-F5344CB8AC3E}">

--- a/lessons/gospel-alignment.pptx
+++ b/lessons/gospel-alignment.pptx
@@ -205,7 +205,7 @@
           <a:p>
             <a:fld id="{EF9F416A-214E-404F-AD5A-1BF62BB89116}" type="datetimeFigureOut">
               <a:rPr lang="en-US" smtClean="0"/>
-              <a:t>8/14/2026</a:t>
+              <a:t>8/20/2026</a:t>
             </a:fld>
             <a:endParaRPr lang="en-US"/>
           </a:p>
@@ -1550,7 +1550,7 @@
           <a:p>
             <a:fld id="{3AB151B6-AC67-475C-A2E7-57C5D004DB52}" type="datetimeFigureOut">
               <a:rPr lang="en-US" smtClean="0"/>
-              <a:t>8/14/2026</a:t>
+              <a:t>8/20/2026</a:t>
             </a:fld>
             <a:endParaRPr lang="en-US"/>
           </a:p>
@@ -1720,7 +1720,7 @@
           <a:p>
             <a:fld id="{3AB151B6-AC67-475C-A2E7-57C5D004DB52}" type="datetimeFigureOut">
               <a:rPr lang="en-US" smtClean="0"/>
-              <a:t>8/14/2026</a:t>
+              <a:t>8/20/2026</a:t>
             </a:fld>
             <a:endParaRPr lang="en-US"/>
           </a:p>
@@ -1900,7 +1900,7 @@
           <a:p>
             <a:fld id="{3AB151B6-AC67-475C-A2E7-57C5D004DB52}" type="datetimeFigureOut">
               <a:rPr lang="en-US" smtClean="0"/>
-              <a:t>8/14/2026</a:t>
+              <a:t>8/20/2026</a:t>
             </a:fld>
             <a:endParaRPr lang="en-US"/>
           </a:p>
@@ -2070,7 +2070,7 @@
           <a:p>
             <a:fld id="{3AB151B6-AC67-475C-A2E7-57C5D004DB52}" type="datetimeFigureOut">
               <a:rPr lang="en-US" smtClean="0"/>
-              <a:t>8/14/2026</a:t>
+              <a:t>8/20/2026</a:t>
             </a:fld>
             <a:endParaRPr lang="en-US"/>
           </a:p>
@@ -2328,7 +2328,7 @@
           <a:p>
             <a:fld id="{3AB151B6-AC67-475C-A2E7-57C5D004DB52}" type="datetimeFigureOut">
               <a:rPr lang="en-US" smtClean="0"/>
-              <a:t>8/14/2026</a:t>
+              <a:t>8/20/2026</a:t>
             </a:fld>
             <a:endParaRPr lang="en-US"/>
           </a:p>
@@ -2616,7 +2616,7 @@
           <a:p>
             <a:fld id="{3AB151B6-AC67-475C-A2E7-57C5D004DB52}" type="datetimeFigureOut">
               <a:rPr lang="en-US" smtClean="0"/>
-              <a:t>8/14/2026</a:t>
+              <a:t>8/20/2026</a:t>
             </a:fld>
             <a:endParaRPr lang="en-US"/>
           </a:p>
@@ -3058,7 +3058,7 @@
           <a:p>
             <a:fld id="{3AB151B6-AC67-475C-A2E7-57C5D004DB52}" type="datetimeFigureOut">
               <a:rPr lang="en-US" smtClean="0"/>
-              <a:t>8/14/2026</a:t>
+              <a:t>8/20/2026</a:t>
             </a:fld>
             <a:endParaRPr lang="en-US"/>
           </a:p>
@@ -3176,7 +3176,7 @@
           <a:p>
             <a:fld id="{3AB151B6-AC67-475C-A2E7-57C5D004DB52}" type="datetimeFigureOut">
               <a:rPr lang="en-US" smtClean="0"/>
-              <a:t>8/14/2026</a:t>
+              <a:t>8/20/2026</a:t>
             </a:fld>
             <a:endParaRPr lang="en-US"/>
           </a:p>
@@ -3271,7 +3271,7 @@
           <a:p>
             <a:fld id="{3AB151B6-AC67-475C-A2E7-57C5D004DB52}" type="datetimeFigureOut">
               <a:rPr lang="en-US" smtClean="0"/>
-              <a:t>8/14/2026</a:t>
+              <a:t>8/20/2026</a:t>
             </a:fld>
             <a:endParaRPr lang="en-US"/>
           </a:p>
@@ -3559,7 +3559,7 @@
           <a:p>
             <a:fld id="{3AB151B6-AC67-475C-A2E7-57C5D004DB52}" type="datetimeFigureOut">
               <a:rPr lang="en-US" smtClean="0"/>
-              <a:t>8/14/2026</a:t>
+              <a:t>8/20/2026</a:t>
             </a:fld>
             <a:endParaRPr lang="en-US"/>
           </a:p>
@@ -3832,7 +3832,7 @@
           <a:p>
             <a:fld id="{3AB151B6-AC67-475C-A2E7-57C5D004DB52}" type="datetimeFigureOut">
               <a:rPr lang="en-US" smtClean="0"/>
-              <a:t>8/14/2026</a:t>
+              <a:t>8/20/2026</a:t>
             </a:fld>
             <a:endParaRPr lang="en-US"/>
           </a:p>
@@ -4143,7 +4143,7 @@
           <a:p>
             <a:fld id="{3AB151B6-AC67-475C-A2E7-57C5D004DB52}" type="datetimeFigureOut">
               <a:rPr lang="en-US" smtClean="0"/>
-              <a:t>8/14/2026</a:t>
+              <a:t>8/20/2026</a:t>
             </a:fld>
             <a:endParaRPr lang="en-US"/>
           </a:p>

--- a/lessons/gospel-alignment.pptx
+++ b/lessons/gospel-alignment.pptx
@@ -205,7 +205,7 @@
           <a:p>
             <a:fld id="{EF9F416A-214E-404F-AD5A-1BF62BB89116}" type="datetimeFigureOut">
               <a:rPr lang="en-US" smtClean="0"/>
-              <a:t>8/20/2026</a:t>
+              <a:t>8/23/2026</a:t>
             </a:fld>
             <a:endParaRPr lang="en-US"/>
           </a:p>
@@ -1185,7 +1185,10 @@
           <a:bodyPr/>
           <a:lstStyle/>
           <a:p>
-            <a:endParaRPr lang="en-US" dirty="0"/>
+            <a:r>
+              <a:rPr lang="en-US" dirty="0"/>
+              <a:t>Titus 2:2-8, old men to young men, old women to young women</a:t>
+            </a:r>
           </a:p>
         </p:txBody>
       </p:sp>
@@ -1550,7 +1553,7 @@
           <a:p>
             <a:fld id="{3AB151B6-AC67-475C-A2E7-57C5D004DB52}" type="datetimeFigureOut">
               <a:rPr lang="en-US" smtClean="0"/>
-              <a:t>8/20/2026</a:t>
+              <a:t>8/23/2026</a:t>
             </a:fld>
             <a:endParaRPr lang="en-US"/>
           </a:p>
@@ -1720,7 +1723,7 @@
           <a:p>
             <a:fld id="{3AB151B6-AC67-475C-A2E7-57C5D004DB52}" type="datetimeFigureOut">
               <a:rPr lang="en-US" smtClean="0"/>
-              <a:t>8/20/2026</a:t>
+              <a:t>8/23/2026</a:t>
             </a:fld>
             <a:endParaRPr lang="en-US"/>
           </a:p>
@@ -1900,7 +1903,7 @@
           <a:p>
             <a:fld id="{3AB151B6-AC67-475C-A2E7-57C5D004DB52}" type="datetimeFigureOut">
               <a:rPr lang="en-US" smtClean="0"/>
-              <a:t>8/20/2026</a:t>
+              <a:t>8/23/2026</a:t>
             </a:fld>
             <a:endParaRPr lang="en-US"/>
           </a:p>
@@ -2070,7 +2073,7 @@
           <a:p>
             <a:fld id="{3AB151B6-AC67-475C-A2E7-57C5D004DB52}" type="datetimeFigureOut">
               <a:rPr lang="en-US" smtClean="0"/>
-              <a:t>8/20/2026</a:t>
+              <a:t>8/23/2026</a:t>
             </a:fld>
             <a:endParaRPr lang="en-US"/>
           </a:p>
@@ -2328,7 +2331,7 @@
           <a:p>
             <a:fld id="{3AB151B6-AC67-475C-A2E7-57C5D004DB52}" type="datetimeFigureOut">
               <a:rPr lang="en-US" smtClean="0"/>
-              <a:t>8/20/2026</a:t>
+              <a:t>8/23/2026</a:t>
             </a:fld>
             <a:endParaRPr lang="en-US"/>
           </a:p>
@@ -2616,7 +2619,7 @@
           <a:p>
             <a:fld id="{3AB151B6-AC67-475C-A2E7-57C5D004DB52}" type="datetimeFigureOut">
               <a:rPr lang="en-US" smtClean="0"/>
-              <a:t>8/20/2026</a:t>
+              <a:t>8/23/2026</a:t>
             </a:fld>
             <a:endParaRPr lang="en-US"/>
           </a:p>
@@ -3058,7 +3061,7 @@
           <a:p>
             <a:fld id="{3AB151B6-AC67-475C-A2E7-57C5D004DB52}" type="datetimeFigureOut">
               <a:rPr lang="en-US" smtClean="0"/>
-              <a:t>8/20/2026</a:t>
+              <a:t>8/23/2026</a:t>
             </a:fld>
             <a:endParaRPr lang="en-US"/>
           </a:p>
@@ -3176,7 +3179,7 @@
           <a:p>
             <a:fld id="{3AB151B6-AC67-475C-A2E7-57C5D004DB52}" type="datetimeFigureOut">
               <a:rPr lang="en-US" smtClean="0"/>
-              <a:t>8/20/2026</a:t>
+              <a:t>8/23/2026</a:t>
             </a:fld>
             <a:endParaRPr lang="en-US"/>
           </a:p>
@@ -3271,7 +3274,7 @@
           <a:p>
             <a:fld id="{3AB151B6-AC67-475C-A2E7-57C5D004DB52}" type="datetimeFigureOut">
               <a:rPr lang="en-US" smtClean="0"/>
-              <a:t>8/20/2026</a:t>
+              <a:t>8/23/2026</a:t>
             </a:fld>
             <a:endParaRPr lang="en-US"/>
           </a:p>
@@ -3559,7 +3562,7 @@
           <a:p>
             <a:fld id="{3AB151B6-AC67-475C-A2E7-57C5D004DB52}" type="datetimeFigureOut">
               <a:rPr lang="en-US" smtClean="0"/>
-              <a:t>8/20/2026</a:t>
+              <a:t>8/23/2026</a:t>
             </a:fld>
             <a:endParaRPr lang="en-US"/>
           </a:p>
@@ -3832,7 +3835,7 @@
           <a:p>
             <a:fld id="{3AB151B6-AC67-475C-A2E7-57C5D004DB52}" type="datetimeFigureOut">
               <a:rPr lang="en-US" smtClean="0"/>
-              <a:t>8/20/2026</a:t>
+              <a:t>8/23/2026</a:t>
             </a:fld>
             <a:endParaRPr lang="en-US"/>
           </a:p>
@@ -4143,7 +4146,7 @@
           <a:p>
             <a:fld id="{3AB151B6-AC67-475C-A2E7-57C5D004DB52}" type="datetimeFigureOut">
               <a:rPr lang="en-US" smtClean="0"/>
-              <a:t>8/20/2026</a:t>
+              <a:t>8/23/2026</a:t>
             </a:fld>
             <a:endParaRPr lang="en-US"/>
           </a:p>
@@ -4662,7 +4665,7 @@
           <a:lstStyle/>
           <a:p>
             <a:r>
-              <a:rPr lang="en-US" dirty="0"/>
+              <a:rPr lang="en-US" sz="7200" dirty="0"/>
               <a:t>Gospel Alignment</a:t>
             </a:r>
           </a:p>
@@ -4687,12 +4690,12 @@
         <p:spPr/>
         <p:txBody>
           <a:bodyPr>
-            <a:normAutofit/>
+            <a:normAutofit fontScale="92500" lnSpcReduction="10000"/>
           </a:bodyPr>
           <a:lstStyle/>
           <a:p>
             <a:r>
-              <a:rPr lang="en-US" dirty="0">
+              <a:rPr lang="en-US" sz="2800" dirty="0">
                 <a:solidFill>
                   <a:schemeClr val="tx1"/>
                 </a:solidFill>
@@ -4702,7 +4705,7 @@
           </a:p>
           <a:p>
             <a:r>
-              <a:rPr lang="en-US" dirty="0">
+              <a:rPr lang="en-US" sz="2800" dirty="0">
                 <a:solidFill>
                   <a:schemeClr val="tx1"/>
                 </a:solidFill>
@@ -4760,11 +4763,13 @@
         </p:nvSpPr>
         <p:spPr/>
         <p:txBody>
-          <a:bodyPr/>
-          <a:lstStyle/>
-          <a:p>
-            <a:r>
-              <a:rPr lang="en-US" dirty="0"/>
+          <a:bodyPr>
+            <a:normAutofit/>
+          </a:bodyPr>
+          <a:lstStyle/>
+          <a:p>
+            <a:r>
+              <a:rPr lang="en-US" sz="5400" dirty="0"/>
               <a:t>Context</a:t>
             </a:r>
           </a:p>
@@ -4788,13 +4793,13 @@
         </p:nvSpPr>
         <p:spPr>
           <a:xfrm>
-            <a:off x="3657600" y="868680"/>
-            <a:ext cx="3780148" cy="5120640"/>
+            <a:off x="3478491" y="868680"/>
+            <a:ext cx="3959257" cy="5120640"/>
           </a:xfrm>
         </p:spPr>
         <p:txBody>
           <a:bodyPr anchor="t">
-            <a:normAutofit/>
+            <a:normAutofit fontScale="92500" lnSpcReduction="20000"/>
           </a:bodyPr>
           <a:lstStyle/>
           <a:p>
@@ -4802,7 +4807,7 @@
               <a:buNone/>
             </a:pPr>
             <a:r>
-              <a:rPr lang="en-US" sz="2400" dirty="0">
+              <a:rPr lang="en-US" sz="3200" dirty="0">
                 <a:solidFill>
                   <a:schemeClr val="tx1"/>
                 </a:solidFill>
@@ -4812,7 +4817,7 @@
           </a:p>
           <a:p>
             <a:r>
-              <a:rPr lang="en-US" sz="2400" dirty="0">
+              <a:rPr lang="en-US" sz="3200" dirty="0">
                 <a:solidFill>
                   <a:schemeClr val="tx1"/>
                 </a:solidFill>
@@ -4822,7 +4827,7 @@
           </a:p>
           <a:p>
             <a:r>
-              <a:rPr lang="en-US" sz="2400" dirty="0">
+              <a:rPr lang="en-US" sz="3200" dirty="0">
                 <a:solidFill>
                   <a:schemeClr val="tx1"/>
                 </a:solidFill>
@@ -4832,7 +4837,7 @@
           </a:p>
           <a:p>
             <a:r>
-              <a:rPr lang="en-US" sz="2400" dirty="0">
+              <a:rPr lang="en-US" sz="3200" dirty="0">
                 <a:solidFill>
                   <a:schemeClr val="tx1"/>
                 </a:solidFill>
@@ -4842,7 +4847,7 @@
           </a:p>
           <a:p>
             <a:r>
-              <a:rPr lang="en-US" sz="2400" dirty="0">
+              <a:rPr lang="en-US" sz="3200" dirty="0">
                 <a:solidFill>
                   <a:schemeClr val="tx1"/>
                 </a:solidFill>
@@ -4868,10 +4873,15 @@
             <p:ph sz="half" idx="2"/>
           </p:nvPr>
         </p:nvSpPr>
-        <p:spPr/>
+        <p:spPr>
+          <a:xfrm>
+            <a:off x="7818119" y="774412"/>
+            <a:ext cx="3959257" cy="5120640"/>
+          </a:xfrm>
+        </p:spPr>
         <p:txBody>
           <a:bodyPr anchor="t">
-            <a:normAutofit/>
+            <a:noAutofit/>
           </a:bodyPr>
           <a:lstStyle/>
           <a:p>
@@ -4879,7 +4889,7 @@
               <a:buNone/>
             </a:pPr>
             <a:r>
-              <a:rPr lang="en-US" sz="2400" dirty="0">
+              <a:rPr lang="en-US" sz="3000" dirty="0">
                 <a:solidFill>
                   <a:schemeClr val="tx1"/>
                 </a:solidFill>
@@ -4889,17 +4899,17 @@
           </a:p>
           <a:p>
             <a:r>
-              <a:rPr lang="en-US" sz="2400" dirty="0">
-                <a:solidFill>
-                  <a:schemeClr val="tx1"/>
-                </a:solidFill>
-              </a:rPr>
-              <a:t>Pual shifts from leaders to everyday believers</a:t>
-            </a:r>
-          </a:p>
-          <a:p>
-            <a:r>
-              <a:rPr lang="en-US" sz="2400" dirty="0">
+              <a:rPr lang="en-US" sz="3000" dirty="0">
+                <a:solidFill>
+                  <a:schemeClr val="tx1"/>
+                </a:solidFill>
+              </a:rPr>
+              <a:t>Paul shifts from leaders to everyday believers</a:t>
+            </a:r>
+          </a:p>
+          <a:p>
+            <a:r>
+              <a:rPr lang="en-US" sz="3000" dirty="0">
                 <a:solidFill>
                   <a:schemeClr val="tx1"/>
                 </a:solidFill>
@@ -4909,7 +4919,7 @@
           </a:p>
           <a:p>
             <a:r>
-              <a:rPr lang="en-US" sz="2400" dirty="0">
+              <a:rPr lang="en-US" sz="3000" dirty="0">
                 <a:solidFill>
                   <a:schemeClr val="tx1"/>
                 </a:solidFill>
@@ -4919,7 +4929,7 @@
           </a:p>
           <a:p>
             <a:r>
-              <a:rPr lang="en-US" sz="2400" dirty="0">
+              <a:rPr lang="en-US" sz="3000" dirty="0">
                 <a:solidFill>
                   <a:schemeClr val="tx1"/>
                 </a:solidFill>
@@ -4975,13 +4985,20 @@
             <p:ph type="title"/>
           </p:nvPr>
         </p:nvSpPr>
-        <p:spPr/>
-        <p:txBody>
-          <a:bodyPr/>
-          <a:lstStyle/>
-          <a:p>
-            <a:r>
-              <a:rPr lang="en-US" dirty="0"/>
+        <p:spPr>
+          <a:xfrm>
+            <a:off x="252918" y="1123837"/>
+            <a:ext cx="3150157" cy="4601183"/>
+          </a:xfrm>
+        </p:spPr>
+        <p:txBody>
+          <a:bodyPr>
+            <a:normAutofit/>
+          </a:bodyPr>
+          <a:lstStyle/>
+          <a:p>
+            <a:r>
+              <a:rPr lang="en-US" sz="5400" dirty="0"/>
               <a:t>Discussion</a:t>
             </a:r>
           </a:p>
@@ -5070,13 +5087,20 @@
             <p:ph type="title"/>
           </p:nvPr>
         </p:nvSpPr>
-        <p:spPr/>
-        <p:txBody>
-          <a:bodyPr/>
-          <a:lstStyle/>
-          <a:p>
-            <a:r>
-              <a:rPr lang="en-US" dirty="0"/>
+        <p:spPr>
+          <a:xfrm>
+            <a:off x="0" y="1123837"/>
+            <a:ext cx="3450210" cy="4601183"/>
+          </a:xfrm>
+        </p:spPr>
+        <p:txBody>
+          <a:bodyPr>
+            <a:normAutofit/>
+          </a:bodyPr>
+          <a:lstStyle/>
+          <a:p>
+            <a:r>
+              <a:rPr lang="en-US" sz="5400" dirty="0"/>
               <a:t>A Word Study: Submission</a:t>
             </a:r>
           </a:p>
@@ -5098,126 +5122,233 @@
             <p:ph idx="1"/>
           </p:nvPr>
         </p:nvSpPr>
-        <p:spPr/>
-        <p:txBody>
-          <a:bodyPr/>
-          <a:lstStyle/>
-          <a:p>
-            <a:r>
-              <a:rPr lang="en-US" b="1" dirty="0"/>
+        <p:spPr>
+          <a:xfrm>
+            <a:off x="3450209" y="744717"/>
+            <a:ext cx="8352149" cy="5410985"/>
+          </a:xfrm>
+        </p:spPr>
+        <p:txBody>
+          <a:bodyPr>
+            <a:normAutofit fontScale="92500" lnSpcReduction="10000"/>
+          </a:bodyPr>
+          <a:lstStyle/>
+          <a:p>
+            <a:r>
+              <a:rPr lang="en-US" sz="2800" b="1" dirty="0">
+                <a:solidFill>
+                  <a:schemeClr val="tx1"/>
+                </a:solidFill>
+              </a:rPr>
               <a:t>ὑπ</a:t>
             </a:r>
             <a:r>
-              <a:rPr lang="en-US" b="1" dirty="0" err="1"/>
+              <a:rPr lang="en-US" sz="2800" b="1" dirty="0" err="1">
+                <a:solidFill>
+                  <a:schemeClr val="tx1"/>
+                </a:solidFill>
+              </a:rPr>
               <a:t>οτάσσω</a:t>
             </a:r>
             <a:r>
-              <a:rPr lang="en-US" b="1" dirty="0"/>
+              <a:rPr lang="en-US" sz="2800" b="1" dirty="0">
+                <a:solidFill>
+                  <a:schemeClr val="tx1"/>
+                </a:solidFill>
+              </a:rPr>
               <a:t> — </a:t>
             </a:r>
             <a:r>
-              <a:rPr lang="en-US" b="1" i="1" dirty="0" err="1"/>
+              <a:rPr lang="en-US" sz="2800" b="1" i="1" dirty="0" err="1">
+                <a:solidFill>
+                  <a:schemeClr val="tx1"/>
+                </a:solidFill>
+              </a:rPr>
               <a:t>hypotássō</a:t>
             </a:r>
             <a:r>
-              <a:rPr lang="en-US" b="1" dirty="0"/>
+              <a:rPr lang="en-US" sz="2800" b="1" dirty="0">
+                <a:solidFill>
+                  <a:schemeClr val="tx1"/>
+                </a:solidFill>
+              </a:rPr>
               <a:t> (hoop-pa-TASS-oh)</a:t>
             </a:r>
           </a:p>
           <a:p>
             <a:r>
-              <a:rPr lang="en-US" b="1" dirty="0"/>
+              <a:rPr lang="en-US" sz="2800" b="1" dirty="0">
+                <a:solidFill>
+                  <a:schemeClr val="tx1"/>
+                </a:solidFill>
+              </a:rPr>
               <a:t>Meaning:</a:t>
             </a:r>
             <a:r>
-              <a:rPr lang="en-US" dirty="0"/>
+              <a:rPr lang="en-US" sz="2800" dirty="0">
+                <a:solidFill>
+                  <a:schemeClr val="tx1"/>
+                </a:solidFill>
+              </a:rPr>
               <a:t> “to arrange under; to submit”</a:t>
             </a:r>
           </a:p>
           <a:p>
             <a:pPr lvl="0"/>
             <a:r>
-              <a:rPr lang="en-US" b="1" dirty="0"/>
+              <a:rPr lang="en-US" sz="2800" b="1" dirty="0">
+                <a:solidFill>
+                  <a:schemeClr val="tx1"/>
+                </a:solidFill>
+              </a:rPr>
               <a:t>Core Idea:</a:t>
             </a:r>
             <a:r>
-              <a:rPr lang="en-US" dirty="0"/>
+              <a:rPr lang="en-US" sz="2800" dirty="0">
+                <a:solidFill>
+                  <a:schemeClr val="tx1"/>
+                </a:solidFill>
+              </a:rPr>
               <a:t> voluntary, relational alignment under rightful order</a:t>
             </a:r>
           </a:p>
           <a:p>
             <a:pPr lvl="0"/>
             <a:r>
-              <a:rPr lang="en-US" b="1" dirty="0"/>
+              <a:rPr lang="en-US" sz="2800" b="1" dirty="0">
+                <a:solidFill>
+                  <a:schemeClr val="tx1"/>
+                </a:solidFill>
+              </a:rPr>
               <a:t>Middle Voice Nuance:</a:t>
             </a:r>
             <a:r>
-              <a:rPr lang="en-US" dirty="0"/>
+              <a:rPr lang="en-US" sz="2800" dirty="0">
+                <a:solidFill>
+                  <a:schemeClr val="tx1"/>
+                </a:solidFill>
+              </a:rPr>
               <a:t> subject </a:t>
             </a:r>
             <a:r>
-              <a:rPr lang="en-US" i="1" dirty="0"/>
+              <a:rPr lang="en-US" sz="2800" i="1" dirty="0">
+                <a:solidFill>
+                  <a:schemeClr val="tx1"/>
+                </a:solidFill>
+              </a:rPr>
               <a:t>acts on self</a:t>
             </a:r>
             <a:r>
-              <a:rPr lang="en-US" dirty="0"/>
+              <a:rPr lang="en-US" sz="2800" dirty="0">
+                <a:solidFill>
+                  <a:schemeClr val="tx1"/>
+                </a:solidFill>
+              </a:rPr>
               <a:t> — “to place oneself under,” not “to be forced under” (</a:t>
             </a:r>
             <a:r>
-              <a:rPr lang="en-US" i="1" dirty="0"/>
+              <a:rPr lang="en-US" sz="2800" i="1" dirty="0">
+                <a:solidFill>
+                  <a:schemeClr val="tx1"/>
+                </a:solidFill>
+              </a:rPr>
               <a:t>looking at surrounding text</a:t>
             </a:r>
             <a:r>
-              <a:rPr lang="en-US" dirty="0"/>
+              <a:rPr lang="en-US" sz="2800" dirty="0">
+                <a:solidFill>
+                  <a:schemeClr val="tx1"/>
+                </a:solidFill>
+              </a:rPr>
               <a:t>)</a:t>
             </a:r>
           </a:p>
           <a:p>
             <a:pPr lvl="0"/>
             <a:r>
-              <a:rPr lang="en-US" b="1" dirty="0"/>
+              <a:rPr lang="en-US" sz="2800" b="1" dirty="0">
+                <a:solidFill>
+                  <a:schemeClr val="tx1"/>
+                </a:solidFill>
+              </a:rPr>
               <a:t>Titus 2:5:</a:t>
             </a:r>
             <a:r>
-              <a:rPr lang="en-US" dirty="0"/>
+              <a:rPr lang="en-US" sz="2800" dirty="0">
+                <a:solidFill>
+                  <a:schemeClr val="tx1"/>
+                </a:solidFill>
+              </a:rPr>
               <a:t> ὑπ</a:t>
             </a:r>
             <a:r>
-              <a:rPr lang="en-US" dirty="0" err="1"/>
+              <a:rPr lang="en-US" sz="2800" dirty="0" err="1">
+                <a:solidFill>
+                  <a:schemeClr val="tx1"/>
+                </a:solidFill>
+              </a:rPr>
               <a:t>οτ</a:t>
             </a:r>
             <a:r>
-              <a:rPr lang="en-US" dirty="0"/>
+              <a:rPr lang="en-US" sz="2800" dirty="0">
+                <a:solidFill>
+                  <a:schemeClr val="tx1"/>
+                </a:solidFill>
+              </a:rPr>
               <a:t>ασσομένας = younger women </a:t>
             </a:r>
             <a:r>
-              <a:rPr lang="en-US" i="1" dirty="0"/>
+              <a:rPr lang="en-US" sz="2800" i="1" dirty="0">
+                <a:solidFill>
+                  <a:schemeClr val="tx1"/>
+                </a:solidFill>
+              </a:rPr>
               <a:t>choosing</a:t>
             </a:r>
             <a:r>
-              <a:rPr lang="en-US" dirty="0"/>
+              <a:rPr lang="en-US" sz="2800" dirty="0">
+                <a:solidFill>
+                  <a:schemeClr val="tx1"/>
+                </a:solidFill>
+              </a:rPr>
               <a:t> alignment for the sake of the gospel’s credibility</a:t>
             </a:r>
           </a:p>
           <a:p>
             <a:pPr lvl="0"/>
             <a:r>
-              <a:rPr lang="en-US" b="1" dirty="0"/>
+              <a:rPr lang="en-US" sz="2800" b="1" dirty="0">
+                <a:solidFill>
+                  <a:schemeClr val="tx1"/>
+                </a:solidFill>
+              </a:rPr>
               <a:t>Ephesians 5:</a:t>
             </a:r>
             <a:r>
-              <a:rPr lang="en-US" dirty="0"/>
+              <a:rPr lang="en-US" sz="2800" dirty="0">
+                <a:solidFill>
+                  <a:schemeClr val="tx1"/>
+                </a:solidFill>
+              </a:rPr>
               <a:t> same middle‑sense; wives’ submission flows from the mutual, Spirit‑led self‑submission of 5:21</a:t>
             </a:r>
           </a:p>
           <a:p>
             <a:pPr lvl="0"/>
             <a:r>
-              <a:rPr lang="en-US" b="1" dirty="0"/>
+              <a:rPr lang="en-US" sz="2800" b="1" dirty="0">
+                <a:solidFill>
+                  <a:schemeClr val="tx1"/>
+                </a:solidFill>
+              </a:rPr>
               <a:t>Theological Weight:</a:t>
             </a:r>
             <a:r>
-              <a:rPr lang="en-US" dirty="0"/>
+              <a:rPr lang="en-US" sz="2800" dirty="0">
+                <a:solidFill>
+                  <a:schemeClr val="tx1"/>
+                </a:solidFill>
+              </a:rPr>
               <a:t> not inferiority, but willing participation in God’s ordered design</a:t>
             </a:r>
           </a:p>
@@ -5271,12 +5402,14 @@
         </p:nvSpPr>
         <p:spPr/>
         <p:txBody>
-          <a:bodyPr/>
+          <a:bodyPr>
+            <a:normAutofit/>
+          </a:bodyPr>
           <a:lstStyle/>
           <a:p>
             <a:pPr algn="ctr"/>
             <a:r>
-              <a:rPr lang="en-US" dirty="0"/>
+              <a:rPr lang="en-US" sz="5400" dirty="0"/>
               <a:t>Have we been taught correctly?</a:t>
             </a:r>
           </a:p>
@@ -5298,14 +5431,21 @@
             <p:ph type="body" idx="1"/>
           </p:nvPr>
         </p:nvSpPr>
-        <p:spPr/>
-        <p:txBody>
-          <a:bodyPr/>
+        <p:spPr>
+          <a:xfrm>
+            <a:off x="3660522" y="215866"/>
+            <a:ext cx="3474720" cy="807720"/>
+          </a:xfrm>
+        </p:spPr>
+        <p:txBody>
+          <a:bodyPr>
+            <a:normAutofit/>
+          </a:bodyPr>
           <a:lstStyle/>
           <a:p>
             <a:pPr algn="ctr"/>
             <a:r>
-              <a:rPr lang="en-US" dirty="0">
+              <a:rPr lang="en-US" sz="2800" dirty="0">
                 <a:solidFill>
                   <a:schemeClr val="tx1"/>
                 </a:solidFill>
@@ -5331,15 +5471,20 @@
             <p:ph sz="half" idx="2"/>
           </p:nvPr>
         </p:nvSpPr>
-        <p:spPr/>
+        <p:spPr>
+          <a:xfrm>
+            <a:off x="3443926" y="1230975"/>
+            <a:ext cx="3544478" cy="5150971"/>
+          </a:xfrm>
+        </p:spPr>
         <p:txBody>
           <a:bodyPr anchor="t">
-            <a:normAutofit fontScale="92500" lnSpcReduction="10000"/>
+            <a:normAutofit fontScale="92500" lnSpcReduction="20000"/>
           </a:bodyPr>
           <a:lstStyle/>
           <a:p>
             <a:r>
-              <a:rPr lang="en-US" dirty="0">
+              <a:rPr lang="en-US" sz="2800" dirty="0">
                 <a:solidFill>
                   <a:schemeClr val="tx1"/>
                 </a:solidFill>
@@ -5349,7 +5494,7 @@
           </a:p>
           <a:p>
             <a:r>
-              <a:rPr lang="en-US" dirty="0">
+              <a:rPr lang="en-US" sz="2800" dirty="0">
                 <a:solidFill>
                   <a:schemeClr val="tx1"/>
                 </a:solidFill>
@@ -5359,7 +5504,7 @@
           </a:p>
           <a:p>
             <a:r>
-              <a:rPr lang="en-US" dirty="0">
+              <a:rPr lang="en-US" sz="2800" dirty="0">
                 <a:solidFill>
                   <a:schemeClr val="tx1"/>
                 </a:solidFill>
@@ -5367,7 +5512,7 @@
               <a:t>Submission means </a:t>
             </a:r>
             <a:r>
-              <a:rPr lang="en-US" b="1" i="1" u="sng" dirty="0">
+              <a:rPr lang="en-US" sz="2800" b="1" i="1" u="sng" dirty="0">
                 <a:solidFill>
                   <a:schemeClr val="tx1"/>
                 </a:solidFill>
@@ -5377,7 +5522,7 @@
           </a:p>
           <a:p>
             <a:r>
-              <a:rPr lang="en-US" dirty="0">
+              <a:rPr lang="en-US" sz="2800" dirty="0">
                 <a:solidFill>
                   <a:schemeClr val="tx1"/>
                 </a:solidFill>
@@ -5387,7 +5532,7 @@
           </a:p>
           <a:p>
             <a:r>
-              <a:rPr lang="en-US" dirty="0">
+              <a:rPr lang="en-US" sz="2800" dirty="0">
                 <a:solidFill>
                   <a:schemeClr val="tx1"/>
                 </a:solidFill>
@@ -5397,7 +5542,7 @@
           </a:p>
           <a:p>
             <a:r>
-              <a:rPr lang="en-US" dirty="0">
+              <a:rPr lang="en-US" sz="2800" dirty="0">
                 <a:solidFill>
                   <a:schemeClr val="tx1"/>
                 </a:solidFill>
@@ -5407,7 +5552,7 @@
           </a:p>
           <a:p>
             <a:r>
-              <a:rPr lang="en-US" dirty="0">
+              <a:rPr lang="en-US" sz="2800" dirty="0">
                 <a:solidFill>
                   <a:schemeClr val="tx1"/>
                 </a:solidFill>
@@ -5417,7 +5562,7 @@
           </a:p>
           <a:p>
             <a:r>
-              <a:rPr lang="en-US" dirty="0">
+              <a:rPr lang="en-US" sz="2800" dirty="0">
                 <a:solidFill>
                   <a:schemeClr val="tx1"/>
                 </a:solidFill>
@@ -5443,14 +5588,21 @@
             <p:ph type="body" sz="quarter" idx="3"/>
           </p:nvPr>
         </p:nvSpPr>
-        <p:spPr/>
-        <p:txBody>
-          <a:bodyPr/>
+        <p:spPr>
+          <a:xfrm>
+            <a:off x="7835135" y="210415"/>
+            <a:ext cx="3474720" cy="813171"/>
+          </a:xfrm>
+        </p:spPr>
+        <p:txBody>
+          <a:bodyPr>
+            <a:normAutofit/>
+          </a:bodyPr>
           <a:lstStyle/>
           <a:p>
             <a:pPr algn="ctr"/>
             <a:r>
-              <a:rPr lang="en-US" dirty="0">
+              <a:rPr lang="en-US" sz="2800" dirty="0">
                 <a:solidFill>
                   <a:schemeClr val="tx1"/>
                 </a:solidFill>
@@ -5478,18 +5630,18 @@
         </p:nvSpPr>
         <p:spPr>
           <a:xfrm>
-            <a:off x="7342632" y="1930936"/>
-            <a:ext cx="4459727" cy="4023360"/>
+            <a:off x="6975836" y="1123837"/>
+            <a:ext cx="4817096" cy="4965878"/>
           </a:xfrm>
         </p:spPr>
         <p:txBody>
           <a:bodyPr anchor="t">
-            <a:normAutofit fontScale="92500" lnSpcReduction="10000"/>
+            <a:noAutofit/>
           </a:bodyPr>
           <a:lstStyle/>
           <a:p>
             <a:r>
-              <a:rPr lang="en-US" dirty="0">
+              <a:rPr lang="en-US" sz="2400" dirty="0">
                 <a:solidFill>
                   <a:schemeClr val="tx1"/>
                 </a:solidFill>
@@ -5499,7 +5651,7 @@
           </a:p>
           <a:p>
             <a:r>
-              <a:rPr lang="en-US" dirty="0">
+              <a:rPr lang="en-US" sz="2400" dirty="0">
                 <a:solidFill>
                   <a:schemeClr val="tx1"/>
                 </a:solidFill>
@@ -5509,7 +5661,7 @@
           </a:p>
           <a:p>
             <a:r>
-              <a:rPr lang="en-US" dirty="0">
+              <a:rPr lang="en-US" sz="2400" dirty="0">
                 <a:solidFill>
                   <a:schemeClr val="tx1"/>
                 </a:solidFill>
@@ -5519,7 +5671,7 @@
           </a:p>
           <a:p>
             <a:r>
-              <a:rPr lang="en-US" dirty="0">
+              <a:rPr lang="en-US" sz="2400" dirty="0">
                 <a:solidFill>
                   <a:schemeClr val="tx1"/>
                 </a:solidFill>
@@ -5529,7 +5681,7 @@
           </a:p>
           <a:p>
             <a:r>
-              <a:rPr lang="en-US" dirty="0">
+              <a:rPr lang="en-US" sz="2400" dirty="0">
                 <a:solidFill>
                   <a:schemeClr val="tx1"/>
                 </a:solidFill>
@@ -5539,7 +5691,7 @@
           </a:p>
           <a:p>
             <a:r>
-              <a:rPr lang="en-US" dirty="0">
+              <a:rPr lang="en-US" sz="2400" dirty="0">
                 <a:solidFill>
                   <a:schemeClr val="tx1"/>
                 </a:solidFill>
@@ -5549,7 +5701,7 @@
           </a:p>
           <a:p>
             <a:r>
-              <a:rPr lang="en-US" dirty="0">
+              <a:rPr lang="en-US" sz="2400" dirty="0">
                 <a:solidFill>
                   <a:schemeClr val="tx1"/>
                 </a:solidFill>
@@ -5559,7 +5711,7 @@
           </a:p>
           <a:p>
             <a:r>
-              <a:rPr lang="en-US" dirty="0">
+              <a:rPr lang="en-US" sz="2400" dirty="0">
                 <a:solidFill>
                   <a:schemeClr val="tx1"/>
                 </a:solidFill>
@@ -5579,6 +5731,302 @@
   <p:clrMapOvr>
     <a:masterClrMapping/>
   </p:clrMapOvr>
+  <p:timing>
+    <p:tnLst>
+      <p:par>
+        <p:cTn id="1" dur="indefinite" restart="never" nodeType="tmRoot">
+          <p:childTnLst>
+            <p:seq concurrent="1" nextAc="seek">
+              <p:cTn id="2" dur="indefinite" nodeType="mainSeq">
+                <p:childTnLst>
+                  <p:par>
+                    <p:cTn id="3" fill="hold">
+                      <p:stCondLst>
+                        <p:cond delay="indefinite"/>
+                      </p:stCondLst>
+                      <p:childTnLst>
+                        <p:par>
+                          <p:cTn id="4" fill="hold">
+                            <p:stCondLst>
+                              <p:cond delay="0"/>
+                            </p:stCondLst>
+                            <p:childTnLst>
+                              <p:par>
+                                <p:cTn id="5" presetID="1" presetClass="entr" presetSubtype="0" fill="hold" nodeType="clickEffect">
+                                  <p:stCondLst>
+                                    <p:cond delay="0"/>
+                                  </p:stCondLst>
+                                  <p:childTnLst>
+                                    <p:set>
+                                      <p:cBhvr>
+                                        <p:cTn id="6" dur="1" fill="hold">
+                                          <p:stCondLst>
+                                            <p:cond delay="0"/>
+                                          </p:stCondLst>
+                                        </p:cTn>
+                                        <p:tgtEl>
+                                          <p:spTgt spid="6">
+                                            <p:txEl>
+                                              <p:pRg st="0" end="0"/>
+                                            </p:txEl>
+                                          </p:spTgt>
+                                        </p:tgtEl>
+                                        <p:attrNameLst>
+                                          <p:attrName>style.visibility</p:attrName>
+                                        </p:attrNameLst>
+                                      </p:cBhvr>
+                                      <p:to>
+                                        <p:strVal val="visible"/>
+                                      </p:to>
+                                    </p:set>
+                                  </p:childTnLst>
+                                </p:cTn>
+                              </p:par>
+                              <p:par>
+                                <p:cTn id="7" presetID="1" presetClass="entr" presetSubtype="0" fill="hold" nodeType="withEffect">
+                                  <p:stCondLst>
+                                    <p:cond delay="0"/>
+                                  </p:stCondLst>
+                                  <p:childTnLst>
+                                    <p:set>
+                                      <p:cBhvr>
+                                        <p:cTn id="8" dur="1" fill="hold">
+                                          <p:stCondLst>
+                                            <p:cond delay="0"/>
+                                          </p:stCondLst>
+                                        </p:cTn>
+                                        <p:tgtEl>
+                                          <p:spTgt spid="6">
+                                            <p:txEl>
+                                              <p:pRg st="1" end="1"/>
+                                            </p:txEl>
+                                          </p:spTgt>
+                                        </p:tgtEl>
+                                        <p:attrNameLst>
+                                          <p:attrName>style.visibility</p:attrName>
+                                        </p:attrNameLst>
+                                      </p:cBhvr>
+                                      <p:to>
+                                        <p:strVal val="visible"/>
+                                      </p:to>
+                                    </p:set>
+                                  </p:childTnLst>
+                                </p:cTn>
+                              </p:par>
+                              <p:par>
+                                <p:cTn id="9" presetID="1" presetClass="entr" presetSubtype="0" fill="hold" nodeType="withEffect">
+                                  <p:stCondLst>
+                                    <p:cond delay="0"/>
+                                  </p:stCondLst>
+                                  <p:childTnLst>
+                                    <p:set>
+                                      <p:cBhvr>
+                                        <p:cTn id="10" dur="1" fill="hold">
+                                          <p:stCondLst>
+                                            <p:cond delay="0"/>
+                                          </p:stCondLst>
+                                        </p:cTn>
+                                        <p:tgtEl>
+                                          <p:spTgt spid="6">
+                                            <p:txEl>
+                                              <p:pRg st="2" end="2"/>
+                                            </p:txEl>
+                                          </p:spTgt>
+                                        </p:tgtEl>
+                                        <p:attrNameLst>
+                                          <p:attrName>style.visibility</p:attrName>
+                                        </p:attrNameLst>
+                                      </p:cBhvr>
+                                      <p:to>
+                                        <p:strVal val="visible"/>
+                                      </p:to>
+                                    </p:set>
+                                  </p:childTnLst>
+                                </p:cTn>
+                              </p:par>
+                              <p:par>
+                                <p:cTn id="11" presetID="1" presetClass="entr" presetSubtype="0" fill="hold" nodeType="withEffect">
+                                  <p:stCondLst>
+                                    <p:cond delay="0"/>
+                                  </p:stCondLst>
+                                  <p:childTnLst>
+                                    <p:set>
+                                      <p:cBhvr>
+                                        <p:cTn id="12" dur="1" fill="hold">
+                                          <p:stCondLst>
+                                            <p:cond delay="0"/>
+                                          </p:stCondLst>
+                                        </p:cTn>
+                                        <p:tgtEl>
+                                          <p:spTgt spid="6">
+                                            <p:txEl>
+                                              <p:pRg st="3" end="3"/>
+                                            </p:txEl>
+                                          </p:spTgt>
+                                        </p:tgtEl>
+                                        <p:attrNameLst>
+                                          <p:attrName>style.visibility</p:attrName>
+                                        </p:attrNameLst>
+                                      </p:cBhvr>
+                                      <p:to>
+                                        <p:strVal val="visible"/>
+                                      </p:to>
+                                    </p:set>
+                                  </p:childTnLst>
+                                </p:cTn>
+                              </p:par>
+                              <p:par>
+                                <p:cTn id="13" presetID="1" presetClass="entr" presetSubtype="0" fill="hold" nodeType="withEffect">
+                                  <p:stCondLst>
+                                    <p:cond delay="0"/>
+                                  </p:stCondLst>
+                                  <p:childTnLst>
+                                    <p:set>
+                                      <p:cBhvr>
+                                        <p:cTn id="14" dur="1" fill="hold">
+                                          <p:stCondLst>
+                                            <p:cond delay="0"/>
+                                          </p:stCondLst>
+                                        </p:cTn>
+                                        <p:tgtEl>
+                                          <p:spTgt spid="6">
+                                            <p:txEl>
+                                              <p:pRg st="4" end="4"/>
+                                            </p:txEl>
+                                          </p:spTgt>
+                                        </p:tgtEl>
+                                        <p:attrNameLst>
+                                          <p:attrName>style.visibility</p:attrName>
+                                        </p:attrNameLst>
+                                      </p:cBhvr>
+                                      <p:to>
+                                        <p:strVal val="visible"/>
+                                      </p:to>
+                                    </p:set>
+                                  </p:childTnLst>
+                                </p:cTn>
+                              </p:par>
+                              <p:par>
+                                <p:cTn id="15" presetID="1" presetClass="entr" presetSubtype="0" fill="hold" nodeType="withEffect">
+                                  <p:stCondLst>
+                                    <p:cond delay="0"/>
+                                  </p:stCondLst>
+                                  <p:childTnLst>
+                                    <p:set>
+                                      <p:cBhvr>
+                                        <p:cTn id="16" dur="1" fill="hold">
+                                          <p:stCondLst>
+                                            <p:cond delay="0"/>
+                                          </p:stCondLst>
+                                        </p:cTn>
+                                        <p:tgtEl>
+                                          <p:spTgt spid="6">
+                                            <p:txEl>
+                                              <p:pRg st="5" end="5"/>
+                                            </p:txEl>
+                                          </p:spTgt>
+                                        </p:tgtEl>
+                                        <p:attrNameLst>
+                                          <p:attrName>style.visibility</p:attrName>
+                                        </p:attrNameLst>
+                                      </p:cBhvr>
+                                      <p:to>
+                                        <p:strVal val="visible"/>
+                                      </p:to>
+                                    </p:set>
+                                  </p:childTnLst>
+                                </p:cTn>
+                              </p:par>
+                              <p:par>
+                                <p:cTn id="17" presetID="1" presetClass="entr" presetSubtype="0" fill="hold" nodeType="withEffect">
+                                  <p:stCondLst>
+                                    <p:cond delay="0"/>
+                                  </p:stCondLst>
+                                  <p:childTnLst>
+                                    <p:set>
+                                      <p:cBhvr>
+                                        <p:cTn id="18" dur="1" fill="hold">
+                                          <p:stCondLst>
+                                            <p:cond delay="0"/>
+                                          </p:stCondLst>
+                                        </p:cTn>
+                                        <p:tgtEl>
+                                          <p:spTgt spid="6">
+                                            <p:txEl>
+                                              <p:pRg st="6" end="6"/>
+                                            </p:txEl>
+                                          </p:spTgt>
+                                        </p:tgtEl>
+                                        <p:attrNameLst>
+                                          <p:attrName>style.visibility</p:attrName>
+                                        </p:attrNameLst>
+                                      </p:cBhvr>
+                                      <p:to>
+                                        <p:strVal val="visible"/>
+                                      </p:to>
+                                    </p:set>
+                                  </p:childTnLst>
+                                </p:cTn>
+                              </p:par>
+                              <p:par>
+                                <p:cTn id="19" presetID="1" presetClass="entr" presetSubtype="0" fill="hold" nodeType="withEffect">
+                                  <p:stCondLst>
+                                    <p:cond delay="0"/>
+                                  </p:stCondLst>
+                                  <p:childTnLst>
+                                    <p:set>
+                                      <p:cBhvr>
+                                        <p:cTn id="20" dur="1" fill="hold">
+                                          <p:stCondLst>
+                                            <p:cond delay="0"/>
+                                          </p:stCondLst>
+                                        </p:cTn>
+                                        <p:tgtEl>
+                                          <p:spTgt spid="6">
+                                            <p:txEl>
+                                              <p:pRg st="7" end="7"/>
+                                            </p:txEl>
+                                          </p:spTgt>
+                                        </p:tgtEl>
+                                        <p:attrNameLst>
+                                          <p:attrName>style.visibility</p:attrName>
+                                        </p:attrNameLst>
+                                      </p:cBhvr>
+                                      <p:to>
+                                        <p:strVal val="visible"/>
+                                      </p:to>
+                                    </p:set>
+                                  </p:childTnLst>
+                                </p:cTn>
+                              </p:par>
+                            </p:childTnLst>
+                          </p:cTn>
+                        </p:par>
+                      </p:childTnLst>
+                    </p:cTn>
+                  </p:par>
+                </p:childTnLst>
+              </p:cTn>
+              <p:prevCondLst>
+                <p:cond evt="onPrev" delay="0">
+                  <p:tgtEl>
+                    <p:sldTgt/>
+                  </p:tgtEl>
+                </p:cond>
+              </p:prevCondLst>
+              <p:nextCondLst>
+                <p:cond evt="onNext" delay="0">
+                  <p:tgtEl>
+                    <p:sldTgt/>
+                  </p:tgtEl>
+                </p:cond>
+              </p:nextCondLst>
+            </p:seq>
+          </p:childTnLst>
+        </p:cTn>
+      </p:par>
+    </p:tnLst>
+  </p:timing>
 </p:sld>
 </file>
 
@@ -5617,11 +6065,13 @@
         </p:nvSpPr>
         <p:spPr/>
         <p:txBody>
-          <a:bodyPr/>
-          <a:lstStyle/>
-          <a:p>
-            <a:r>
-              <a:rPr lang="en-US" dirty="0"/>
+          <a:bodyPr>
+            <a:normAutofit/>
+          </a:bodyPr>
+          <a:lstStyle/>
+          <a:p>
+            <a:r>
+              <a:rPr lang="en-US" sz="5400" dirty="0"/>
               <a:t>What does it mean to be silent?</a:t>
             </a:r>
           </a:p>
@@ -5643,10 +6093,15 @@
             <p:ph sz="half" idx="1"/>
           </p:nvPr>
         </p:nvSpPr>
-        <p:spPr/>
+        <p:spPr>
+          <a:xfrm>
+            <a:off x="3569223" y="604380"/>
+            <a:ext cx="3474720" cy="5120640"/>
+          </a:xfrm>
+        </p:spPr>
         <p:txBody>
           <a:bodyPr anchor="t">
-            <a:normAutofit/>
+            <a:normAutofit fontScale="92500"/>
           </a:bodyPr>
           <a:lstStyle/>
           <a:p>
@@ -5654,7 +6109,7 @@
               <a:buNone/>
             </a:pPr>
             <a:r>
-              <a:rPr lang="en-US" b="1" dirty="0">
+              <a:rPr lang="en-US" sz="2800" b="1" dirty="0">
                 <a:solidFill>
                   <a:schemeClr val="tx1"/>
                 </a:solidFill>
@@ -5664,7 +6119,7 @@
           </a:p>
           <a:p>
             <a:r>
-              <a:rPr lang="en-US" dirty="0">
+              <a:rPr lang="en-US" sz="2800" dirty="0">
                 <a:solidFill>
                   <a:schemeClr val="tx1"/>
                 </a:solidFill>
@@ -5674,7 +6129,7 @@
           </a:p>
           <a:p>
             <a:r>
-              <a:rPr lang="en-US" dirty="0">
+              <a:rPr lang="en-US" sz="2800" dirty="0">
                 <a:solidFill>
                   <a:schemeClr val="tx1"/>
                 </a:solidFill>
@@ -5684,7 +6139,7 @@
           </a:p>
           <a:p>
             <a:r>
-              <a:rPr lang="en-US" dirty="0">
+              <a:rPr lang="en-US" sz="2800" dirty="0">
                 <a:solidFill>
                   <a:schemeClr val="tx1"/>
                 </a:solidFill>
@@ -5694,7 +6149,7 @@
           </a:p>
           <a:p>
             <a:r>
-              <a:rPr lang="en-US" dirty="0">
+              <a:rPr lang="en-US" sz="2800" dirty="0">
                 <a:solidFill>
                   <a:schemeClr val="tx1"/>
                 </a:solidFill>
@@ -5704,7 +6159,7 @@
           </a:p>
           <a:p>
             <a:r>
-              <a:rPr lang="en-US" dirty="0">
+              <a:rPr lang="en-US" sz="2800" dirty="0">
                 <a:solidFill>
                   <a:schemeClr val="tx1"/>
                 </a:solidFill>
@@ -5714,7 +6169,7 @@
           </a:p>
           <a:p>
             <a:r>
-              <a:rPr lang="en-US" dirty="0">
+              <a:rPr lang="en-US" sz="2800" dirty="0">
                 <a:solidFill>
                   <a:schemeClr val="tx1"/>
                 </a:solidFill>
@@ -5724,7 +6179,7 @@
           </a:p>
           <a:p>
             <a:r>
-              <a:rPr lang="en-US" dirty="0">
+              <a:rPr lang="en-US" sz="2800" dirty="0">
                 <a:solidFill>
                   <a:schemeClr val="tx1"/>
                 </a:solidFill>
@@ -5750,10 +6205,15 @@
             <p:ph sz="half" idx="2"/>
           </p:nvPr>
         </p:nvSpPr>
-        <p:spPr/>
+        <p:spPr>
+          <a:xfrm>
+            <a:off x="7412766" y="604380"/>
+            <a:ext cx="4333031" cy="5120640"/>
+          </a:xfrm>
+        </p:spPr>
         <p:txBody>
           <a:bodyPr anchor="t">
-            <a:normAutofit/>
+            <a:noAutofit/>
           </a:bodyPr>
           <a:lstStyle/>
           <a:p>
@@ -5761,17 +6221,17 @@
               <a:buNone/>
             </a:pPr>
             <a:r>
-              <a:rPr lang="en-US" b="1" dirty="0">
-                <a:solidFill>
-                  <a:schemeClr val="tx1"/>
-                </a:solidFill>
-              </a:rPr>
-              <a:t>What the Bible says</a:t>
-            </a:r>
-          </a:p>
-          <a:p>
-            <a:r>
-              <a:rPr lang="en-US" dirty="0">
+              <a:rPr lang="en-US" sz="2600" b="1" dirty="0">
+                <a:solidFill>
+                  <a:schemeClr val="tx1"/>
+                </a:solidFill>
+              </a:rPr>
+              <a:t>What the Bible states</a:t>
+            </a:r>
+          </a:p>
+          <a:p>
+            <a:r>
+              <a:rPr lang="en-US" sz="2600" dirty="0">
                 <a:solidFill>
                   <a:schemeClr val="tx1"/>
                 </a:solidFill>
@@ -5781,7 +6241,7 @@
           </a:p>
           <a:p>
             <a:r>
-              <a:rPr lang="en-US" dirty="0">
+              <a:rPr lang="en-US" sz="2600" dirty="0">
                 <a:solidFill>
                   <a:schemeClr val="tx1"/>
                 </a:solidFill>
@@ -5791,7 +6251,7 @@
           </a:p>
           <a:p>
             <a:r>
-              <a:rPr lang="en-US" dirty="0">
+              <a:rPr lang="en-US" sz="2600" dirty="0">
                 <a:solidFill>
                   <a:schemeClr val="tx1"/>
                 </a:solidFill>
@@ -5801,7 +6261,7 @@
           </a:p>
           <a:p>
             <a:r>
-              <a:rPr lang="en-US" dirty="0">
+              <a:rPr lang="en-US" sz="2600" dirty="0">
                 <a:solidFill>
                   <a:schemeClr val="tx1"/>
                 </a:solidFill>
@@ -5811,7 +6271,7 @@
           </a:p>
           <a:p>
             <a:r>
-              <a:rPr lang="en-US" dirty="0">
+              <a:rPr lang="en-US" sz="2600" dirty="0">
                 <a:solidFill>
                   <a:schemeClr val="tx1"/>
                 </a:solidFill>
@@ -5821,7 +6281,7 @@
           </a:p>
           <a:p>
             <a:r>
-              <a:rPr lang="en-US" dirty="0">
+              <a:rPr lang="en-US" sz="2600" dirty="0">
                 <a:solidFill>
                   <a:schemeClr val="tx1"/>
                 </a:solidFill>
@@ -5831,7 +6291,7 @@
           </a:p>
           <a:p>
             <a:r>
-              <a:rPr lang="en-US" dirty="0">
+              <a:rPr lang="en-US" sz="2600" dirty="0">
                 <a:solidFill>
                   <a:schemeClr val="tx1"/>
                 </a:solidFill>
@@ -5851,6 +6311,271 @@
   <p:clrMapOvr>
     <a:masterClrMapping/>
   </p:clrMapOvr>
+  <p:timing>
+    <p:tnLst>
+      <p:par>
+        <p:cTn id="1" dur="indefinite" restart="never" nodeType="tmRoot">
+          <p:childTnLst>
+            <p:seq concurrent="1" nextAc="seek">
+              <p:cTn id="2" dur="indefinite" nodeType="mainSeq">
+                <p:childTnLst>
+                  <p:par>
+                    <p:cTn id="3" fill="hold">
+                      <p:stCondLst>
+                        <p:cond delay="indefinite"/>
+                      </p:stCondLst>
+                      <p:childTnLst>
+                        <p:par>
+                          <p:cTn id="4" fill="hold">
+                            <p:stCondLst>
+                              <p:cond delay="0"/>
+                            </p:stCondLst>
+                            <p:childTnLst>
+                              <p:par>
+                                <p:cTn id="5" presetID="1" presetClass="entr" presetSubtype="0" fill="hold" nodeType="clickEffect">
+                                  <p:stCondLst>
+                                    <p:cond delay="0"/>
+                                  </p:stCondLst>
+                                  <p:childTnLst>
+                                    <p:set>
+                                      <p:cBhvr>
+                                        <p:cTn id="6" dur="1" fill="hold">
+                                          <p:stCondLst>
+                                            <p:cond delay="0"/>
+                                          </p:stCondLst>
+                                        </p:cTn>
+                                        <p:tgtEl>
+                                          <p:spTgt spid="4">
+                                            <p:txEl>
+                                              <p:pRg st="1" end="1"/>
+                                            </p:txEl>
+                                          </p:spTgt>
+                                        </p:tgtEl>
+                                        <p:attrNameLst>
+                                          <p:attrName>style.visibility</p:attrName>
+                                        </p:attrNameLst>
+                                      </p:cBhvr>
+                                      <p:to>
+                                        <p:strVal val="visible"/>
+                                      </p:to>
+                                    </p:set>
+                                  </p:childTnLst>
+                                </p:cTn>
+                              </p:par>
+                              <p:par>
+                                <p:cTn id="7" presetID="1" presetClass="entr" presetSubtype="0" fill="hold" nodeType="withEffect">
+                                  <p:stCondLst>
+                                    <p:cond delay="0"/>
+                                  </p:stCondLst>
+                                  <p:childTnLst>
+                                    <p:set>
+                                      <p:cBhvr>
+                                        <p:cTn id="8" dur="1" fill="hold">
+                                          <p:stCondLst>
+                                            <p:cond delay="0"/>
+                                          </p:stCondLst>
+                                        </p:cTn>
+                                        <p:tgtEl>
+                                          <p:spTgt spid="4">
+                                            <p:txEl>
+                                              <p:pRg st="2" end="2"/>
+                                            </p:txEl>
+                                          </p:spTgt>
+                                        </p:tgtEl>
+                                        <p:attrNameLst>
+                                          <p:attrName>style.visibility</p:attrName>
+                                        </p:attrNameLst>
+                                      </p:cBhvr>
+                                      <p:to>
+                                        <p:strVal val="visible"/>
+                                      </p:to>
+                                    </p:set>
+                                  </p:childTnLst>
+                                </p:cTn>
+                              </p:par>
+                              <p:par>
+                                <p:cTn id="9" presetID="1" presetClass="entr" presetSubtype="0" fill="hold" nodeType="withEffect">
+                                  <p:stCondLst>
+                                    <p:cond delay="0"/>
+                                  </p:stCondLst>
+                                  <p:childTnLst>
+                                    <p:set>
+                                      <p:cBhvr>
+                                        <p:cTn id="10" dur="1" fill="hold">
+                                          <p:stCondLst>
+                                            <p:cond delay="0"/>
+                                          </p:stCondLst>
+                                        </p:cTn>
+                                        <p:tgtEl>
+                                          <p:spTgt spid="4">
+                                            <p:txEl>
+                                              <p:pRg st="3" end="3"/>
+                                            </p:txEl>
+                                          </p:spTgt>
+                                        </p:tgtEl>
+                                        <p:attrNameLst>
+                                          <p:attrName>style.visibility</p:attrName>
+                                        </p:attrNameLst>
+                                      </p:cBhvr>
+                                      <p:to>
+                                        <p:strVal val="visible"/>
+                                      </p:to>
+                                    </p:set>
+                                  </p:childTnLst>
+                                </p:cTn>
+                              </p:par>
+                              <p:par>
+                                <p:cTn id="11" presetID="1" presetClass="entr" presetSubtype="0" fill="hold" nodeType="withEffect">
+                                  <p:stCondLst>
+                                    <p:cond delay="0"/>
+                                  </p:stCondLst>
+                                  <p:childTnLst>
+                                    <p:set>
+                                      <p:cBhvr>
+                                        <p:cTn id="12" dur="1" fill="hold">
+                                          <p:stCondLst>
+                                            <p:cond delay="0"/>
+                                          </p:stCondLst>
+                                        </p:cTn>
+                                        <p:tgtEl>
+                                          <p:spTgt spid="4">
+                                            <p:txEl>
+                                              <p:pRg st="4" end="4"/>
+                                            </p:txEl>
+                                          </p:spTgt>
+                                        </p:tgtEl>
+                                        <p:attrNameLst>
+                                          <p:attrName>style.visibility</p:attrName>
+                                        </p:attrNameLst>
+                                      </p:cBhvr>
+                                      <p:to>
+                                        <p:strVal val="visible"/>
+                                      </p:to>
+                                    </p:set>
+                                  </p:childTnLst>
+                                </p:cTn>
+                              </p:par>
+                              <p:par>
+                                <p:cTn id="13" presetID="1" presetClass="entr" presetSubtype="0" fill="hold" nodeType="withEffect">
+                                  <p:stCondLst>
+                                    <p:cond delay="0"/>
+                                  </p:stCondLst>
+                                  <p:childTnLst>
+                                    <p:set>
+                                      <p:cBhvr>
+                                        <p:cTn id="14" dur="1" fill="hold">
+                                          <p:stCondLst>
+                                            <p:cond delay="0"/>
+                                          </p:stCondLst>
+                                        </p:cTn>
+                                        <p:tgtEl>
+                                          <p:spTgt spid="4">
+                                            <p:txEl>
+                                              <p:pRg st="5" end="5"/>
+                                            </p:txEl>
+                                          </p:spTgt>
+                                        </p:tgtEl>
+                                        <p:attrNameLst>
+                                          <p:attrName>style.visibility</p:attrName>
+                                        </p:attrNameLst>
+                                      </p:cBhvr>
+                                      <p:to>
+                                        <p:strVal val="visible"/>
+                                      </p:to>
+                                    </p:set>
+                                  </p:childTnLst>
+                                </p:cTn>
+                              </p:par>
+                              <p:par>
+                                <p:cTn id="15" presetID="1" presetClass="entr" presetSubtype="0" fill="hold" nodeType="withEffect">
+                                  <p:stCondLst>
+                                    <p:cond delay="0"/>
+                                  </p:stCondLst>
+                                  <p:childTnLst>
+                                    <p:set>
+                                      <p:cBhvr>
+                                        <p:cTn id="16" dur="1" fill="hold">
+                                          <p:stCondLst>
+                                            <p:cond delay="0"/>
+                                          </p:stCondLst>
+                                        </p:cTn>
+                                        <p:tgtEl>
+                                          <p:spTgt spid="4">
+                                            <p:txEl>
+                                              <p:pRg st="6" end="6"/>
+                                            </p:txEl>
+                                          </p:spTgt>
+                                        </p:tgtEl>
+                                        <p:attrNameLst>
+                                          <p:attrName>style.visibility</p:attrName>
+                                        </p:attrNameLst>
+                                      </p:cBhvr>
+                                      <p:to>
+                                        <p:strVal val="visible"/>
+                                      </p:to>
+                                    </p:set>
+                                  </p:childTnLst>
+                                </p:cTn>
+                              </p:par>
+                              <p:par>
+                                <p:cTn id="17" presetID="1" presetClass="entr" presetSubtype="0" fill="hold" nodeType="withEffect">
+                                  <p:stCondLst>
+                                    <p:cond delay="0"/>
+                                  </p:stCondLst>
+                                  <p:childTnLst>
+                                    <p:set>
+                                      <p:cBhvr>
+                                        <p:cTn id="18" dur="1" fill="hold">
+                                          <p:stCondLst>
+                                            <p:cond delay="0"/>
+                                          </p:stCondLst>
+                                        </p:cTn>
+                                        <p:tgtEl>
+                                          <p:spTgt spid="4">
+                                            <p:txEl>
+                                              <p:pRg st="7" end="7"/>
+                                            </p:txEl>
+                                          </p:spTgt>
+                                        </p:tgtEl>
+                                        <p:attrNameLst>
+                                          <p:attrName>style.visibility</p:attrName>
+                                        </p:attrNameLst>
+                                      </p:cBhvr>
+                                      <p:to>
+                                        <p:strVal val="visible"/>
+                                      </p:to>
+                                    </p:set>
+                                  </p:childTnLst>
+                                </p:cTn>
+                              </p:par>
+                            </p:childTnLst>
+                          </p:cTn>
+                        </p:par>
+                      </p:childTnLst>
+                    </p:cTn>
+                  </p:par>
+                </p:childTnLst>
+              </p:cTn>
+              <p:prevCondLst>
+                <p:cond evt="onPrev" delay="0">
+                  <p:tgtEl>
+                    <p:sldTgt/>
+                  </p:tgtEl>
+                </p:cond>
+              </p:prevCondLst>
+              <p:nextCondLst>
+                <p:cond evt="onNext" delay="0">
+                  <p:tgtEl>
+                    <p:sldTgt/>
+                  </p:tgtEl>
+                </p:cond>
+              </p:nextCondLst>
+            </p:seq>
+          </p:childTnLst>
+        </p:cTn>
+      </p:par>
+    </p:tnLst>
+  </p:timing>
 </p:sld>
 </file>
 
@@ -5887,14 +6612,31 @@
             <p:ph type="title"/>
           </p:nvPr>
         </p:nvSpPr>
-        <p:spPr/>
-        <p:txBody>
-          <a:bodyPr/>
-          <a:lstStyle/>
-          <a:p>
-            <a:r>
-              <a:rPr lang="en-US" dirty="0"/>
+        <p:spPr>
+          <a:xfrm>
+            <a:off x="0" y="1123837"/>
+            <a:ext cx="3403076" cy="4601183"/>
+          </a:xfrm>
+        </p:spPr>
+        <p:txBody>
+          <a:bodyPr>
+            <a:normAutofit fontScale="90000"/>
+          </a:bodyPr>
+          <a:lstStyle/>
+          <a:p>
+            <a:r>
+              <a:rPr lang="en-US" sz="4400" dirty="0"/>
               <a:t>Do we consider this sound doctrine?</a:t>
+            </a:r>
+            <a:br>
+              <a:rPr lang="en-US" sz="4400" dirty="0"/>
+            </a:br>
+            <a:br>
+              <a:rPr lang="en-US" sz="4400" dirty="0"/>
+            </a:br>
+            <a:r>
+              <a:rPr lang="en-US" sz="4400" dirty="0"/>
+              <a:t>What does discipleship look like? </a:t>
             </a:r>
           </a:p>
         </p:txBody>
@@ -5917,17 +6659,19 @@
         </p:nvSpPr>
         <p:spPr>
           <a:xfrm>
-            <a:off x="3498574" y="864108"/>
-            <a:ext cx="8269356" cy="5120640"/>
+            <a:off x="3498574" y="141402"/>
+            <a:ext cx="8269356" cy="6513922"/>
           </a:xfrm>
         </p:spPr>
         <p:txBody>
-          <a:bodyPr/>
+          <a:bodyPr>
+            <a:normAutofit/>
+          </a:bodyPr>
           <a:lstStyle/>
           <a:p>
             <a:pPr lvl="0"/>
             <a:r>
-              <a:rPr lang="en-US" dirty="0">
+              <a:rPr lang="en-US" sz="2400" dirty="0">
                 <a:solidFill>
                   <a:schemeClr val="tx1"/>
                 </a:solidFill>
@@ -5938,7 +6682,7 @@
           <a:p>
             <a:pPr lvl="0"/>
             <a:r>
-              <a:rPr lang="en-US" dirty="0">
+              <a:rPr lang="en-US" sz="2400" dirty="0">
                 <a:solidFill>
                   <a:schemeClr val="tx1"/>
                 </a:solidFill>
@@ -5949,7 +6693,7 @@
           <a:p>
             <a:pPr lvl="0"/>
             <a:r>
-              <a:rPr lang="en-US" dirty="0">
+              <a:rPr lang="en-US" sz="2400" dirty="0">
                 <a:solidFill>
                   <a:schemeClr val="tx1"/>
                 </a:solidFill>
@@ -5960,7 +6704,7 @@
           <a:p>
             <a:pPr lvl="0"/>
             <a:r>
-              <a:rPr lang="en-US" dirty="0">
+              <a:rPr lang="en-US" sz="2400" dirty="0">
                 <a:solidFill>
                   <a:schemeClr val="tx1"/>
                 </a:solidFill>
@@ -5971,7 +6715,7 @@
           <a:p>
             <a:pPr lvl="0"/>
             <a:r>
-              <a:rPr lang="en-US" dirty="0">
+              <a:rPr lang="en-US" sz="2400" dirty="0">
                 <a:solidFill>
                   <a:schemeClr val="tx1"/>
                 </a:solidFill>
@@ -5982,7 +6726,7 @@
           <a:p>
             <a:pPr lvl="0"/>
             <a:r>
-              <a:rPr lang="en-US" dirty="0">
+              <a:rPr lang="en-US" sz="2400" dirty="0">
                 <a:solidFill>
                   <a:schemeClr val="tx1"/>
                 </a:solidFill>
@@ -5993,7 +6737,7 @@
           <a:p>
             <a:pPr lvl="0"/>
             <a:r>
-              <a:rPr lang="en-US" dirty="0">
+              <a:rPr lang="en-US" sz="2400" dirty="0">
                 <a:solidFill>
                   <a:schemeClr val="tx1"/>
                 </a:solidFill>
@@ -6004,7 +6748,7 @@
           <a:p>
             <a:pPr lvl="0"/>
             <a:r>
-              <a:rPr lang="en-US" dirty="0">
+              <a:rPr lang="en-US" sz="2400" dirty="0">
                 <a:solidFill>
                   <a:schemeClr val="tx1"/>
                 </a:solidFill>
@@ -6015,7 +6759,7 @@
           <a:p>
             <a:pPr lvl="0"/>
             <a:r>
-              <a:rPr lang="en-US" dirty="0">
+              <a:rPr lang="en-US" sz="2400" dirty="0">
                 <a:solidFill>
                   <a:schemeClr val="tx1"/>
                 </a:solidFill>
@@ -6026,7 +6770,7 @@
           <a:p>
             <a:pPr lvl="0"/>
             <a:r>
-              <a:rPr lang="en-US" dirty="0">
+              <a:rPr lang="en-US" sz="2400" dirty="0">
                 <a:solidFill>
                   <a:schemeClr val="tx1"/>
                 </a:solidFill>
@@ -6082,13 +6826,20 @@
             <p:ph type="title"/>
           </p:nvPr>
         </p:nvSpPr>
-        <p:spPr/>
-        <p:txBody>
-          <a:bodyPr/>
-          <a:lstStyle/>
-          <a:p>
-            <a:r>
-              <a:rPr lang="en-US" dirty="0"/>
+        <p:spPr>
+          <a:xfrm>
+            <a:off x="0" y="1123837"/>
+            <a:ext cx="3412503" cy="4601183"/>
+          </a:xfrm>
+        </p:spPr>
+        <p:txBody>
+          <a:bodyPr>
+            <a:normAutofit/>
+          </a:bodyPr>
+          <a:lstStyle/>
+          <a:p>
+            <a:r>
+              <a:rPr lang="en-US" sz="5400" dirty="0"/>
               <a:t>Why is this important? For all of us?</a:t>
             </a:r>
           </a:p>
@@ -6110,7 +6861,12 @@
             <p:ph idx="1"/>
           </p:nvPr>
         </p:nvSpPr>
-        <p:spPr/>
+        <p:spPr>
+          <a:xfrm>
+            <a:off x="3535052" y="864108"/>
+            <a:ext cx="8210746" cy="5120640"/>
+          </a:xfrm>
+        </p:spPr>
         <p:txBody>
           <a:bodyPr>
             <a:normAutofit/>
@@ -6121,7 +6877,7 @@
               <a:buNone/>
             </a:pPr>
             <a:r>
-              <a:rPr lang="en-US" sz="3600" dirty="0">
+              <a:rPr lang="en-US" sz="4400" dirty="0">
                 <a:solidFill>
                   <a:schemeClr val="tx1"/>
                 </a:solidFill>
@@ -6134,7 +6890,7 @@
               <a:buNone/>
             </a:pPr>
             <a:r>
-              <a:rPr lang="en-US" sz="3600" dirty="0">
+              <a:rPr lang="en-US" sz="4400" dirty="0">
                 <a:solidFill>
                   <a:schemeClr val="tx1"/>
                 </a:solidFill>
@@ -6154,6 +6910,116 @@
   <p:clrMapOvr>
     <a:masterClrMapping/>
   </p:clrMapOvr>
+  <p:timing>
+    <p:tnLst>
+      <p:par>
+        <p:cTn id="1" dur="indefinite" restart="never" nodeType="tmRoot">
+          <p:childTnLst>
+            <p:seq concurrent="1" nextAc="seek">
+              <p:cTn id="2" dur="indefinite" nodeType="mainSeq">
+                <p:childTnLst>
+                  <p:par>
+                    <p:cTn id="3" fill="hold">
+                      <p:stCondLst>
+                        <p:cond delay="indefinite"/>
+                      </p:stCondLst>
+                      <p:childTnLst>
+                        <p:par>
+                          <p:cTn id="4" fill="hold">
+                            <p:stCondLst>
+                              <p:cond delay="0"/>
+                            </p:stCondLst>
+                            <p:childTnLst>
+                              <p:par>
+                                <p:cTn id="5" presetID="1" presetClass="entr" presetSubtype="0" fill="hold" nodeType="clickEffect">
+                                  <p:stCondLst>
+                                    <p:cond delay="0"/>
+                                  </p:stCondLst>
+                                  <p:childTnLst>
+                                    <p:set>
+                                      <p:cBhvr>
+                                        <p:cTn id="6" dur="1" fill="hold">
+                                          <p:stCondLst>
+                                            <p:cond delay="0"/>
+                                          </p:stCondLst>
+                                        </p:cTn>
+                                        <p:tgtEl>
+                                          <p:spTgt spid="3">
+                                            <p:txEl>
+                                              <p:pRg st="0" end="0"/>
+                                            </p:txEl>
+                                          </p:spTgt>
+                                        </p:tgtEl>
+                                        <p:attrNameLst>
+                                          <p:attrName>style.visibility</p:attrName>
+                                        </p:attrNameLst>
+                                      </p:cBhvr>
+                                      <p:to>
+                                        <p:strVal val="visible"/>
+                                      </p:to>
+                                    </p:set>
+                                  </p:childTnLst>
+                                </p:cTn>
+                              </p:par>
+                              <p:par>
+                                <p:cTn id="7" presetID="1" presetClass="entr" presetSubtype="0" fill="hold" nodeType="withEffect">
+                                  <p:stCondLst>
+                                    <p:cond delay="0"/>
+                                  </p:stCondLst>
+                                  <p:childTnLst>
+                                    <p:set>
+                                      <p:cBhvr>
+                                        <p:cTn id="8" dur="1" fill="hold">
+                                          <p:stCondLst>
+                                            <p:cond delay="0"/>
+                                          </p:stCondLst>
+                                        </p:cTn>
+                                        <p:tgtEl>
+                                          <p:spTgt spid="3">
+                                            <p:txEl>
+                                              <p:pRg st="1" end="1"/>
+                                            </p:txEl>
+                                          </p:spTgt>
+                                        </p:tgtEl>
+                                        <p:attrNameLst>
+                                          <p:attrName>style.visibility</p:attrName>
+                                        </p:attrNameLst>
+                                      </p:cBhvr>
+                                      <p:to>
+                                        <p:strVal val="visible"/>
+                                      </p:to>
+                                    </p:set>
+                                  </p:childTnLst>
+                                </p:cTn>
+                              </p:par>
+                            </p:childTnLst>
+                          </p:cTn>
+                        </p:par>
+                      </p:childTnLst>
+                    </p:cTn>
+                  </p:par>
+                </p:childTnLst>
+              </p:cTn>
+              <p:prevCondLst>
+                <p:cond evt="onPrev" delay="0">
+                  <p:tgtEl>
+                    <p:sldTgt/>
+                  </p:tgtEl>
+                </p:cond>
+              </p:prevCondLst>
+              <p:nextCondLst>
+                <p:cond evt="onNext" delay="0">
+                  <p:tgtEl>
+                    <p:sldTgt/>
+                  </p:tgtEl>
+                </p:cond>
+              </p:nextCondLst>
+            </p:seq>
+          </p:childTnLst>
+        </p:cTn>
+      </p:par>
+    </p:tnLst>
+  </p:timing>
 </p:sld>
 </file>
 
@@ -6192,11 +7058,13 @@
         </p:nvSpPr>
         <p:spPr/>
         <p:txBody>
-          <a:bodyPr/>
-          <a:lstStyle/>
-          <a:p>
-            <a:r>
-              <a:rPr lang="en-US" dirty="0"/>
+          <a:bodyPr>
+            <a:normAutofit/>
+          </a:bodyPr>
+          <a:lstStyle/>
+          <a:p>
+            <a:r>
+              <a:rPr lang="en-US" sz="5400" dirty="0"/>
               <a:t>Table Talk</a:t>
             </a:r>
           </a:p>
@@ -6218,7 +7086,12 @@
             <p:ph idx="1"/>
           </p:nvPr>
         </p:nvSpPr>
-        <p:spPr/>
+        <p:spPr>
+          <a:xfrm>
+            <a:off x="3478491" y="725864"/>
+            <a:ext cx="8314441" cy="5533534"/>
+          </a:xfrm>
+        </p:spPr>
         <p:txBody>
           <a:bodyPr>
             <a:normAutofit/>
@@ -6229,7 +7102,7 @@
               <a:buNone/>
             </a:pPr>
             <a:r>
-              <a:rPr lang="en-US" sz="3600" dirty="0">
+              <a:rPr lang="en-US" sz="4000" dirty="0">
                 <a:solidFill>
                   <a:schemeClr val="tx1"/>
                 </a:solidFill>

--- a/lessons/gospel-alignment.pptx
+++ b/lessons/gospel-alignment.pptx
@@ -205,7 +205,7 @@
           <a:p>
             <a:fld id="{EF9F416A-214E-404F-AD5A-1BF62BB89116}" type="datetimeFigureOut">
               <a:rPr lang="en-US" smtClean="0"/>
-              <a:t>8/23/2026</a:t>
+              <a:t>8/26/2026</a:t>
             </a:fld>
             <a:endParaRPr lang="en-US"/>
           </a:p>
@@ -1553,7 +1553,7 @@
           <a:p>
             <a:fld id="{3AB151B6-AC67-475C-A2E7-57C5D004DB52}" type="datetimeFigureOut">
               <a:rPr lang="en-US" smtClean="0"/>
-              <a:t>8/23/2026</a:t>
+              <a:t>8/26/2026</a:t>
             </a:fld>
             <a:endParaRPr lang="en-US"/>
           </a:p>
@@ -1723,7 +1723,7 @@
           <a:p>
             <a:fld id="{3AB151B6-AC67-475C-A2E7-57C5D004DB52}" type="datetimeFigureOut">
               <a:rPr lang="en-US" smtClean="0"/>
-              <a:t>8/23/2026</a:t>
+              <a:t>8/26/2026</a:t>
             </a:fld>
             <a:endParaRPr lang="en-US"/>
           </a:p>
@@ -1903,7 +1903,7 @@
           <a:p>
             <a:fld id="{3AB151B6-AC67-475C-A2E7-57C5D004DB52}" type="datetimeFigureOut">
               <a:rPr lang="en-US" smtClean="0"/>
-              <a:t>8/23/2026</a:t>
+              <a:t>8/26/2026</a:t>
             </a:fld>
             <a:endParaRPr lang="en-US"/>
           </a:p>
@@ -2073,7 +2073,7 @@
           <a:p>
             <a:fld id="{3AB151B6-AC67-475C-A2E7-57C5D004DB52}" type="datetimeFigureOut">
               <a:rPr lang="en-US" smtClean="0"/>
-              <a:t>8/23/2026</a:t>
+              <a:t>8/26/2026</a:t>
             </a:fld>
             <a:endParaRPr lang="en-US"/>
           </a:p>
@@ -2331,7 +2331,7 @@
           <a:p>
             <a:fld id="{3AB151B6-AC67-475C-A2E7-57C5D004DB52}" type="datetimeFigureOut">
               <a:rPr lang="en-US" smtClean="0"/>
-              <a:t>8/23/2026</a:t>
+              <a:t>8/26/2026</a:t>
             </a:fld>
             <a:endParaRPr lang="en-US"/>
           </a:p>
@@ -2619,7 +2619,7 @@
           <a:p>
             <a:fld id="{3AB151B6-AC67-475C-A2E7-57C5D004DB52}" type="datetimeFigureOut">
               <a:rPr lang="en-US" smtClean="0"/>
-              <a:t>8/23/2026</a:t>
+              <a:t>8/26/2026</a:t>
             </a:fld>
             <a:endParaRPr lang="en-US"/>
           </a:p>
@@ -3061,7 +3061,7 @@
           <a:p>
             <a:fld id="{3AB151B6-AC67-475C-A2E7-57C5D004DB52}" type="datetimeFigureOut">
               <a:rPr lang="en-US" smtClean="0"/>
-              <a:t>8/23/2026</a:t>
+              <a:t>8/26/2026</a:t>
             </a:fld>
             <a:endParaRPr lang="en-US"/>
           </a:p>
@@ -3179,7 +3179,7 @@
           <a:p>
             <a:fld id="{3AB151B6-AC67-475C-A2E7-57C5D004DB52}" type="datetimeFigureOut">
               <a:rPr lang="en-US" smtClean="0"/>
-              <a:t>8/23/2026</a:t>
+              <a:t>8/26/2026</a:t>
             </a:fld>
             <a:endParaRPr lang="en-US"/>
           </a:p>
@@ -3274,7 +3274,7 @@
           <a:p>
             <a:fld id="{3AB151B6-AC67-475C-A2E7-57C5D004DB52}" type="datetimeFigureOut">
               <a:rPr lang="en-US" smtClean="0"/>
-              <a:t>8/23/2026</a:t>
+              <a:t>8/26/2026</a:t>
             </a:fld>
             <a:endParaRPr lang="en-US"/>
           </a:p>
@@ -3562,7 +3562,7 @@
           <a:p>
             <a:fld id="{3AB151B6-AC67-475C-A2E7-57C5D004DB52}" type="datetimeFigureOut">
               <a:rPr lang="en-US" smtClean="0"/>
-              <a:t>8/23/2026</a:t>
+              <a:t>8/26/2026</a:t>
             </a:fld>
             <a:endParaRPr lang="en-US"/>
           </a:p>
@@ -3835,7 +3835,7 @@
           <a:p>
             <a:fld id="{3AB151B6-AC67-475C-A2E7-57C5D004DB52}" type="datetimeFigureOut">
               <a:rPr lang="en-US" smtClean="0"/>
-              <a:t>8/23/2026</a:t>
+              <a:t>8/26/2026</a:t>
             </a:fld>
             <a:endParaRPr lang="en-US"/>
           </a:p>
@@ -4146,7 +4146,7 @@
           <a:p>
             <a:fld id="{3AB151B6-AC67-475C-A2E7-57C5D004DB52}" type="datetimeFigureOut">
               <a:rPr lang="en-US" smtClean="0"/>
-              <a:t>8/23/2026</a:t>
+              <a:t>8/26/2026</a:t>
             </a:fld>
             <a:endParaRPr lang="en-US"/>
           </a:p>
